--- a/reports/svg_icon_agent_demo_zh.pptx
+++ b/reports/svg_icon_agent_demo_zh.pptx
@@ -1039,7 +1039,7 @@
           <a:p>
             <a:r>
               <a:rPr lang="en-US" dirty="0"/>
-              <a:t>协同生成这一页用 rocket run 举例。模型先生成三个候选，三个候选都通过了本地工具检查，但语义和 SVG 质量分不同。Semantic Critic 更喜欢 candidate 2，SVG Quality Critic 更喜欢 candidate 3。Selector 最后选择 candidate 2，因为它在 prompt 对齐、动态火焰和小尺寸可读性上最平衡。这个过程让选择有理由，而不是随机取第一张。</a:t>
+              <a:t>协同生成这一页用 rocket run 举例。模型先生成三个候选，三个候选都通过了本地工具检查。这里我放了脱敏日志里的两段摘录：Prompt Rewriter 把原始 prompt 扩写成 256x256、居中火箭、分层动态火焰；Selector 的原始输出说明 candidate 2 同时有最高语义分和 SVG 质量分。这个过程让选择有证据，而不是随机取第一张。</a:t>
             </a:r>
             <a:endParaRPr lang="en-US" dirty="0"/>
           </a:p>
@@ -1127,7 +1127,7 @@
           <a:p>
             <a:r>
               <a:rPr lang="en-US" dirty="0"/>
-              <a:t>自我修复机制用 coffee 案例说明。优化后的 baseline 因为颜色不符合计划，被 Validator 判为 invalid，分数 70。Failure Taxonomy 把问题归类为 semantic mismatch 和 constraint violation，Repair Router 选择 semantic recompose 路线，要求把蓝色杯体替换回咖啡色 palette，并去掉 opacity。Refiner 根据这个 brief 返回完整 SVG，最后验证分数提升到 95。</a:t>
+              <a:t>自我修复机制用 coffee 案例说明。优化后的 baseline 因为颜色不符合计划，被 Validator 判为 invalid，分数 70。PPT 中放了日志摘录：Failure Taxonomy 把问题归类为 semantic mismatch 和 constraint violation；Repair Router 选择 semantic_recompose，并给出替换颜色、移除 opacity 的 ordered actions。Refiner 根据这个 brief 返回完整 SVG，然后 re-validate，最后分数提升到 95。</a:t>
             </a:r>
             <a:endParaRPr lang="en-US" dirty="0"/>
           </a:p>
@@ -2761,8 +2761,8 @@
         </p:nvSpPr>
         <p:spPr>
           <a:xfrm>
-            <a:off x="777240" y="1234440"/>
-            <a:ext cx="3337560" cy="3657600"/>
+            <a:off x="777240" y="1143000"/>
+            <a:ext cx="3337560" cy="3749040"/>
           </a:xfrm>
           <a:prstGeom prst="roundRect">
             <a:avLst>
@@ -2788,8 +2788,8 @@
         </p:nvSpPr>
         <p:spPr>
           <a:xfrm>
-            <a:off x="777240" y="1234440"/>
-            <a:ext cx="73152" cy="3657600"/>
+            <a:off x="777240" y="1143000"/>
+            <a:ext cx="73152" cy="3749040"/>
           </a:xfrm>
           <a:prstGeom prst="rect">
             <a:avLst/>
@@ -2813,7 +2813,7 @@
         </p:nvSpPr>
         <p:spPr>
           <a:xfrm>
-            <a:off x="978408" y="1399032"/>
+            <a:off x="978408" y="1307592"/>
             <a:ext cx="3017520" cy="201168"/>
           </a:xfrm>
           <a:prstGeom prst="rect">
@@ -2854,8 +2854,8 @@
         </p:nvSpPr>
         <p:spPr>
           <a:xfrm>
-            <a:off x="978408" y="1709928"/>
-            <a:ext cx="3017520" cy="3090672"/>
+            <a:off x="978408" y="1618488"/>
+            <a:ext cx="3017520" cy="3182112"/>
           </a:xfrm>
           <a:prstGeom prst="rect">
             <a:avLst/>
@@ -2953,6 +2953,23 @@
             </a:r>
             <a:endParaRPr lang="en-US" sz="820" dirty="0"/>
           </a:p>
+          <a:p>
+            <a:pPr indent="0" marL="0">
+              <a:buNone/>
+            </a:pPr>
+            <a:r>
+              <a:rPr lang="en-US" sz="820" dirty="0">
+                <a:solidFill>
+                  <a:srgbClr val="667085"/>
+                </a:solidFill>
+                <a:latin typeface="PingFang SC" pitchFamily="34" charset="0"/>
+                <a:ea typeface="PingFang SC" pitchFamily="34" charset="-122"/>
+                <a:cs typeface="PingFang SC" pitchFamily="34" charset="-120"/>
+              </a:rPr>
+              <a:t>• 脱敏 raw response 支持 debug</a:t>
+            </a:r>
+            <a:endParaRPr lang="en-US" sz="820" dirty="0"/>
+          </a:p>
         </p:txBody>
       </p:sp>
       <p:sp>
@@ -2963,8 +2980,8 @@
         </p:nvSpPr>
         <p:spPr>
           <a:xfrm>
-            <a:off x="4434840" y="1234440"/>
-            <a:ext cx="3337560" cy="3657600"/>
+            <a:off x="4434840" y="1143000"/>
+            <a:ext cx="3337560" cy="3749040"/>
           </a:xfrm>
           <a:prstGeom prst="roundRect">
             <a:avLst>
@@ -2990,8 +3007,8 @@
         </p:nvSpPr>
         <p:spPr>
           <a:xfrm>
-            <a:off x="4434840" y="1234440"/>
-            <a:ext cx="73152" cy="3657600"/>
+            <a:off x="4434840" y="1143000"/>
+            <a:ext cx="73152" cy="3749040"/>
           </a:xfrm>
           <a:prstGeom prst="rect">
             <a:avLst/>
@@ -3015,7 +3032,7 @@
         </p:nvSpPr>
         <p:spPr>
           <a:xfrm>
-            <a:off x="4636008" y="1399032"/>
+            <a:off x="4636008" y="1307592"/>
             <a:ext cx="3017520" cy="201168"/>
           </a:xfrm>
           <a:prstGeom prst="rect">
@@ -3056,8 +3073,8 @@
         </p:nvSpPr>
         <p:spPr>
           <a:xfrm>
-            <a:off x="4636008" y="1709928"/>
-            <a:ext cx="3017520" cy="3090672"/>
+            <a:off x="4636008" y="1618488"/>
+            <a:ext cx="3017520" cy="3182112"/>
           </a:xfrm>
           <a:prstGeom prst="rect">
             <a:avLst/>
@@ -3100,7 +3117,7 @@
                 <a:ea typeface="PingFang SC" pitchFamily="34" charset="-122"/>
                 <a:cs typeface="PingFang SC" pitchFamily="34" charset="-120"/>
               </a:rPr>
-              <a:t>• SVG renderer 支持的是实用子集</a:t>
+              <a:t>• SVG renderer 支持实用子集</a:t>
             </a:r>
             <a:endParaRPr lang="en-US" sz="820" dirty="0"/>
           </a:p>
@@ -3138,6 +3155,23 @@
             </a:r>
             <a:endParaRPr lang="en-US" sz="820" dirty="0"/>
           </a:p>
+          <a:p>
+            <a:pPr indent="0" marL="0">
+              <a:buNone/>
+            </a:pPr>
+            <a:r>
+              <a:rPr lang="en-US" sz="820" dirty="0">
+                <a:solidFill>
+                  <a:srgbClr val="667085"/>
+                </a:solidFill>
+                <a:latin typeface="PingFang SC" pitchFamily="34" charset="0"/>
+                <a:ea typeface="PingFang SC" pitchFamily="34" charset="-122"/>
+                <a:cs typeface="PingFang SC" pitchFamily="34" charset="-120"/>
+              </a:rPr>
+              <a:t>• raw LLM 输出偶尔 malformed，需要 retry</a:t>
+            </a:r>
+            <a:endParaRPr lang="en-US" sz="820" dirty="0"/>
+          </a:p>
         </p:txBody>
       </p:sp>
       <p:sp>
@@ -3148,8 +3182,8 @@
         </p:nvSpPr>
         <p:spPr>
           <a:xfrm>
-            <a:off x="8092440" y="1234440"/>
-            <a:ext cx="3337560" cy="3657600"/>
+            <a:off x="8092440" y="1143000"/>
+            <a:ext cx="3337560" cy="3749040"/>
           </a:xfrm>
           <a:prstGeom prst="roundRect">
             <a:avLst>
@@ -3175,8 +3209,8 @@
         </p:nvSpPr>
         <p:spPr>
           <a:xfrm>
-            <a:off x="8092440" y="1234440"/>
-            <a:ext cx="73152" cy="3657600"/>
+            <a:off x="8092440" y="1143000"/>
+            <a:ext cx="73152" cy="3749040"/>
           </a:xfrm>
           <a:prstGeom prst="rect">
             <a:avLst/>
@@ -3200,7 +3234,7 @@
         </p:nvSpPr>
         <p:spPr>
           <a:xfrm>
-            <a:off x="8293608" y="1399032"/>
+            <a:off x="8293608" y="1307592"/>
             <a:ext cx="3017520" cy="201168"/>
           </a:xfrm>
           <a:prstGeom prst="rect">
@@ -3241,8 +3275,8 @@
         </p:nvSpPr>
         <p:spPr>
           <a:xfrm>
-            <a:off x="8293608" y="1709928"/>
-            <a:ext cx="3017520" cy="3090672"/>
+            <a:off x="8293608" y="1618488"/>
+            <a:ext cx="3017520" cy="3182112"/>
           </a:xfrm>
           <a:prstGeom prst="rect">
             <a:avLst/>
@@ -3337,6 +3371,23 @@
                 <a:cs typeface="PingFang SC" pitchFamily="34" charset="-120"/>
               </a:rPr>
               <a:t>• 更细的 SVG grammar</a:t>
+            </a:r>
+            <a:endParaRPr lang="en-US" sz="820" dirty="0"/>
+          </a:p>
+          <a:p>
+            <a:pPr indent="0" marL="0">
+              <a:buNone/>
+            </a:pPr>
+            <a:r>
+              <a:rPr lang="en-US" sz="820" dirty="0">
+                <a:solidFill>
+                  <a:srgbClr val="667085"/>
+                </a:solidFill>
+                <a:latin typeface="PingFang SC" pitchFamily="34" charset="0"/>
+                <a:ea typeface="PingFang SC" pitchFamily="34" charset="-122"/>
+                <a:cs typeface="PingFang SC" pitchFamily="34" charset="-120"/>
+              </a:rPr>
+              <a:t>• 对 failure route 做量化评估</a:t>
             </a:r>
             <a:endParaRPr lang="en-US" sz="820" dirty="0"/>
           </a:p>
@@ -3606,8 +3657,8 @@
         </p:nvSpPr>
         <p:spPr>
           <a:xfrm>
-            <a:off x="685800" y="1298448"/>
-            <a:ext cx="3246120" cy="4069080"/>
+            <a:off x="685800" y="1170432"/>
+            <a:ext cx="3246120" cy="3429000"/>
           </a:xfrm>
           <a:prstGeom prst="roundRect">
             <a:avLst>
@@ -3633,8 +3684,8 @@
         </p:nvSpPr>
         <p:spPr>
           <a:xfrm>
-            <a:off x="685800" y="1298448"/>
-            <a:ext cx="73152" cy="4069080"/>
+            <a:off x="685800" y="1170432"/>
+            <a:ext cx="73152" cy="3429000"/>
           </a:xfrm>
           <a:prstGeom prst="rect">
             <a:avLst/>
@@ -3658,7 +3709,7 @@
         </p:nvSpPr>
         <p:spPr>
           <a:xfrm>
-            <a:off x="886968" y="1463040"/>
+            <a:off x="886968" y="1335024"/>
             <a:ext cx="2926080" cy="201168"/>
           </a:xfrm>
           <a:prstGeom prst="rect">
@@ -3699,8 +3750,8 @@
         </p:nvSpPr>
         <p:spPr>
           <a:xfrm>
-            <a:off x="886968" y="1773936"/>
-            <a:ext cx="2926080" cy="3502152"/>
+            <a:off x="886968" y="1645920"/>
+            <a:ext cx="2926080" cy="2862072"/>
           </a:xfrm>
           <a:prstGeom prst="rect">
             <a:avLst/>
@@ -3743,7 +3794,7 @@
                 <a:ea typeface="PingFang SC" pitchFamily="34" charset="-122"/>
                 <a:cs typeface="PingFang SC" pitchFamily="34" charset="-120"/>
               </a:rPr>
-              <a:t>• 结构不可编辑</a:t>
+              <a:t>• 结构不可编辑，难以复用</a:t>
             </a:r>
             <a:endParaRPr lang="en-US" sz="820" dirty="0"/>
           </a:p>
@@ -3760,7 +3811,7 @@
                 <a:ea typeface="PingFang SC" pitchFamily="34" charset="-122"/>
                 <a:cs typeface="PingFang SC" pitchFamily="34" charset="-120"/>
               </a:rPr>
-              <a:t>• 很难做安全检查</a:t>
+              <a:t>• 无法直接检查 XML / viewBox</a:t>
             </a:r>
             <a:endParaRPr lang="en-US" sz="820" dirty="0"/>
           </a:p>
@@ -3777,7 +3828,7 @@
                 <a:ea typeface="PingFang SC" pitchFamily="34" charset="-122"/>
                 <a:cs typeface="PingFang SC" pitchFamily="34" charset="-120"/>
               </a:rPr>
-              <a:t>• 失败原因不可追踪</a:t>
+              <a:t>• 失败后只能重新采样</a:t>
             </a:r>
             <a:endParaRPr lang="en-US" sz="820" dirty="0"/>
           </a:p>
@@ -3794,7 +3845,7 @@
                 <a:ea typeface="PingFang SC" pitchFamily="34" charset="-122"/>
                 <a:cs typeface="PingFang SC" pitchFamily="34" charset="-120"/>
               </a:rPr>
-              <a:t>• 不适合展示图形规则约束</a:t>
+              <a:t>• 难展示 Agent 之间的决策证据</a:t>
             </a:r>
             <a:endParaRPr lang="en-US" sz="820" dirty="0"/>
           </a:p>
@@ -3808,8 +3859,8 @@
         </p:nvSpPr>
         <p:spPr>
           <a:xfrm>
-            <a:off x="4434840" y="1298448"/>
-            <a:ext cx="3246120" cy="4069080"/>
+            <a:off x="4434840" y="1170432"/>
+            <a:ext cx="3246120" cy="3429000"/>
           </a:xfrm>
           <a:prstGeom prst="roundRect">
             <a:avLst>
@@ -3835,8 +3886,8 @@
         </p:nvSpPr>
         <p:spPr>
           <a:xfrm>
-            <a:off x="4434840" y="1298448"/>
-            <a:ext cx="73152" cy="4069080"/>
+            <a:off x="4434840" y="1170432"/>
+            <a:ext cx="73152" cy="3429000"/>
           </a:xfrm>
           <a:prstGeom prst="rect">
             <a:avLst/>
@@ -3860,7 +3911,7 @@
         </p:nvSpPr>
         <p:spPr>
           <a:xfrm>
-            <a:off x="4636008" y="1463040"/>
+            <a:off x="4636008" y="1335024"/>
             <a:ext cx="2926080" cy="201168"/>
           </a:xfrm>
           <a:prstGeom prst="rect">
@@ -3901,8 +3952,8 @@
         </p:nvSpPr>
         <p:spPr>
           <a:xfrm>
-            <a:off x="4636008" y="1773936"/>
-            <a:ext cx="2926080" cy="3502152"/>
+            <a:off x="4636008" y="1645920"/>
+            <a:ext cx="2926080" cy="2862072"/>
           </a:xfrm>
           <a:prstGeom prst="rect">
             <a:avLst/>
@@ -3945,7 +3996,7 @@
                 <a:ea typeface="PingFang SC" pitchFamily="34" charset="-122"/>
                 <a:cs typeface="PingFang SC" pitchFamily="34" charset="-120"/>
               </a:rPr>
-              <a:t>• 可缩放、可编辑</a:t>
+              <a:t>• 可缩放、可编辑、可 diff</a:t>
             </a:r>
             <a:endParaRPr lang="en-US" sz="820" dirty="0"/>
           </a:p>
@@ -3962,7 +4013,7 @@
                 <a:ea typeface="PingFang SC" pitchFamily="34" charset="-122"/>
                 <a:cs typeface="PingFang SC" pitchFamily="34" charset="-120"/>
               </a:rPr>
-              <a:t>• 可检查 viewBox / 标签 / 属性</a:t>
+              <a:t>• 可检查标签、属性和安全性</a:t>
             </a:r>
             <a:endParaRPr lang="en-US" sz="820" dirty="0"/>
           </a:p>
@@ -3979,7 +4030,7 @@
                 <a:ea typeface="PingFang SC" pitchFamily="34" charset="-122"/>
                 <a:cs typeface="PingFang SC" pitchFamily="34" charset="-120"/>
               </a:rPr>
-              <a:t>• 可转 PNG 预览</a:t>
+              <a:t>• 可转 PNG 预览，保留源 SVG</a:t>
             </a:r>
             <a:endParaRPr lang="en-US" sz="820" dirty="0"/>
           </a:p>
@@ -3996,7 +4047,7 @@
                 <a:ea typeface="PingFang SC" pitchFamily="34" charset="-122"/>
                 <a:cs typeface="PingFang SC" pitchFamily="34" charset="-120"/>
               </a:rPr>
-              <a:t>• 适合 UI icon 场景</a:t>
+              <a:t>• 适合 UI icon 和课程图形约束</a:t>
             </a:r>
             <a:endParaRPr lang="en-US" sz="820" dirty="0"/>
           </a:p>
@@ -4010,8 +4061,8 @@
         </p:nvSpPr>
         <p:spPr>
           <a:xfrm>
-            <a:off x="8183880" y="1298448"/>
-            <a:ext cx="3246120" cy="4069080"/>
+            <a:off x="8183880" y="1170432"/>
+            <a:ext cx="3246120" cy="3429000"/>
           </a:xfrm>
           <a:prstGeom prst="roundRect">
             <a:avLst>
@@ -4037,8 +4088,8 @@
         </p:nvSpPr>
         <p:spPr>
           <a:xfrm>
-            <a:off x="8183880" y="1298448"/>
-            <a:ext cx="73152" cy="4069080"/>
+            <a:off x="8183880" y="1170432"/>
+            <a:ext cx="73152" cy="3429000"/>
           </a:xfrm>
           <a:prstGeom prst="rect">
             <a:avLst/>
@@ -4062,7 +4113,7 @@
         </p:nvSpPr>
         <p:spPr>
           <a:xfrm>
-            <a:off x="8385048" y="1463040"/>
+            <a:off x="8385048" y="1335024"/>
             <a:ext cx="2926080" cy="201168"/>
           </a:xfrm>
           <a:prstGeom prst="rect">
@@ -4103,8 +4154,8 @@
         </p:nvSpPr>
         <p:spPr>
           <a:xfrm>
-            <a:off x="8385048" y="1773936"/>
-            <a:ext cx="2926080" cy="3502152"/>
+            <a:off x="8385048" y="1645920"/>
+            <a:ext cx="2926080" cy="2862072"/>
           </a:xfrm>
           <a:prstGeom prst="rect">
             <a:avLst/>
@@ -4130,7 +4181,7 @@
                 <a:ea typeface="PingFang SC" pitchFamily="34" charset="-122"/>
                 <a:cs typeface="PingFang SC" pitchFamily="34" charset="-120"/>
               </a:rPr>
-              <a:t>• 把创意生成拆成多个职责</a:t>
+              <a:t>• 将创意任务拆为明确职责</a:t>
             </a:r>
             <a:endParaRPr lang="en-US" sz="820" dirty="0"/>
           </a:p>
@@ -4164,7 +4215,7 @@
                 <a:ea typeface="PingFang SC" pitchFamily="34" charset="-122"/>
                 <a:cs typeface="PingFang SC" pitchFamily="34" charset="-120"/>
               </a:rPr>
-              <a:t>• 显式 diagnosis 和 repair route</a:t>
+              <a:t>• Selector 给出选择理由</a:t>
             </a:r>
             <a:endParaRPr lang="en-US" sz="820" dirty="0"/>
           </a:p>
@@ -4181,7 +4232,7 @@
                 <a:ea typeface="PingFang SC" pitchFamily="34" charset="-122"/>
                 <a:cs typeface="PingFang SC" pitchFamily="34" charset="-120"/>
               </a:rPr>
-              <a:t>• 运行过程可视化</a:t>
+              <a:t>• Taxonomy / Router 给出修复路线</a:t>
             </a:r>
             <a:endParaRPr lang="en-US" sz="820" dirty="0"/>
           </a:p>
@@ -4198,7 +4249,7 @@
                 <a:ea typeface="PingFang SC" pitchFamily="34" charset="-122"/>
                 <a:cs typeface="PingFang SC" pitchFamily="34" charset="-120"/>
               </a:rPr>
-              <a:t>• 结果与失败都可复盘</a:t>
+              <a:t>• Web DAG 让过程可展示</a:t>
             </a:r>
             <a:endParaRPr lang="en-US" sz="820" dirty="0"/>
           </a:p>
@@ -4206,7 +4257,116 @@
       </p:sp>
       <p:sp>
         <p:nvSpPr>
-          <p:cNvPr id="17" name="Text 15"/>
+          <p:cNvPr id="17" name="Shape 15"/>
+          <p:cNvSpPr/>
+          <p:nvPr/>
+        </p:nvSpPr>
+        <p:spPr>
+          <a:xfrm>
+            <a:off x="914400" y="4828032"/>
+            <a:ext cx="10424160" cy="713232"/>
+          </a:xfrm>
+          <a:prstGeom prst="roundRect">
+            <a:avLst>
+              <a:gd name="adj" fmla="val 7692"/>
+            </a:avLst>
+          </a:prstGeom>
+          <a:solidFill>
+            <a:srgbClr val="F8FAFC"/>
+          </a:solidFill>
+          <a:ln w="12700">
+            <a:solidFill>
+              <a:srgbClr val="7C3AED"/>
+            </a:solidFill>
+            <a:prstDash val="solid"/>
+          </a:ln>
+        </p:spPr>
+      </p:sp>
+      <p:sp>
+        <p:nvSpPr>
+          <p:cNvPr id="18" name="Text 16"/>
+          <p:cNvSpPr/>
+          <p:nvPr/>
+        </p:nvSpPr>
+        <p:spPr>
+          <a:xfrm>
+            <a:off x="1042416" y="4937760"/>
+            <a:ext cx="10168128" cy="164592"/>
+          </a:xfrm>
+          <a:prstGeom prst="rect">
+            <a:avLst/>
+          </a:prstGeom>
+          <a:noFill/>
+          <a:ln/>
+        </p:spPr>
+        <p:txBody>
+          <a:bodyPr wrap="square" lIns="0" tIns="0" rIns="0" bIns="0" rtlCol="0" anchor="ctr">
+            <a:normAutofit/>
+          </a:bodyPr>
+          <a:lstStyle/>
+          <a:p>
+            <a:pPr indent="0" marL="0">
+              <a:buNone/>
+            </a:pPr>
+            <a:r>
+              <a:rPr lang="en-US" sz="770" b="1" dirty="0">
+                <a:solidFill>
+                  <a:srgbClr val="7C3AED"/>
+                </a:solidFill>
+                <a:latin typeface="PingFang SC" pitchFamily="34" charset="0"/>
+                <a:ea typeface="PingFang SC" pitchFamily="34" charset="-122"/>
+                <a:cs typeface="PingFang SC" pitchFamily="34" charset="-120"/>
+              </a:rPr>
+              <a:t>本项目定位</a:t>
+            </a:r>
+            <a:endParaRPr lang="en-US" sz="770" dirty="0"/>
+          </a:p>
+        </p:txBody>
+      </p:sp>
+      <p:sp>
+        <p:nvSpPr>
+          <p:cNvPr id="19" name="Text 17"/>
+          <p:cNvSpPr/>
+          <p:nvPr/>
+        </p:nvSpPr>
+        <p:spPr>
+          <a:xfrm>
+            <a:off x="1042416" y="5157216"/>
+            <a:ext cx="10168128" cy="329184"/>
+          </a:xfrm>
+          <a:prstGeom prst="rect">
+            <a:avLst/>
+          </a:prstGeom>
+          <a:noFill/>
+          <a:ln/>
+        </p:spPr>
+        <p:txBody>
+          <a:bodyPr wrap="square" lIns="127" tIns="127" rIns="127" bIns="127" rtlCol="0" anchor="t">
+            <a:normAutofit/>
+          </a:bodyPr>
+          <a:lstStyle/>
+          <a:p>
+            <a:pPr indent="0" marL="0">
+              <a:buNone/>
+            </a:pPr>
+            <a:r>
+              <a:rPr lang="en-US" sz="710" dirty="0">
+                <a:solidFill>
+                  <a:srgbClr val="172033"/>
+                </a:solidFill>
+                <a:latin typeface="PingFang SC" pitchFamily="34" charset="0"/>
+                <a:ea typeface="PingFang SC" pitchFamily="34" charset="-122"/>
+                <a:cs typeface="PingFang SC" pitchFamily="34" charset="-120"/>
+              </a:rPr>
+              <a:t>不是训练大图像模型，而是实践“LLM Agent 协作 + SVG 规则工具 + 可编辑图形产物”。评分重点可落在生成式 AI workflow、Agent 组织方式、可解释修复和 demo 可复现性。</a:t>
+            </a:r>
+            <a:endParaRPr lang="en-US" sz="710" dirty="0"/>
+          </a:p>
+        </p:txBody>
+      </p:sp>
+      <p:sp>
+        <p:nvSpPr>
+          <p:cNvPr id="20" name="Text 18"/>
           <p:cNvSpPr/>
           <p:nvPr/>
         </p:nvSpPr>
@@ -4245,7 +4405,7 @@
       </p:sp>
       <p:sp>
         <p:nvSpPr>
-          <p:cNvPr id="18" name="Text 16"/>
+          <p:cNvPr id="21" name="Text 19"/>
           <p:cNvSpPr/>
           <p:nvPr/>
         </p:nvSpPr>
@@ -5121,6 +5281,23 @@
             </a:r>
             <a:endParaRPr lang="en-US" sz="820" dirty="0"/>
           </a:p>
+          <a:p>
+            <a:pPr indent="0" marL="0">
+              <a:buNone/>
+            </a:pPr>
+            <a:r>
+              <a:rPr lang="en-US" sz="820" dirty="0">
+                <a:solidFill>
+                  <a:srgbClr val="667085"/>
+                </a:solidFill>
+                <a:latin typeface="PingFang SC" pitchFamily="34" charset="0"/>
+                <a:ea typeface="PingFang SC" pitchFamily="34" charset="-122"/>
+                <a:cs typeface="PingFang SC" pitchFamily="34" charset="-120"/>
+              </a:rPr>
+              <a:t>完成后可手动反馈再优化</a:t>
+            </a:r>
+            <a:endParaRPr lang="en-US" sz="820" dirty="0"/>
+          </a:p>
         </p:txBody>
       </p:sp>
       <p:sp>
@@ -5306,33 +5483,281 @@
             </a:r>
             <a:endParaRPr lang="en-US" sz="820" dirty="0"/>
           </a:p>
-        </p:txBody>
-      </p:sp>
-      <p:sp>
-        <p:nvSpPr>
-          <p:cNvPr id="29" name="Text 25"/>
-          <p:cNvSpPr/>
-          <p:nvPr/>
-        </p:nvSpPr>
-        <p:spPr>
-          <a:xfrm>
-            <a:off x="960120" y="4892040"/>
-            <a:ext cx="10241280" cy="713232"/>
-          </a:xfrm>
-          <a:prstGeom prst="rect">
-            <a:avLst/>
-          </a:prstGeom>
-          <a:noFill/>
-          <a:ln/>
-        </p:spPr>
-        <p:txBody>
-          <a:bodyPr wrap="square" lIns="254" tIns="254" rIns="254" bIns="254" rtlCol="0" anchor="ctr">
+          <a:p>
+            <a:pPr indent="0" marL="0">
+              <a:buNone/>
+            </a:pPr>
+            <a:r>
+              <a:rPr lang="en-US" sz="820" dirty="0">
+                <a:solidFill>
+                  <a:srgbClr val="667085"/>
+                </a:solidFill>
+                <a:latin typeface="PingFang SC" pitchFamily="34" charset="0"/>
+                <a:ea typeface="PingFang SC" pitchFamily="34" charset="-122"/>
+                <a:cs typeface="PingFang SC" pitchFamily="34" charset="-120"/>
+              </a:rPr>
+              <a:t>支持 single/collaborative ablation</a:t>
+            </a:r>
+            <a:endParaRPr lang="en-US" sz="820" dirty="0"/>
+          </a:p>
+        </p:txBody>
+      </p:sp>
+      <p:sp>
+        <p:nvSpPr>
+          <p:cNvPr id="29" name="Shape 25"/>
+          <p:cNvSpPr/>
+          <p:nvPr/>
+        </p:nvSpPr>
+        <p:spPr>
+          <a:xfrm>
+            <a:off x="960120" y="4736592"/>
+            <a:ext cx="4754880" cy="896112"/>
+          </a:xfrm>
+          <a:prstGeom prst="roundRect">
+            <a:avLst>
+              <a:gd name="adj" fmla="val 5102"/>
+            </a:avLst>
+          </a:prstGeom>
+          <a:solidFill>
+            <a:srgbClr val="111827"/>
+          </a:solidFill>
+          <a:ln w="12700">
+            <a:solidFill>
+              <a:srgbClr val="2563EB"/>
+            </a:solidFill>
+            <a:prstDash val="solid"/>
+          </a:ln>
+        </p:spPr>
+      </p:sp>
+      <p:sp>
+        <p:nvSpPr>
+          <p:cNvPr id="30" name="Text 26"/>
+          <p:cNvSpPr/>
+          <p:nvPr/>
+        </p:nvSpPr>
+        <p:spPr>
+          <a:xfrm>
+            <a:off x="1069848" y="4837176"/>
+            <a:ext cx="4535424" cy="146304"/>
+          </a:xfrm>
+          <a:prstGeom prst="rect">
+            <a:avLst/>
+          </a:prstGeom>
+          <a:noFill/>
+          <a:ln/>
+        </p:spPr>
+        <p:txBody>
+          <a:bodyPr wrap="square" lIns="0" tIns="0" rIns="0" bIns="0" rtlCol="0" anchor="ctr">
             <a:normAutofit/>
           </a:bodyPr>
           <a:lstStyle/>
           <a:p>
-            <a:r>
-              <a:rPr lang="en-US" sz="1000" dirty="0">
+            <a:pPr indent="0" marL="0">
+              <a:buNone/>
+            </a:pPr>
+            <a:r>
+              <a:rPr lang="en-US" sz="680" b="1" dirty="0">
+                <a:solidFill>
+                  <a:srgbClr val="93C5FD"/>
+                </a:solidFill>
+                <a:latin typeface="PingFang SC" pitchFamily="34" charset="0"/>
+                <a:ea typeface="PingFang SC" pitchFamily="34" charset="-122"/>
+                <a:cs typeface="PingFang SC" pitchFamily="34" charset="-120"/>
+              </a:rPr>
+              <a:t>输出日志文件</a:t>
+            </a:r>
+            <a:endParaRPr lang="en-US" sz="680" dirty="0"/>
+          </a:p>
+        </p:txBody>
+      </p:sp>
+      <p:sp>
+        <p:nvSpPr>
+          <p:cNvPr id="31" name="Text 27"/>
+          <p:cNvSpPr/>
+          <p:nvPr/>
+        </p:nvSpPr>
+        <p:spPr>
+          <a:xfrm>
+            <a:off x="1069848" y="5056632"/>
+            <a:ext cx="4535424" cy="512064"/>
+          </a:xfrm>
+          <a:prstGeom prst="rect">
+            <a:avLst/>
+          </a:prstGeom>
+          <a:noFill/>
+          <a:ln/>
+        </p:spPr>
+        <p:txBody>
+          <a:bodyPr wrap="square" lIns="127" tIns="127" rIns="127" bIns="127" rtlCol="0" anchor="t">
+            <a:normAutofit/>
+          </a:bodyPr>
+          <a:lstStyle/>
+          <a:p>
+            <a:pPr indent="0" marL="0">
+              <a:buNone/>
+            </a:pPr>
+            <a:r>
+              <a:rPr lang="en-US" sz="610" dirty="0">
+                <a:solidFill>
+                  <a:srgbClr val="F9FAFB"/>
+                </a:solidFill>
+                <a:latin typeface="Menlo" pitchFamily="34" charset="0"/>
+                <a:ea typeface="Menlo" pitchFamily="34" charset="-122"/>
+                <a:cs typeface="Menlo" pitchFamily="34" charset="-120"/>
+              </a:rPr>
+              <a:t>generation_goal.json</a:t>
+            </a:r>
+            <a:endParaRPr lang="en-US" sz="610" dirty="0"/>
+          </a:p>
+          <a:p>
+            <a:pPr indent="0" marL="0">
+              <a:buNone/>
+            </a:pPr>
+            <a:r>
+              <a:rPr lang="en-US" sz="610" dirty="0">
+                <a:solidFill>
+                  <a:srgbClr val="F9FAFB"/>
+                </a:solidFill>
+                <a:latin typeface="Menlo" pitchFamily="34" charset="0"/>
+                <a:ea typeface="Menlo" pitchFamily="34" charset="-122"/>
+                <a:cs typeface="Menlo" pitchFamily="34" charset="-120"/>
+              </a:rPr>
+              <a:t>llm_trace.json</a:t>
+            </a:r>
+            <a:endParaRPr lang="en-US" sz="610" dirty="0"/>
+          </a:p>
+          <a:p>
+            <a:pPr indent="0" marL="0">
+              <a:buNone/>
+            </a:pPr>
+            <a:r>
+              <a:rPr lang="en-US" sz="610" dirty="0">
+                <a:solidFill>
+                  <a:srgbClr val="F9FAFB"/>
+                </a:solidFill>
+                <a:latin typeface="Menlo" pitchFamily="34" charset="0"/>
+                <a:ea typeface="Menlo" pitchFamily="34" charset="-122"/>
+                <a:cs typeface="Menlo" pitchFamily="34" charset="-120"/>
+              </a:rPr>
+              <a:t>llm_raw_responses.jsonl</a:t>
+            </a:r>
+            <a:endParaRPr lang="en-US" sz="610" dirty="0"/>
+          </a:p>
+          <a:p>
+            <a:pPr indent="0" marL="0">
+              <a:buNone/>
+            </a:pPr>
+            <a:r>
+              <a:rPr lang="en-US" sz="610" dirty="0">
+                <a:solidFill>
+                  <a:srgbClr val="F9FAFB"/>
+                </a:solidFill>
+                <a:latin typeface="Menlo" pitchFamily="34" charset="0"/>
+                <a:ea typeface="Menlo" pitchFamily="34" charset="-122"/>
+                <a:cs typeface="Menlo" pitchFamily="34" charset="-120"/>
+              </a:rPr>
+              <a:t>failure_taxonomy.json / repair_routes.json</a:t>
+            </a:r>
+            <a:endParaRPr lang="en-US" sz="610" dirty="0"/>
+          </a:p>
+        </p:txBody>
+      </p:sp>
+      <p:sp>
+        <p:nvSpPr>
+          <p:cNvPr id="32" name="Shape 28"/>
+          <p:cNvSpPr/>
+          <p:nvPr/>
+        </p:nvSpPr>
+        <p:spPr>
+          <a:xfrm>
+            <a:off x="5989320" y="4736592"/>
+            <a:ext cx="5074920" cy="896112"/>
+          </a:xfrm>
+          <a:prstGeom prst="roundRect">
+            <a:avLst>
+              <a:gd name="adj" fmla="val 6122"/>
+            </a:avLst>
+          </a:prstGeom>
+          <a:solidFill>
+            <a:srgbClr val="F8FAFC"/>
+          </a:solidFill>
+          <a:ln w="12700">
+            <a:solidFill>
+              <a:srgbClr val="16A34A"/>
+            </a:solidFill>
+            <a:prstDash val="solid"/>
+          </a:ln>
+        </p:spPr>
+      </p:sp>
+      <p:sp>
+        <p:nvSpPr>
+          <p:cNvPr id="33" name="Text 29"/>
+          <p:cNvSpPr/>
+          <p:nvPr/>
+        </p:nvSpPr>
+        <p:spPr>
+          <a:xfrm>
+            <a:off x="6117336" y="4846320"/>
+            <a:ext cx="4818888" cy="164592"/>
+          </a:xfrm>
+          <a:prstGeom prst="rect">
+            <a:avLst/>
+          </a:prstGeom>
+          <a:noFill/>
+          <a:ln/>
+        </p:spPr>
+        <p:txBody>
+          <a:bodyPr wrap="square" lIns="0" tIns="0" rIns="0" bIns="0" rtlCol="0" anchor="ctr">
+            <a:normAutofit/>
+          </a:bodyPr>
+          <a:lstStyle/>
+          <a:p>
+            <a:pPr indent="0" marL="0">
+              <a:buNone/>
+            </a:pPr>
+            <a:r>
+              <a:rPr lang="en-US" sz="770" b="1" dirty="0">
+                <a:solidFill>
+                  <a:srgbClr val="16A34A"/>
+                </a:solidFill>
+                <a:latin typeface="PingFang SC" pitchFamily="34" charset="0"/>
+                <a:ea typeface="PingFang SC" pitchFamily="34" charset="-122"/>
+                <a:cs typeface="PingFang SC" pitchFamily="34" charset="-120"/>
+              </a:rPr>
+              <a:t>可追踪性</a:t>
+            </a:r>
+            <a:endParaRPr lang="en-US" sz="770" dirty="0"/>
+          </a:p>
+        </p:txBody>
+      </p:sp>
+      <p:sp>
+        <p:nvSpPr>
+          <p:cNvPr id="34" name="Text 30"/>
+          <p:cNvSpPr/>
+          <p:nvPr/>
+        </p:nvSpPr>
+        <p:spPr>
+          <a:xfrm>
+            <a:off x="6117336" y="5065776"/>
+            <a:ext cx="4818888" cy="512064"/>
+          </a:xfrm>
+          <a:prstGeom prst="rect">
+            <a:avLst/>
+          </a:prstGeom>
+          <a:noFill/>
+          <a:ln/>
+        </p:spPr>
+        <p:txBody>
+          <a:bodyPr wrap="square" lIns="127" tIns="127" rIns="127" bIns="127" rtlCol="0" anchor="t">
+            <a:normAutofit/>
+          </a:bodyPr>
+          <a:lstStyle/>
+          <a:p>
+            <a:pPr indent="0" marL="0">
+              <a:buNone/>
+            </a:pPr>
+            <a:r>
+              <a:rPr lang="en-US" sz="710" dirty="0">
                 <a:solidFill>
                   <a:srgbClr val="172033"/>
                 </a:solidFill>
@@ -5340,43 +5765,15 @@
                 <a:ea typeface="PingFang SC" pitchFamily="34" charset="-122"/>
                 <a:cs typeface="PingFang SC" pitchFamily="34" charset="-120"/>
               </a:rPr>
-              <a:t>所有 Agent 使用 LLM，不再用本地模板冒充生成</a:t>
-            </a:r>
-            <a:endParaRPr lang="en-US" sz="1000" dirty="0"/>
-          </a:p>
-          <a:p>
-            <a:r>
-              <a:rPr lang="en-US" sz="1000" dirty="0">
-                <a:solidFill>
-                  <a:srgbClr val="172033"/>
-                </a:solidFill>
-                <a:latin typeface="PingFang SC" pitchFamily="34" charset="0"/>
-                <a:ea typeface="PingFang SC" pitchFamily="34" charset="-122"/>
-                <a:cs typeface="PingFang SC" pitchFamily="34" charset="-120"/>
-              </a:rPr>
-              <a:t>本地工具只做机械检查、渲染和文件导出</a:t>
-            </a:r>
-            <a:endParaRPr lang="en-US" sz="1000" dirty="0"/>
-          </a:p>
-          <a:p>
-            <a:r>
-              <a:rPr lang="en-US" sz="1000" dirty="0">
-                <a:solidFill>
-                  <a:srgbClr val="172033"/>
-                </a:solidFill>
-                <a:latin typeface="PingFang SC" pitchFamily="34" charset="0"/>
-                <a:ea typeface="PingFang SC" pitchFamily="34" charset="-122"/>
-                <a:cs typeface="PingFang SC" pitchFamily="34" charset="-120"/>
-              </a:rPr>
-              <a:t>失败时记录原因，不静默切回规则 fallback</a:t>
-            </a:r>
-            <a:endParaRPr lang="en-US" sz="1000" dirty="0"/>
-          </a:p>
-        </p:txBody>
-      </p:sp>
-      <p:sp>
-        <p:nvSpPr>
-          <p:cNvPr id="30" name="Text 26"/>
+              <a:t>PPT 中只展示脱敏后的代表性摘录；完整模型返回保存在 llm_raw_responses.jsonl，便于定位 malformed JSON、空回复、repair 失败等问题。</a:t>
+            </a:r>
+            <a:endParaRPr lang="en-US" sz="710" dirty="0"/>
+          </a:p>
+        </p:txBody>
+      </p:sp>
+      <p:sp>
+        <p:nvSpPr>
+          <p:cNvPr id="35" name="Text 31"/>
           <p:cNvSpPr/>
           <p:nvPr/>
         </p:nvSpPr>
@@ -5415,7 +5812,7 @@
       </p:sp>
       <p:sp>
         <p:nvSpPr>
-          <p:cNvPr id="31" name="Text 27"/>
+          <p:cNvPr id="36" name="Text 32"/>
           <p:cNvSpPr/>
           <p:nvPr/>
         </p:nvSpPr>
@@ -5599,12 +5996,12 @@
         </p:nvSpPr>
         <p:spPr>
           <a:xfrm>
-            <a:off x="411480" y="2743200"/>
-            <a:ext cx="1051560" cy="502920"/>
+            <a:off x="320040" y="2606040"/>
+            <a:ext cx="960120" cy="493776"/>
           </a:xfrm>
           <a:prstGeom prst="roundRect">
             <a:avLst>
-              <a:gd name="adj" fmla="val 10909"/>
+              <a:gd name="adj" fmla="val 11111"/>
             </a:avLst>
           </a:prstGeom>
           <a:solidFill>
@@ -5626,8 +6023,8 @@
         </p:nvSpPr>
         <p:spPr>
           <a:xfrm>
-            <a:off x="457200" y="2825496"/>
-            <a:ext cx="960120" cy="356616"/>
+            <a:off x="365760" y="2688336"/>
+            <a:ext cx="868680" cy="347472"/>
           </a:xfrm>
           <a:prstGeom prst="rect">
             <a:avLst/>
@@ -5684,12 +6081,12 @@
         </p:nvSpPr>
         <p:spPr>
           <a:xfrm>
-            <a:off x="1691640" y="2743200"/>
-            <a:ext cx="1051560" cy="502920"/>
+            <a:off x="1481328" y="2606040"/>
+            <a:ext cx="960120" cy="493776"/>
           </a:xfrm>
           <a:prstGeom prst="roundRect">
             <a:avLst>
-              <a:gd name="adj" fmla="val 10909"/>
+              <a:gd name="adj" fmla="val 11111"/>
             </a:avLst>
           </a:prstGeom>
           <a:solidFill>
@@ -5711,8 +6108,8 @@
         </p:nvSpPr>
         <p:spPr>
           <a:xfrm>
-            <a:off x="1737360" y="2825496"/>
-            <a:ext cx="960120" cy="356616"/>
+            <a:off x="1527048" y="2688336"/>
+            <a:ext cx="868680" cy="347472"/>
           </a:xfrm>
           <a:prstGeom prst="rect">
             <a:avLst/>
@@ -5769,12 +6166,12 @@
         </p:nvSpPr>
         <p:spPr>
           <a:xfrm>
-            <a:off x="2971800" y="2743200"/>
-            <a:ext cx="1051560" cy="502920"/>
+            <a:off x="2651760" y="2606040"/>
+            <a:ext cx="1005840" cy="493776"/>
           </a:xfrm>
           <a:prstGeom prst="roundRect">
             <a:avLst>
-              <a:gd name="adj" fmla="val 10909"/>
+              <a:gd name="adj" fmla="val 11111"/>
             </a:avLst>
           </a:prstGeom>
           <a:solidFill>
@@ -5796,8 +6193,8 @@
         </p:nvSpPr>
         <p:spPr>
           <a:xfrm>
-            <a:off x="3017520" y="2825496"/>
-            <a:ext cx="960120" cy="356616"/>
+            <a:off x="2697480" y="2688336"/>
+            <a:ext cx="914400" cy="347472"/>
           </a:xfrm>
           <a:prstGeom prst="rect">
             <a:avLst/>
@@ -5854,12 +6251,12 @@
         </p:nvSpPr>
         <p:spPr>
           <a:xfrm>
-            <a:off x="4251960" y="2743200"/>
-            <a:ext cx="1051560" cy="502920"/>
+            <a:off x="3858768" y="2606040"/>
+            <a:ext cx="877824" cy="493776"/>
           </a:xfrm>
           <a:prstGeom prst="roundRect">
             <a:avLst>
-              <a:gd name="adj" fmla="val 10909"/>
+              <a:gd name="adj" fmla="val 11111"/>
             </a:avLst>
           </a:prstGeom>
           <a:solidFill>
@@ -5881,8 +6278,8 @@
         </p:nvSpPr>
         <p:spPr>
           <a:xfrm>
-            <a:off x="4297680" y="2825496"/>
-            <a:ext cx="960120" cy="356616"/>
+            <a:off x="3904488" y="2688336"/>
+            <a:ext cx="786384" cy="347472"/>
           </a:xfrm>
           <a:prstGeom prst="rect">
             <a:avLst/>
@@ -5922,12 +6319,12 @@
         </p:nvSpPr>
         <p:spPr>
           <a:xfrm>
-            <a:off x="5532120" y="2743200"/>
-            <a:ext cx="1188720" cy="502920"/>
+            <a:off x="4956048" y="2606040"/>
+            <a:ext cx="1143000" cy="493776"/>
           </a:xfrm>
           <a:prstGeom prst="roundRect">
             <a:avLst>
-              <a:gd name="adj" fmla="val 10909"/>
+              <a:gd name="adj" fmla="val 11111"/>
             </a:avLst>
           </a:prstGeom>
           <a:solidFill>
@@ -5949,8 +6346,8 @@
         </p:nvSpPr>
         <p:spPr>
           <a:xfrm>
-            <a:off x="5577840" y="2825496"/>
-            <a:ext cx="1097280" cy="356616"/>
+            <a:off x="5001768" y="2688336"/>
+            <a:ext cx="1051560" cy="347472"/>
           </a:xfrm>
           <a:prstGeom prst="rect">
             <a:avLst/>
@@ -6007,12 +6404,12 @@
         </p:nvSpPr>
         <p:spPr>
           <a:xfrm>
-            <a:off x="7086600" y="2011680"/>
-            <a:ext cx="1097280" cy="502920"/>
+            <a:off x="6492240" y="1572768"/>
+            <a:ext cx="1097280" cy="493776"/>
           </a:xfrm>
           <a:prstGeom prst="roundRect">
             <a:avLst>
-              <a:gd name="adj" fmla="val 10909"/>
+              <a:gd name="adj" fmla="val 11111"/>
             </a:avLst>
           </a:prstGeom>
           <a:solidFill>
@@ -6034,8 +6431,8 @@
         </p:nvSpPr>
         <p:spPr>
           <a:xfrm>
-            <a:off x="7132320" y="2093976"/>
-            <a:ext cx="1005840" cy="356616"/>
+            <a:off x="6537960" y="1655064"/>
+            <a:ext cx="1005840" cy="347472"/>
           </a:xfrm>
           <a:prstGeom prst="rect">
             <a:avLst/>
@@ -6092,12 +6489,12 @@
         </p:nvSpPr>
         <p:spPr>
           <a:xfrm>
-            <a:off x="7086600" y="3474720"/>
-            <a:ext cx="1097280" cy="502920"/>
+            <a:off x="6492240" y="3611880"/>
+            <a:ext cx="1097280" cy="493776"/>
           </a:xfrm>
           <a:prstGeom prst="roundRect">
             <a:avLst>
-              <a:gd name="adj" fmla="val 10909"/>
+              <a:gd name="adj" fmla="val 11111"/>
             </a:avLst>
           </a:prstGeom>
           <a:solidFill>
@@ -6119,8 +6516,8 @@
         </p:nvSpPr>
         <p:spPr>
           <a:xfrm>
-            <a:off x="7132320" y="3557016"/>
-            <a:ext cx="1005840" cy="356616"/>
+            <a:off x="6537960" y="3694176"/>
+            <a:ext cx="1005840" cy="347472"/>
           </a:xfrm>
           <a:prstGeom prst="rect">
             <a:avLst/>
@@ -6177,12 +6574,12 @@
         </p:nvSpPr>
         <p:spPr>
           <a:xfrm>
-            <a:off x="8549640" y="2743200"/>
-            <a:ext cx="1051560" cy="502920"/>
+            <a:off x="8065008" y="2606040"/>
+            <a:ext cx="1024128" cy="493776"/>
           </a:xfrm>
           <a:prstGeom prst="roundRect">
             <a:avLst>
-              <a:gd name="adj" fmla="val 10909"/>
+              <a:gd name="adj" fmla="val 11111"/>
             </a:avLst>
           </a:prstGeom>
           <a:solidFill>
@@ -6204,8 +6601,8 @@
         </p:nvSpPr>
         <p:spPr>
           <a:xfrm>
-            <a:off x="8595360" y="2825496"/>
-            <a:ext cx="960120" cy="356616"/>
+            <a:off x="8110728" y="2688336"/>
+            <a:ext cx="932688" cy="347472"/>
           </a:xfrm>
           <a:prstGeom prst="rect">
             <a:avLst/>
@@ -6262,12 +6659,12 @@
         </p:nvSpPr>
         <p:spPr>
           <a:xfrm>
-            <a:off x="9829800" y="2743200"/>
-            <a:ext cx="1051560" cy="502920"/>
+            <a:off x="9308592" y="2606040"/>
+            <a:ext cx="960120" cy="493776"/>
           </a:xfrm>
           <a:prstGeom prst="roundRect">
             <a:avLst>
-              <a:gd name="adj" fmla="val 10909"/>
+              <a:gd name="adj" fmla="val 11111"/>
             </a:avLst>
           </a:prstGeom>
           <a:solidFill>
@@ -6289,8 +6686,8 @@
         </p:nvSpPr>
         <p:spPr>
           <a:xfrm>
-            <a:off x="9875520" y="2825496"/>
-            <a:ext cx="960120" cy="356616"/>
+            <a:off x="9354312" y="2688336"/>
+            <a:ext cx="868680" cy="347472"/>
           </a:xfrm>
           <a:prstGeom prst="rect">
             <a:avLst/>
@@ -6347,12 +6744,12 @@
         </p:nvSpPr>
         <p:spPr>
           <a:xfrm>
-            <a:off x="11018520" y="2743200"/>
-            <a:ext cx="914400" cy="502920"/>
+            <a:off x="10469880" y="2606040"/>
+            <a:ext cx="868680" cy="493776"/>
           </a:xfrm>
           <a:prstGeom prst="roundRect">
             <a:avLst>
-              <a:gd name="adj" fmla="val 10909"/>
+              <a:gd name="adj" fmla="val 11111"/>
             </a:avLst>
           </a:prstGeom>
           <a:solidFill>
@@ -6374,8 +6771,8 @@
         </p:nvSpPr>
         <p:spPr>
           <a:xfrm>
-            <a:off x="11064240" y="2825496"/>
-            <a:ext cx="822960" cy="356616"/>
+            <a:off x="10515600" y="2688336"/>
+            <a:ext cx="777240" cy="347472"/>
           </a:xfrm>
           <a:prstGeom prst="rect">
             <a:avLst/>
@@ -6415,12 +6812,80 @@
         </p:nvSpPr>
         <p:spPr>
           <a:xfrm>
-            <a:off x="8549640" y="4663440"/>
-            <a:ext cx="1051560" cy="502920"/>
+            <a:off x="11475720" y="2606040"/>
+            <a:ext cx="868680" cy="493776"/>
           </a:xfrm>
           <a:prstGeom prst="roundRect">
             <a:avLst>
-              <a:gd name="adj" fmla="val 10909"/>
+              <a:gd name="adj" fmla="val 11111"/>
+            </a:avLst>
+          </a:prstGeom>
+          <a:solidFill>
+            <a:srgbClr val="DCFCE7"/>
+          </a:solidFill>
+          <a:ln w="12700">
+            <a:solidFill>
+              <a:srgbClr val="16A34A"/>
+            </a:solidFill>
+            <a:prstDash val="solid"/>
+          </a:ln>
+        </p:spPr>
+      </p:sp>
+      <p:sp>
+        <p:nvSpPr>
+          <p:cNvPr id="26" name="Text 24"/>
+          <p:cNvSpPr/>
+          <p:nvPr/>
+        </p:nvSpPr>
+        <p:spPr>
+          <a:xfrm>
+            <a:off x="11521440" y="2688336"/>
+            <a:ext cx="777240" cy="347472"/>
+          </a:xfrm>
+          <a:prstGeom prst="rect">
+            <a:avLst/>
+          </a:prstGeom>
+          <a:noFill/>
+          <a:ln/>
+        </p:spPr>
+        <p:txBody>
+          <a:bodyPr wrap="square" lIns="0" tIns="0" rIns="0" bIns="0" rtlCol="0" anchor="ctr">
+            <a:normAutofit/>
+          </a:bodyPr>
+          <a:lstStyle/>
+          <a:p>
+            <a:pPr algn="ctr" indent="0" marL="0">
+              <a:buNone/>
+            </a:pPr>
+            <a:r>
+              <a:rPr lang="en-US" sz="710" b="1" dirty="0">
+                <a:solidFill>
+                  <a:srgbClr val="172033"/>
+                </a:solidFill>
+                <a:latin typeface="PingFang SC" pitchFamily="34" charset="0"/>
+                <a:ea typeface="PingFang SC" pitchFamily="34" charset="-122"/>
+                <a:cs typeface="PingFang SC" pitchFamily="34" charset="-120"/>
+              </a:rPr>
+              <a:t>Exporter</a:t>
+            </a:r>
+            <a:endParaRPr lang="en-US" sz="710" dirty="0"/>
+          </a:p>
+        </p:txBody>
+      </p:sp>
+      <p:sp>
+        <p:nvSpPr>
+          <p:cNvPr id="27" name="Shape 25"/>
+          <p:cNvSpPr/>
+          <p:nvPr/>
+        </p:nvSpPr>
+        <p:spPr>
+          <a:xfrm>
+            <a:off x="6446520" y="4773168"/>
+            <a:ext cx="1124712" cy="493776"/>
+          </a:xfrm>
+          <a:prstGeom prst="roundRect">
+            <a:avLst>
+              <a:gd name="adj" fmla="val 11111"/>
             </a:avLst>
           </a:prstGeom>
           <a:solidFill>
@@ -6436,14 +6901,14 @@
       </p:sp>
       <p:sp>
         <p:nvSpPr>
-          <p:cNvPr id="26" name="Text 24"/>
-          <p:cNvSpPr/>
-          <p:nvPr/>
-        </p:nvSpPr>
-        <p:spPr>
-          <a:xfrm>
-            <a:off x="8595360" y="4745736"/>
-            <a:ext cx="960120" cy="356616"/>
+          <p:cNvPr id="28" name="Text 26"/>
+          <p:cNvSpPr/>
+          <p:nvPr/>
+        </p:nvSpPr>
+        <p:spPr>
+          <a:xfrm>
+            <a:off x="6492240" y="4855464"/>
+            <a:ext cx="1033272" cy="347472"/>
           </a:xfrm>
           <a:prstGeom prst="rect">
             <a:avLst/>
@@ -6494,18 +6959,18 @@
       </p:sp>
       <p:sp>
         <p:nvSpPr>
-          <p:cNvPr id="27" name="Shape 25"/>
-          <p:cNvSpPr/>
-          <p:nvPr/>
-        </p:nvSpPr>
-        <p:spPr>
-          <a:xfrm>
-            <a:off x="9829800" y="4663440"/>
-            <a:ext cx="1051560" cy="502920"/>
+          <p:cNvPr id="29" name="Shape 27"/>
+          <p:cNvSpPr/>
+          <p:nvPr/>
+        </p:nvSpPr>
+        <p:spPr>
+          <a:xfrm>
+            <a:off x="8001000" y="4773168"/>
+            <a:ext cx="1078992" cy="493776"/>
           </a:xfrm>
           <a:prstGeom prst="roundRect">
             <a:avLst>
-              <a:gd name="adj" fmla="val 10909"/>
+              <a:gd name="adj" fmla="val 11111"/>
             </a:avLst>
           </a:prstGeom>
           <a:solidFill>
@@ -6521,14 +6986,14 @@
       </p:sp>
       <p:sp>
         <p:nvSpPr>
-          <p:cNvPr id="28" name="Text 26"/>
-          <p:cNvSpPr/>
-          <p:nvPr/>
-        </p:nvSpPr>
-        <p:spPr>
-          <a:xfrm>
-            <a:off x="9875520" y="4745736"/>
-            <a:ext cx="960120" cy="356616"/>
+          <p:cNvPr id="30" name="Text 28"/>
+          <p:cNvSpPr/>
+          <p:nvPr/>
+        </p:nvSpPr>
+        <p:spPr>
+          <a:xfrm>
+            <a:off x="8046720" y="4855464"/>
+            <a:ext cx="987552" cy="347472"/>
           </a:xfrm>
           <a:prstGeom prst="rect">
             <a:avLst/>
@@ -6579,18 +7044,18 @@
       </p:sp>
       <p:sp>
         <p:nvSpPr>
-          <p:cNvPr id="29" name="Shape 27"/>
-          <p:cNvSpPr/>
-          <p:nvPr/>
-        </p:nvSpPr>
-        <p:spPr>
-          <a:xfrm>
-            <a:off x="11018520" y="4663440"/>
-            <a:ext cx="914400" cy="502920"/>
+          <p:cNvPr id="31" name="Shape 29"/>
+          <p:cNvSpPr/>
+          <p:nvPr/>
+        </p:nvSpPr>
+        <p:spPr>
+          <a:xfrm>
+            <a:off x="9464040" y="4773168"/>
+            <a:ext cx="914400" cy="493776"/>
           </a:xfrm>
           <a:prstGeom prst="roundRect">
             <a:avLst>
-              <a:gd name="adj" fmla="val 10909"/>
+              <a:gd name="adj" fmla="val 11111"/>
             </a:avLst>
           </a:prstGeom>
           <a:solidFill>
@@ -6606,14 +7071,14 @@
       </p:sp>
       <p:sp>
         <p:nvSpPr>
-          <p:cNvPr id="30" name="Text 28"/>
-          <p:cNvSpPr/>
-          <p:nvPr/>
-        </p:nvSpPr>
-        <p:spPr>
-          <a:xfrm>
-            <a:off x="11064240" y="4745736"/>
-            <a:ext cx="822960" cy="356616"/>
+          <p:cNvPr id="32" name="Text 30"/>
+          <p:cNvSpPr/>
+          <p:nvPr/>
+        </p:nvSpPr>
+        <p:spPr>
+          <a:xfrm>
+            <a:off x="9509760" y="4855464"/>
+            <a:ext cx="822960" cy="347472"/>
           </a:xfrm>
           <a:prstGeom prst="rect">
             <a:avLst/>
@@ -6647,18 +7112,871 @@
       </p:sp>
       <p:sp>
         <p:nvSpPr>
-          <p:cNvPr id="31" name="Shape 29"/>
-          <p:cNvSpPr/>
-          <p:nvPr/>
-        </p:nvSpPr>
-        <p:spPr>
-          <a:xfrm>
-            <a:off x="10149840" y="1097280"/>
-            <a:ext cx="1005840" cy="502920"/>
+          <p:cNvPr id="33" name="Shape 31"/>
+          <p:cNvSpPr/>
+          <p:nvPr/>
+        </p:nvSpPr>
+        <p:spPr>
+          <a:xfrm>
+            <a:off x="11475720" y="4187952"/>
+            <a:ext cx="868680" cy="493776"/>
           </a:xfrm>
           <a:prstGeom prst="roundRect">
             <a:avLst>
-              <a:gd name="adj" fmla="val 10909"/>
+              <a:gd name="adj" fmla="val 11111"/>
+            </a:avLst>
+          </a:prstGeom>
+          <a:solidFill>
+            <a:srgbClr val="DBEAFE"/>
+          </a:solidFill>
+          <a:ln w="12700">
+            <a:solidFill>
+              <a:srgbClr val="2563EB"/>
+            </a:solidFill>
+            <a:prstDash val="solid"/>
+          </a:ln>
+        </p:spPr>
+      </p:sp>
+      <p:sp>
+        <p:nvSpPr>
+          <p:cNvPr id="34" name="Text 32"/>
+          <p:cNvSpPr/>
+          <p:nvPr/>
+        </p:nvSpPr>
+        <p:spPr>
+          <a:xfrm>
+            <a:off x="11521440" y="4270248"/>
+            <a:ext cx="777240" cy="347472"/>
+          </a:xfrm>
+          <a:prstGeom prst="rect">
+            <a:avLst/>
+          </a:prstGeom>
+          <a:noFill/>
+          <a:ln/>
+        </p:spPr>
+        <p:txBody>
+          <a:bodyPr wrap="square" lIns="0" tIns="0" rIns="0" bIns="0" rtlCol="0" anchor="ctr">
+            <a:normAutofit/>
+          </a:bodyPr>
+          <a:lstStyle/>
+          <a:p>
+            <a:pPr algn="ctr" indent="0" marL="0">
+              <a:buNone/>
+            </a:pPr>
+            <a:r>
+              <a:rPr lang="en-US" sz="710" b="1" dirty="0">
+                <a:solidFill>
+                  <a:srgbClr val="172033"/>
+                </a:solidFill>
+                <a:latin typeface="PingFang SC" pitchFamily="34" charset="0"/>
+                <a:ea typeface="PingFang SC" pitchFamily="34" charset="-122"/>
+                <a:cs typeface="PingFang SC" pitchFamily="34" charset="-120"/>
+              </a:rPr>
+              <a:t>Memory</a:t>
+            </a:r>
+            <a:endParaRPr lang="en-US" sz="710" dirty="0"/>
+          </a:p>
+          <a:p>
+            <a:pPr algn="ctr" indent="0" marL="0">
+              <a:buNone/>
+            </a:pPr>
+            <a:r>
+              <a:rPr lang="en-US" sz="710" b="1" dirty="0">
+                <a:solidFill>
+                  <a:srgbClr val="172033"/>
+                </a:solidFill>
+                <a:latin typeface="PingFang SC" pitchFamily="34" charset="0"/>
+                <a:ea typeface="PingFang SC" pitchFamily="34" charset="-122"/>
+                <a:cs typeface="PingFang SC" pitchFamily="34" charset="-120"/>
+              </a:rPr>
+              <a:t>Curator</a:t>
+            </a:r>
+            <a:endParaRPr lang="en-US" sz="710" dirty="0"/>
+          </a:p>
+        </p:txBody>
+      </p:sp>
+      <p:sp>
+        <p:nvSpPr>
+          <p:cNvPr id="35" name="Shape 33"/>
+          <p:cNvSpPr/>
+          <p:nvPr/>
+        </p:nvSpPr>
+        <p:spPr>
+          <a:xfrm>
+            <a:off x="1280160" y="2852928"/>
+            <a:ext cx="201168" cy="0"/>
+          </a:xfrm>
+          <a:prstGeom prst="line">
+            <a:avLst/>
+          </a:prstGeom>
+          <a:noFill/>
+          <a:ln w="16510">
+            <a:solidFill>
+              <a:srgbClr val="D0D5DD"/>
+            </a:solidFill>
+            <a:prstDash val="solid"/>
+            <a:headEnd type="none"/>
+            <a:tailEnd type="triangle"/>
+          </a:ln>
+        </p:spPr>
+      </p:sp>
+      <p:sp>
+        <p:nvSpPr>
+          <p:cNvPr id="36" name="Shape 34"/>
+          <p:cNvSpPr/>
+          <p:nvPr/>
+        </p:nvSpPr>
+        <p:spPr>
+          <a:xfrm>
+            <a:off x="2441448" y="2852928"/>
+            <a:ext cx="210312" cy="0"/>
+          </a:xfrm>
+          <a:prstGeom prst="line">
+            <a:avLst/>
+          </a:prstGeom>
+          <a:noFill/>
+          <a:ln w="16510">
+            <a:solidFill>
+              <a:srgbClr val="D0D5DD"/>
+            </a:solidFill>
+            <a:prstDash val="solid"/>
+            <a:headEnd type="none"/>
+            <a:tailEnd type="triangle"/>
+          </a:ln>
+        </p:spPr>
+      </p:sp>
+      <p:sp>
+        <p:nvSpPr>
+          <p:cNvPr id="37" name="Shape 35"/>
+          <p:cNvSpPr/>
+          <p:nvPr/>
+        </p:nvSpPr>
+        <p:spPr>
+          <a:xfrm>
+            <a:off x="3657600" y="2852928"/>
+            <a:ext cx="201168" cy="0"/>
+          </a:xfrm>
+          <a:prstGeom prst="line">
+            <a:avLst/>
+          </a:prstGeom>
+          <a:noFill/>
+          <a:ln w="16510">
+            <a:solidFill>
+              <a:srgbClr val="D0D5DD"/>
+            </a:solidFill>
+            <a:prstDash val="solid"/>
+            <a:headEnd type="none"/>
+            <a:tailEnd type="triangle"/>
+          </a:ln>
+        </p:spPr>
+      </p:sp>
+      <p:sp>
+        <p:nvSpPr>
+          <p:cNvPr id="38" name="Shape 36"/>
+          <p:cNvSpPr/>
+          <p:nvPr/>
+        </p:nvSpPr>
+        <p:spPr>
+          <a:xfrm>
+            <a:off x="4736592" y="2852928"/>
+            <a:ext cx="219456" cy="0"/>
+          </a:xfrm>
+          <a:prstGeom prst="line">
+            <a:avLst/>
+          </a:prstGeom>
+          <a:noFill/>
+          <a:ln w="16510">
+            <a:solidFill>
+              <a:srgbClr val="D0D5DD"/>
+            </a:solidFill>
+            <a:prstDash val="solid"/>
+            <a:headEnd type="none"/>
+            <a:tailEnd type="triangle"/>
+          </a:ln>
+        </p:spPr>
+      </p:sp>
+      <p:sp>
+        <p:nvSpPr>
+          <p:cNvPr id="39" name="Shape 37"/>
+          <p:cNvSpPr/>
+          <p:nvPr/>
+        </p:nvSpPr>
+        <p:spPr>
+          <a:xfrm>
+            <a:off x="6099048" y="2852928"/>
+            <a:ext cx="192024" cy="0"/>
+          </a:xfrm>
+          <a:prstGeom prst="line">
+            <a:avLst/>
+          </a:prstGeom>
+          <a:noFill/>
+          <a:ln w="14605">
+            <a:solidFill>
+              <a:srgbClr val="F97316"/>
+            </a:solidFill>
+            <a:prstDash val="solid"/>
+            <a:headEnd type="none"/>
+            <a:tailEnd type="none"/>
+          </a:ln>
+        </p:spPr>
+      </p:sp>
+      <p:sp>
+        <p:nvSpPr>
+          <p:cNvPr id="40" name="Shape 38"/>
+          <p:cNvSpPr/>
+          <p:nvPr/>
+        </p:nvSpPr>
+        <p:spPr>
+          <a:xfrm>
+            <a:off x="6291072" y="2852928"/>
+            <a:ext cx="0" cy="-1033272"/>
+          </a:xfrm>
+          <a:prstGeom prst="line">
+            <a:avLst/>
+          </a:prstGeom>
+          <a:noFill/>
+          <a:ln w="14605">
+            <a:solidFill>
+              <a:srgbClr val="F97316"/>
+            </a:solidFill>
+            <a:prstDash val="solid"/>
+            <a:headEnd type="none"/>
+            <a:tailEnd type="none"/>
+          </a:ln>
+        </p:spPr>
+      </p:sp>
+      <p:sp>
+        <p:nvSpPr>
+          <p:cNvPr id="41" name="Shape 39"/>
+          <p:cNvSpPr/>
+          <p:nvPr/>
+        </p:nvSpPr>
+        <p:spPr>
+          <a:xfrm>
+            <a:off x="6291072" y="1819656"/>
+            <a:ext cx="201168" cy="0"/>
+          </a:xfrm>
+          <a:prstGeom prst="line">
+            <a:avLst/>
+          </a:prstGeom>
+          <a:noFill/>
+          <a:ln w="15875">
+            <a:solidFill>
+              <a:srgbClr val="F97316"/>
+            </a:solidFill>
+            <a:prstDash val="solid"/>
+            <a:headEnd type="none"/>
+            <a:tailEnd type="triangle"/>
+          </a:ln>
+        </p:spPr>
+      </p:sp>
+      <p:sp>
+        <p:nvSpPr>
+          <p:cNvPr id="42" name="Shape 40"/>
+          <p:cNvSpPr/>
+          <p:nvPr/>
+        </p:nvSpPr>
+        <p:spPr>
+          <a:xfrm>
+            <a:off x="6099048" y="2852928"/>
+            <a:ext cx="192024" cy="0"/>
+          </a:xfrm>
+          <a:prstGeom prst="line">
+            <a:avLst/>
+          </a:prstGeom>
+          <a:noFill/>
+          <a:ln w="14605">
+            <a:solidFill>
+              <a:srgbClr val="F97316"/>
+            </a:solidFill>
+            <a:prstDash val="solid"/>
+            <a:headEnd type="none"/>
+            <a:tailEnd type="none"/>
+          </a:ln>
+        </p:spPr>
+      </p:sp>
+      <p:sp>
+        <p:nvSpPr>
+          <p:cNvPr id="43" name="Shape 41"/>
+          <p:cNvSpPr/>
+          <p:nvPr/>
+        </p:nvSpPr>
+        <p:spPr>
+          <a:xfrm>
+            <a:off x="6291072" y="2852928"/>
+            <a:ext cx="0" cy="1005840"/>
+          </a:xfrm>
+          <a:prstGeom prst="line">
+            <a:avLst/>
+          </a:prstGeom>
+          <a:noFill/>
+          <a:ln w="14605">
+            <a:solidFill>
+              <a:srgbClr val="F97316"/>
+            </a:solidFill>
+            <a:prstDash val="solid"/>
+            <a:headEnd type="none"/>
+            <a:tailEnd type="none"/>
+          </a:ln>
+        </p:spPr>
+      </p:sp>
+      <p:sp>
+        <p:nvSpPr>
+          <p:cNvPr id="44" name="Shape 42"/>
+          <p:cNvSpPr/>
+          <p:nvPr/>
+        </p:nvSpPr>
+        <p:spPr>
+          <a:xfrm>
+            <a:off x="6291072" y="3858768"/>
+            <a:ext cx="201168" cy="0"/>
+          </a:xfrm>
+          <a:prstGeom prst="line">
+            <a:avLst/>
+          </a:prstGeom>
+          <a:noFill/>
+          <a:ln w="15875">
+            <a:solidFill>
+              <a:srgbClr val="F97316"/>
+            </a:solidFill>
+            <a:prstDash val="solid"/>
+            <a:headEnd type="none"/>
+            <a:tailEnd type="triangle"/>
+          </a:ln>
+        </p:spPr>
+      </p:sp>
+      <p:sp>
+        <p:nvSpPr>
+          <p:cNvPr id="45" name="Shape 43"/>
+          <p:cNvSpPr/>
+          <p:nvPr/>
+        </p:nvSpPr>
+        <p:spPr>
+          <a:xfrm>
+            <a:off x="7589520" y="1819656"/>
+            <a:ext cx="228600" cy="0"/>
+          </a:xfrm>
+          <a:prstGeom prst="line">
+            <a:avLst/>
+          </a:prstGeom>
+          <a:noFill/>
+          <a:ln w="14605">
+            <a:solidFill>
+              <a:srgbClr val="F97316"/>
+            </a:solidFill>
+            <a:prstDash val="solid"/>
+            <a:headEnd type="none"/>
+            <a:tailEnd type="none"/>
+          </a:ln>
+        </p:spPr>
+      </p:sp>
+      <p:sp>
+        <p:nvSpPr>
+          <p:cNvPr id="46" name="Shape 44"/>
+          <p:cNvSpPr/>
+          <p:nvPr/>
+        </p:nvSpPr>
+        <p:spPr>
+          <a:xfrm>
+            <a:off x="7818120" y="1819656"/>
+            <a:ext cx="0" cy="1033272"/>
+          </a:xfrm>
+          <a:prstGeom prst="line">
+            <a:avLst/>
+          </a:prstGeom>
+          <a:noFill/>
+          <a:ln w="14605">
+            <a:solidFill>
+              <a:srgbClr val="F97316"/>
+            </a:solidFill>
+            <a:prstDash val="solid"/>
+            <a:headEnd type="none"/>
+            <a:tailEnd type="none"/>
+          </a:ln>
+        </p:spPr>
+      </p:sp>
+      <p:sp>
+        <p:nvSpPr>
+          <p:cNvPr id="47" name="Shape 45"/>
+          <p:cNvSpPr/>
+          <p:nvPr/>
+        </p:nvSpPr>
+        <p:spPr>
+          <a:xfrm>
+            <a:off x="7818120" y="2852928"/>
+            <a:ext cx="246888" cy="0"/>
+          </a:xfrm>
+          <a:prstGeom prst="line">
+            <a:avLst/>
+          </a:prstGeom>
+          <a:noFill/>
+          <a:ln w="15875">
+            <a:solidFill>
+              <a:srgbClr val="F97316"/>
+            </a:solidFill>
+            <a:prstDash val="solid"/>
+            <a:headEnd type="none"/>
+            <a:tailEnd type="triangle"/>
+          </a:ln>
+        </p:spPr>
+      </p:sp>
+      <p:sp>
+        <p:nvSpPr>
+          <p:cNvPr id="48" name="Shape 46"/>
+          <p:cNvSpPr/>
+          <p:nvPr/>
+        </p:nvSpPr>
+        <p:spPr>
+          <a:xfrm>
+            <a:off x="7589520" y="3858768"/>
+            <a:ext cx="228600" cy="0"/>
+          </a:xfrm>
+          <a:prstGeom prst="line">
+            <a:avLst/>
+          </a:prstGeom>
+          <a:noFill/>
+          <a:ln w="14605">
+            <a:solidFill>
+              <a:srgbClr val="F97316"/>
+            </a:solidFill>
+            <a:prstDash val="solid"/>
+            <a:headEnd type="none"/>
+            <a:tailEnd type="none"/>
+          </a:ln>
+        </p:spPr>
+      </p:sp>
+      <p:sp>
+        <p:nvSpPr>
+          <p:cNvPr id="49" name="Shape 47"/>
+          <p:cNvSpPr/>
+          <p:nvPr/>
+        </p:nvSpPr>
+        <p:spPr>
+          <a:xfrm>
+            <a:off x="7818120" y="3858768"/>
+            <a:ext cx="0" cy="-1005840"/>
+          </a:xfrm>
+          <a:prstGeom prst="line">
+            <a:avLst/>
+          </a:prstGeom>
+          <a:noFill/>
+          <a:ln w="14605">
+            <a:solidFill>
+              <a:srgbClr val="F97316"/>
+            </a:solidFill>
+            <a:prstDash val="solid"/>
+            <a:headEnd type="none"/>
+            <a:tailEnd type="none"/>
+          </a:ln>
+        </p:spPr>
+      </p:sp>
+      <p:sp>
+        <p:nvSpPr>
+          <p:cNvPr id="50" name="Shape 48"/>
+          <p:cNvSpPr/>
+          <p:nvPr/>
+        </p:nvSpPr>
+        <p:spPr>
+          <a:xfrm>
+            <a:off x="7818120" y="2852928"/>
+            <a:ext cx="246888" cy="0"/>
+          </a:xfrm>
+          <a:prstGeom prst="line">
+            <a:avLst/>
+          </a:prstGeom>
+          <a:noFill/>
+          <a:ln w="15875">
+            <a:solidFill>
+              <a:srgbClr val="F97316"/>
+            </a:solidFill>
+            <a:prstDash val="solid"/>
+            <a:headEnd type="none"/>
+            <a:tailEnd type="triangle"/>
+          </a:ln>
+        </p:spPr>
+      </p:sp>
+      <p:sp>
+        <p:nvSpPr>
+          <p:cNvPr id="51" name="Shape 49"/>
+          <p:cNvSpPr/>
+          <p:nvPr/>
+        </p:nvSpPr>
+        <p:spPr>
+          <a:xfrm>
+            <a:off x="9089136" y="2852928"/>
+            <a:ext cx="219456" cy="0"/>
+          </a:xfrm>
+          <a:prstGeom prst="line">
+            <a:avLst/>
+          </a:prstGeom>
+          <a:noFill/>
+          <a:ln w="16510">
+            <a:solidFill>
+              <a:srgbClr val="D0D5DD"/>
+            </a:solidFill>
+            <a:prstDash val="solid"/>
+            <a:headEnd type="none"/>
+            <a:tailEnd type="triangle"/>
+          </a:ln>
+        </p:spPr>
+      </p:sp>
+      <p:sp>
+        <p:nvSpPr>
+          <p:cNvPr id="52" name="Shape 50"/>
+          <p:cNvSpPr/>
+          <p:nvPr/>
+        </p:nvSpPr>
+        <p:spPr>
+          <a:xfrm>
+            <a:off x="10268712" y="2852928"/>
+            <a:ext cx="201168" cy="0"/>
+          </a:xfrm>
+          <a:prstGeom prst="line">
+            <a:avLst/>
+          </a:prstGeom>
+          <a:noFill/>
+          <a:ln w="16510">
+            <a:solidFill>
+              <a:srgbClr val="D0D5DD"/>
+            </a:solidFill>
+            <a:prstDash val="solid"/>
+            <a:headEnd type="none"/>
+            <a:tailEnd type="triangle"/>
+          </a:ln>
+        </p:spPr>
+      </p:sp>
+      <p:sp>
+        <p:nvSpPr>
+          <p:cNvPr id="53" name="Shape 51"/>
+          <p:cNvSpPr/>
+          <p:nvPr/>
+        </p:nvSpPr>
+        <p:spPr>
+          <a:xfrm>
+            <a:off x="11338560" y="2852928"/>
+            <a:ext cx="137160" cy="0"/>
+          </a:xfrm>
+          <a:prstGeom prst="line">
+            <a:avLst/>
+          </a:prstGeom>
+          <a:noFill/>
+          <a:ln w="16510">
+            <a:solidFill>
+              <a:srgbClr val="16A34A"/>
+            </a:solidFill>
+            <a:prstDash val="solid"/>
+            <a:headEnd type="none"/>
+            <a:tailEnd type="triangle"/>
+          </a:ln>
+        </p:spPr>
+      </p:sp>
+      <p:sp>
+        <p:nvSpPr>
+          <p:cNvPr id="54" name="Shape 52"/>
+          <p:cNvSpPr/>
+          <p:nvPr/>
+        </p:nvSpPr>
+        <p:spPr>
+          <a:xfrm>
+            <a:off x="10899648" y="3099816"/>
+            <a:ext cx="0" cy="877824"/>
+          </a:xfrm>
+          <a:prstGeom prst="line">
+            <a:avLst/>
+          </a:prstGeom>
+          <a:noFill/>
+          <a:ln w="14605">
+            <a:solidFill>
+              <a:srgbClr val="F97316"/>
+            </a:solidFill>
+            <a:prstDash val="solid"/>
+            <a:headEnd type="none"/>
+            <a:tailEnd type="none"/>
+          </a:ln>
+        </p:spPr>
+      </p:sp>
+      <p:sp>
+        <p:nvSpPr>
+          <p:cNvPr id="55" name="Shape 53"/>
+          <p:cNvSpPr/>
+          <p:nvPr/>
+        </p:nvSpPr>
+        <p:spPr>
+          <a:xfrm>
+            <a:off x="10899648" y="3977640"/>
+            <a:ext cx="-4773168" cy="0"/>
+          </a:xfrm>
+          <a:prstGeom prst="line">
+            <a:avLst/>
+          </a:prstGeom>
+          <a:noFill/>
+          <a:ln w="14605">
+            <a:solidFill>
+              <a:srgbClr val="F97316"/>
+            </a:solidFill>
+            <a:prstDash val="solid"/>
+            <a:headEnd type="none"/>
+            <a:tailEnd type="none"/>
+          </a:ln>
+        </p:spPr>
+      </p:sp>
+      <p:sp>
+        <p:nvSpPr>
+          <p:cNvPr id="56" name="Shape 54"/>
+          <p:cNvSpPr/>
+          <p:nvPr/>
+        </p:nvSpPr>
+        <p:spPr>
+          <a:xfrm>
+            <a:off x="6126480" y="3977640"/>
+            <a:ext cx="0" cy="1042416"/>
+          </a:xfrm>
+          <a:prstGeom prst="line">
+            <a:avLst/>
+          </a:prstGeom>
+          <a:noFill/>
+          <a:ln w="14605">
+            <a:solidFill>
+              <a:srgbClr val="F97316"/>
+            </a:solidFill>
+            <a:prstDash val="solid"/>
+            <a:headEnd type="none"/>
+            <a:tailEnd type="none"/>
+          </a:ln>
+        </p:spPr>
+      </p:sp>
+      <p:sp>
+        <p:nvSpPr>
+          <p:cNvPr id="57" name="Shape 55"/>
+          <p:cNvSpPr/>
+          <p:nvPr/>
+        </p:nvSpPr>
+        <p:spPr>
+          <a:xfrm>
+            <a:off x="6126480" y="5020056"/>
+            <a:ext cx="320040" cy="0"/>
+          </a:xfrm>
+          <a:prstGeom prst="line">
+            <a:avLst/>
+          </a:prstGeom>
+          <a:noFill/>
+          <a:ln w="15875">
+            <a:solidFill>
+              <a:srgbClr val="F97316"/>
+            </a:solidFill>
+            <a:prstDash val="solid"/>
+            <a:headEnd type="none"/>
+            <a:tailEnd type="triangle"/>
+          </a:ln>
+        </p:spPr>
+      </p:sp>
+      <p:sp>
+        <p:nvSpPr>
+          <p:cNvPr id="58" name="Shape 56"/>
+          <p:cNvSpPr/>
+          <p:nvPr/>
+        </p:nvSpPr>
+        <p:spPr>
+          <a:xfrm>
+            <a:off x="7571232" y="5020056"/>
+            <a:ext cx="429768" cy="0"/>
+          </a:xfrm>
+          <a:prstGeom prst="line">
+            <a:avLst/>
+          </a:prstGeom>
+          <a:noFill/>
+          <a:ln w="16510">
+            <a:solidFill>
+              <a:srgbClr val="F97316"/>
+            </a:solidFill>
+            <a:prstDash val="solid"/>
+            <a:headEnd type="none"/>
+            <a:tailEnd type="triangle"/>
+          </a:ln>
+        </p:spPr>
+      </p:sp>
+      <p:sp>
+        <p:nvSpPr>
+          <p:cNvPr id="59" name="Shape 57"/>
+          <p:cNvSpPr/>
+          <p:nvPr/>
+        </p:nvSpPr>
+        <p:spPr>
+          <a:xfrm>
+            <a:off x="9079992" y="5020056"/>
+            <a:ext cx="384048" cy="0"/>
+          </a:xfrm>
+          <a:prstGeom prst="line">
+            <a:avLst/>
+          </a:prstGeom>
+          <a:noFill/>
+          <a:ln w="16510">
+            <a:solidFill>
+              <a:srgbClr val="F97316"/>
+            </a:solidFill>
+            <a:prstDash val="solid"/>
+            <a:headEnd type="none"/>
+            <a:tailEnd type="triangle"/>
+          </a:ln>
+        </p:spPr>
+      </p:sp>
+      <p:sp>
+        <p:nvSpPr>
+          <p:cNvPr id="60" name="Shape 58"/>
+          <p:cNvSpPr/>
+          <p:nvPr/>
+        </p:nvSpPr>
+        <p:spPr>
+          <a:xfrm>
+            <a:off x="10378440" y="5020056"/>
+            <a:ext cx="640080" cy="0"/>
+          </a:xfrm>
+          <a:prstGeom prst="line">
+            <a:avLst/>
+          </a:prstGeom>
+          <a:noFill/>
+          <a:ln w="14605">
+            <a:solidFill>
+              <a:srgbClr val="F97316"/>
+            </a:solidFill>
+            <a:prstDash val="solid"/>
+            <a:headEnd type="none"/>
+            <a:tailEnd type="none"/>
+          </a:ln>
+        </p:spPr>
+      </p:sp>
+      <p:sp>
+        <p:nvSpPr>
+          <p:cNvPr id="61" name="Shape 59"/>
+          <p:cNvSpPr/>
+          <p:nvPr/>
+        </p:nvSpPr>
+        <p:spPr>
+          <a:xfrm>
+            <a:off x="11018520" y="5020056"/>
+            <a:ext cx="0" cy="-1920240"/>
+          </a:xfrm>
+          <a:prstGeom prst="line">
+            <a:avLst/>
+          </a:prstGeom>
+          <a:noFill/>
+          <a:ln w="15875">
+            <a:solidFill>
+              <a:srgbClr val="F97316"/>
+            </a:solidFill>
+            <a:prstDash val="solid"/>
+            <a:headEnd type="none"/>
+            <a:tailEnd type="triangle"/>
+          </a:ln>
+        </p:spPr>
+      </p:sp>
+      <p:sp>
+        <p:nvSpPr>
+          <p:cNvPr id="62" name="Shape 60"/>
+          <p:cNvSpPr/>
+          <p:nvPr/>
+        </p:nvSpPr>
+        <p:spPr>
+          <a:xfrm>
+            <a:off x="11905488" y="3099816"/>
+            <a:ext cx="0" cy="1088136"/>
+          </a:xfrm>
+          <a:prstGeom prst="line">
+            <a:avLst/>
+          </a:prstGeom>
+          <a:noFill/>
+          <a:ln w="15875">
+            <a:solidFill>
+              <a:srgbClr val="16A34A"/>
+            </a:solidFill>
+            <a:prstDash val="solid"/>
+            <a:headEnd type="none"/>
+            <a:tailEnd type="triangle"/>
+          </a:ln>
+        </p:spPr>
+      </p:sp>
+      <p:sp>
+        <p:nvSpPr>
+          <p:cNvPr id="63" name="Shape 61"/>
+          <p:cNvSpPr/>
+          <p:nvPr/>
+        </p:nvSpPr>
+        <p:spPr>
+          <a:xfrm>
+            <a:off x="777240" y="1170432"/>
+            <a:ext cx="1508760" cy="292608"/>
+          </a:xfrm>
+          <a:prstGeom prst="roundRect">
+            <a:avLst>
+              <a:gd name="adj" fmla="val 15625"/>
+            </a:avLst>
+          </a:prstGeom>
+          <a:solidFill>
+            <a:srgbClr val="DBEAFE"/>
+          </a:solidFill>
+          <a:ln w="12700">
+            <a:solidFill>
+              <a:srgbClr val="DBEAFE"/>
+            </a:solidFill>
+            <a:prstDash val="solid"/>
+          </a:ln>
+        </p:spPr>
+      </p:sp>
+      <p:sp>
+        <p:nvSpPr>
+          <p:cNvPr id="64" name="Text 62"/>
+          <p:cNvSpPr/>
+          <p:nvPr/>
+        </p:nvSpPr>
+        <p:spPr>
+          <a:xfrm>
+            <a:off x="850392" y="1239012"/>
+            <a:ext cx="1362456" cy="118872"/>
+          </a:xfrm>
+          <a:prstGeom prst="rect">
+            <a:avLst/>
+          </a:prstGeom>
+          <a:noFill/>
+          <a:ln/>
+        </p:spPr>
+        <p:txBody>
+          <a:bodyPr wrap="square" lIns="0" tIns="0" rIns="0" bIns="0" rtlCol="0" anchor="ctr">
+            <a:normAutofit/>
+          </a:bodyPr>
+          <a:lstStyle/>
+          <a:p>
+            <a:pPr algn="ctr" indent="0" marL="0">
+              <a:buNone/>
+            </a:pPr>
+            <a:r>
+              <a:rPr lang="en-US" sz="700" b="1" dirty="0">
+                <a:solidFill>
+                  <a:srgbClr val="2563EB"/>
+                </a:solidFill>
+                <a:latin typeface="PingFang SC" pitchFamily="34" charset="0"/>
+                <a:ea typeface="PingFang SC" pitchFamily="34" charset="-122"/>
+                <a:cs typeface="PingFang SC" pitchFamily="34" charset="-120"/>
+              </a:rPr>
+              <a:t>蓝色 = LLM Agent</a:t>
+            </a:r>
+            <a:endParaRPr lang="en-US" sz="700" dirty="0"/>
+          </a:p>
+        </p:txBody>
+      </p:sp>
+      <p:sp>
+        <p:nvSpPr>
+          <p:cNvPr id="65" name="Shape 63"/>
+          <p:cNvSpPr/>
+          <p:nvPr/>
+        </p:nvSpPr>
+        <p:spPr>
+          <a:xfrm>
+            <a:off x="2514600" y="1170432"/>
+            <a:ext cx="1508760" cy="292608"/>
+          </a:xfrm>
+          <a:prstGeom prst="roundRect">
+            <a:avLst>
+              <a:gd name="adj" fmla="val 15625"/>
             </a:avLst>
           </a:prstGeom>
           <a:solidFill>
@@ -6666,22 +7984,22 @@
           </a:solidFill>
           <a:ln w="12700">
             <a:solidFill>
-              <a:srgbClr val="16A34A"/>
-            </a:solidFill>
-            <a:prstDash val="solid"/>
-          </a:ln>
-        </p:spPr>
-      </p:sp>
-      <p:sp>
-        <p:nvSpPr>
-          <p:cNvPr id="32" name="Text 30"/>
-          <p:cNvSpPr/>
-          <p:nvPr/>
-        </p:nvSpPr>
-        <p:spPr>
-          <a:xfrm>
-            <a:off x="10195560" y="1179576"/>
-            <a:ext cx="914400" cy="356616"/>
+              <a:srgbClr val="DCFCE7"/>
+            </a:solidFill>
+            <a:prstDash val="solid"/>
+          </a:ln>
+        </p:spPr>
+      </p:sp>
+      <p:sp>
+        <p:nvSpPr>
+          <p:cNvPr id="66" name="Text 64"/>
+          <p:cNvSpPr/>
+          <p:nvPr/>
+        </p:nvSpPr>
+        <p:spPr>
+          <a:xfrm>
+            <a:off x="2587752" y="1239012"/>
+            <a:ext cx="1362456" cy="118872"/>
           </a:xfrm>
           <a:prstGeom prst="rect">
             <a:avLst/>
@@ -6699,511 +8017,29 @@
               <a:buNone/>
             </a:pPr>
             <a:r>
-              <a:rPr lang="en-US" sz="710" b="1" dirty="0">
-                <a:solidFill>
-                  <a:srgbClr val="172033"/>
-                </a:solidFill>
-                <a:latin typeface="PingFang SC" pitchFamily="34" charset="0"/>
-                <a:ea typeface="PingFang SC" pitchFamily="34" charset="-122"/>
-                <a:cs typeface="PingFang SC" pitchFamily="34" charset="-120"/>
-              </a:rPr>
-              <a:t>Exporter</a:t>
-            </a:r>
-            <a:endParaRPr lang="en-US" sz="710" dirty="0"/>
-          </a:p>
-        </p:txBody>
-      </p:sp>
-      <p:sp>
-        <p:nvSpPr>
-          <p:cNvPr id="33" name="Shape 31"/>
-          <p:cNvSpPr/>
-          <p:nvPr/>
-        </p:nvSpPr>
-        <p:spPr>
-          <a:xfrm>
-            <a:off x="11475720" y="1097280"/>
-            <a:ext cx="960120" cy="502920"/>
-          </a:xfrm>
-          <a:prstGeom prst="roundRect">
-            <a:avLst>
-              <a:gd name="adj" fmla="val 10909"/>
-            </a:avLst>
-          </a:prstGeom>
-          <a:solidFill>
-            <a:srgbClr val="DBEAFE"/>
-          </a:solidFill>
-          <a:ln w="12700">
-            <a:solidFill>
-              <a:srgbClr val="2563EB"/>
-            </a:solidFill>
-            <a:prstDash val="solid"/>
-          </a:ln>
-        </p:spPr>
-      </p:sp>
-      <p:sp>
-        <p:nvSpPr>
-          <p:cNvPr id="34" name="Text 32"/>
-          <p:cNvSpPr/>
-          <p:nvPr/>
-        </p:nvSpPr>
-        <p:spPr>
-          <a:xfrm>
-            <a:off x="11521440" y="1179576"/>
-            <a:ext cx="868680" cy="356616"/>
-          </a:xfrm>
-          <a:prstGeom prst="rect">
-            <a:avLst/>
-          </a:prstGeom>
-          <a:noFill/>
-          <a:ln/>
-        </p:spPr>
-        <p:txBody>
-          <a:bodyPr wrap="square" lIns="0" tIns="0" rIns="0" bIns="0" rtlCol="0" anchor="ctr">
-            <a:normAutofit/>
-          </a:bodyPr>
-          <a:lstStyle/>
-          <a:p>
-            <a:pPr algn="ctr" indent="0" marL="0">
-              <a:buNone/>
-            </a:pPr>
-            <a:r>
-              <a:rPr lang="en-US" sz="710" b="1" dirty="0">
-                <a:solidFill>
-                  <a:srgbClr val="172033"/>
-                </a:solidFill>
-                <a:latin typeface="PingFang SC" pitchFamily="34" charset="0"/>
-                <a:ea typeface="PingFang SC" pitchFamily="34" charset="-122"/>
-                <a:cs typeface="PingFang SC" pitchFamily="34" charset="-120"/>
-              </a:rPr>
-              <a:t>Memory</a:t>
-            </a:r>
-            <a:endParaRPr lang="en-US" sz="710" dirty="0"/>
-          </a:p>
-          <a:p>
-            <a:pPr algn="ctr" indent="0" marL="0">
-              <a:buNone/>
-            </a:pPr>
-            <a:r>
-              <a:rPr lang="en-US" sz="710" b="1" dirty="0">
-                <a:solidFill>
-                  <a:srgbClr val="172033"/>
-                </a:solidFill>
-                <a:latin typeface="PingFang SC" pitchFamily="34" charset="0"/>
-                <a:ea typeface="PingFang SC" pitchFamily="34" charset="-122"/>
-                <a:cs typeface="PingFang SC" pitchFamily="34" charset="-120"/>
-              </a:rPr>
-              <a:t>Curator</a:t>
-            </a:r>
-            <a:endParaRPr lang="en-US" sz="710" dirty="0"/>
-          </a:p>
-        </p:txBody>
-      </p:sp>
-      <p:sp>
-        <p:nvSpPr>
-          <p:cNvPr id="35" name="Shape 33"/>
-          <p:cNvSpPr/>
-          <p:nvPr/>
-        </p:nvSpPr>
-        <p:spPr>
-          <a:xfrm>
-            <a:off x="1463040" y="2994660"/>
-            <a:ext cx="228600" cy="0"/>
-          </a:xfrm>
-          <a:prstGeom prst="line">
-            <a:avLst/>
-          </a:prstGeom>
-          <a:noFill/>
-          <a:ln w="16510">
-            <a:solidFill>
-              <a:srgbClr val="D0D5DD"/>
-            </a:solidFill>
-            <a:prstDash val="solid"/>
-            <a:headEnd type="none"/>
-            <a:tailEnd type="triangle"/>
-          </a:ln>
-        </p:spPr>
-      </p:sp>
-      <p:sp>
-        <p:nvSpPr>
-          <p:cNvPr id="36" name="Shape 34"/>
-          <p:cNvSpPr/>
-          <p:nvPr/>
-        </p:nvSpPr>
-        <p:spPr>
-          <a:xfrm>
-            <a:off x="2743200" y="2994660"/>
-            <a:ext cx="228600" cy="0"/>
-          </a:xfrm>
-          <a:prstGeom prst="line">
-            <a:avLst/>
-          </a:prstGeom>
-          <a:noFill/>
-          <a:ln w="16510">
-            <a:solidFill>
-              <a:srgbClr val="D0D5DD"/>
-            </a:solidFill>
-            <a:prstDash val="solid"/>
-            <a:headEnd type="none"/>
-            <a:tailEnd type="triangle"/>
-          </a:ln>
-        </p:spPr>
-      </p:sp>
-      <p:sp>
-        <p:nvSpPr>
-          <p:cNvPr id="37" name="Shape 35"/>
-          <p:cNvSpPr/>
-          <p:nvPr/>
-        </p:nvSpPr>
-        <p:spPr>
-          <a:xfrm>
-            <a:off x="4023360" y="2994660"/>
-            <a:ext cx="228600" cy="0"/>
-          </a:xfrm>
-          <a:prstGeom prst="line">
-            <a:avLst/>
-          </a:prstGeom>
-          <a:noFill/>
-          <a:ln w="16510">
-            <a:solidFill>
-              <a:srgbClr val="D0D5DD"/>
-            </a:solidFill>
-            <a:prstDash val="solid"/>
-            <a:headEnd type="none"/>
-            <a:tailEnd type="triangle"/>
-          </a:ln>
-        </p:spPr>
-      </p:sp>
-      <p:sp>
-        <p:nvSpPr>
-          <p:cNvPr id="38" name="Shape 36"/>
-          <p:cNvSpPr/>
-          <p:nvPr/>
-        </p:nvSpPr>
-        <p:spPr>
-          <a:xfrm>
-            <a:off x="5303520" y="2994660"/>
-            <a:ext cx="228600" cy="0"/>
-          </a:xfrm>
-          <a:prstGeom prst="line">
-            <a:avLst/>
-          </a:prstGeom>
-          <a:noFill/>
-          <a:ln w="16510">
-            <a:solidFill>
-              <a:srgbClr val="D0D5DD"/>
-            </a:solidFill>
-            <a:prstDash val="solid"/>
-            <a:headEnd type="none"/>
-            <a:tailEnd type="triangle"/>
-          </a:ln>
-        </p:spPr>
-      </p:sp>
-      <p:sp>
-        <p:nvSpPr>
-          <p:cNvPr id="39" name="Shape 37"/>
-          <p:cNvSpPr/>
-          <p:nvPr/>
-        </p:nvSpPr>
-        <p:spPr>
-          <a:xfrm>
-            <a:off x="6720840" y="2994660"/>
-            <a:ext cx="365760" cy="-731520"/>
-          </a:xfrm>
-          <a:prstGeom prst="line">
-            <a:avLst/>
-          </a:prstGeom>
-          <a:noFill/>
-          <a:ln w="16510">
-            <a:solidFill>
-              <a:srgbClr val="F97316"/>
-            </a:solidFill>
-            <a:prstDash val="solid"/>
-            <a:headEnd type="none"/>
-            <a:tailEnd type="triangle"/>
-          </a:ln>
-        </p:spPr>
-      </p:sp>
-      <p:sp>
-        <p:nvSpPr>
-          <p:cNvPr id="40" name="Shape 38"/>
-          <p:cNvSpPr/>
-          <p:nvPr/>
-        </p:nvSpPr>
-        <p:spPr>
-          <a:xfrm>
-            <a:off x="6720840" y="2994660"/>
-            <a:ext cx="365760" cy="731520"/>
-          </a:xfrm>
-          <a:prstGeom prst="line">
-            <a:avLst/>
-          </a:prstGeom>
-          <a:noFill/>
-          <a:ln w="16510">
-            <a:solidFill>
-              <a:srgbClr val="F97316"/>
-            </a:solidFill>
-            <a:prstDash val="solid"/>
-            <a:headEnd type="none"/>
-            <a:tailEnd type="triangle"/>
-          </a:ln>
-        </p:spPr>
-      </p:sp>
-      <p:sp>
-        <p:nvSpPr>
-          <p:cNvPr id="41" name="Shape 39"/>
-          <p:cNvSpPr/>
-          <p:nvPr/>
-        </p:nvSpPr>
-        <p:spPr>
-          <a:xfrm>
-            <a:off x="8183880" y="2263140"/>
-            <a:ext cx="365760" cy="731520"/>
-          </a:xfrm>
-          <a:prstGeom prst="line">
-            <a:avLst/>
-          </a:prstGeom>
-          <a:noFill/>
-          <a:ln w="16510">
-            <a:solidFill>
-              <a:srgbClr val="F97316"/>
-            </a:solidFill>
-            <a:prstDash val="solid"/>
-            <a:headEnd type="none"/>
-            <a:tailEnd type="triangle"/>
-          </a:ln>
-        </p:spPr>
-      </p:sp>
-      <p:sp>
-        <p:nvSpPr>
-          <p:cNvPr id="42" name="Shape 40"/>
-          <p:cNvSpPr/>
-          <p:nvPr/>
-        </p:nvSpPr>
-        <p:spPr>
-          <a:xfrm>
-            <a:off x="8183880" y="3726180"/>
-            <a:ext cx="365760" cy="-731520"/>
-          </a:xfrm>
-          <a:prstGeom prst="line">
-            <a:avLst/>
-          </a:prstGeom>
-          <a:noFill/>
-          <a:ln w="16510">
-            <a:solidFill>
-              <a:srgbClr val="F97316"/>
-            </a:solidFill>
-            <a:prstDash val="solid"/>
-            <a:headEnd type="none"/>
-            <a:tailEnd type="triangle"/>
-          </a:ln>
-        </p:spPr>
-      </p:sp>
-      <p:sp>
-        <p:nvSpPr>
-          <p:cNvPr id="43" name="Shape 41"/>
-          <p:cNvSpPr/>
-          <p:nvPr/>
-        </p:nvSpPr>
-        <p:spPr>
-          <a:xfrm>
-            <a:off x="9601200" y="2994660"/>
-            <a:ext cx="228600" cy="0"/>
-          </a:xfrm>
-          <a:prstGeom prst="line">
-            <a:avLst/>
-          </a:prstGeom>
-          <a:noFill/>
-          <a:ln w="16510">
-            <a:solidFill>
-              <a:srgbClr val="D0D5DD"/>
-            </a:solidFill>
-            <a:prstDash val="solid"/>
-            <a:headEnd type="none"/>
-            <a:tailEnd type="triangle"/>
-          </a:ln>
-        </p:spPr>
-      </p:sp>
-      <p:sp>
-        <p:nvSpPr>
-          <p:cNvPr id="44" name="Shape 42"/>
-          <p:cNvSpPr/>
-          <p:nvPr/>
-        </p:nvSpPr>
-        <p:spPr>
-          <a:xfrm>
-            <a:off x="10881360" y="2994660"/>
-            <a:ext cx="137160" cy="0"/>
-          </a:xfrm>
-          <a:prstGeom prst="line">
-            <a:avLst/>
-          </a:prstGeom>
-          <a:noFill/>
-          <a:ln w="16510">
-            <a:solidFill>
-              <a:srgbClr val="D0D5DD"/>
-            </a:solidFill>
-            <a:prstDash val="solid"/>
-            <a:headEnd type="none"/>
-            <a:tailEnd type="triangle"/>
-          </a:ln>
-        </p:spPr>
-      </p:sp>
-      <p:sp>
-        <p:nvSpPr>
-          <p:cNvPr id="45" name="Shape 43"/>
-          <p:cNvSpPr/>
-          <p:nvPr/>
-        </p:nvSpPr>
-        <p:spPr>
-          <a:xfrm>
-            <a:off x="11475720" y="2743200"/>
-            <a:ext cx="-1874520" cy="1920240"/>
-          </a:xfrm>
-          <a:prstGeom prst="line">
-            <a:avLst/>
-          </a:prstGeom>
-          <a:noFill/>
-          <a:ln w="16510">
-            <a:solidFill>
-              <a:srgbClr val="F97316"/>
-            </a:solidFill>
-            <a:prstDash val="solid"/>
-            <a:tailEnd type="triangle"/>
-          </a:ln>
-        </p:spPr>
-      </p:sp>
-      <p:sp>
-        <p:nvSpPr>
-          <p:cNvPr id="46" name="Shape 44"/>
-          <p:cNvSpPr/>
-          <p:nvPr/>
-        </p:nvSpPr>
-        <p:spPr>
-          <a:xfrm>
-            <a:off x="9601200" y="4914900"/>
-            <a:ext cx="228600" cy="0"/>
-          </a:xfrm>
-          <a:prstGeom prst="line">
-            <a:avLst/>
-          </a:prstGeom>
-          <a:noFill/>
-          <a:ln w="16510">
-            <a:solidFill>
-              <a:srgbClr val="F97316"/>
-            </a:solidFill>
-            <a:prstDash val="solid"/>
-            <a:headEnd type="none"/>
-            <a:tailEnd type="triangle"/>
-          </a:ln>
-        </p:spPr>
-      </p:sp>
-      <p:sp>
-        <p:nvSpPr>
-          <p:cNvPr id="47" name="Shape 45"/>
-          <p:cNvSpPr/>
-          <p:nvPr/>
-        </p:nvSpPr>
-        <p:spPr>
-          <a:xfrm>
-            <a:off x="10881360" y="4914900"/>
-            <a:ext cx="137160" cy="0"/>
-          </a:xfrm>
-          <a:prstGeom prst="line">
-            <a:avLst/>
-          </a:prstGeom>
-          <a:noFill/>
-          <a:ln w="16510">
-            <a:solidFill>
-              <a:srgbClr val="F97316"/>
-            </a:solidFill>
-            <a:prstDash val="solid"/>
-            <a:headEnd type="none"/>
-            <a:tailEnd type="triangle"/>
-          </a:ln>
-        </p:spPr>
-      </p:sp>
-      <p:sp>
-        <p:nvSpPr>
-          <p:cNvPr id="48" name="Shape 46"/>
-          <p:cNvSpPr/>
-          <p:nvPr/>
-        </p:nvSpPr>
-        <p:spPr>
-          <a:xfrm>
-            <a:off x="11448288" y="4663440"/>
-            <a:ext cx="0" cy="-1417320"/>
-          </a:xfrm>
-          <a:prstGeom prst="line">
-            <a:avLst/>
-          </a:prstGeom>
-          <a:noFill/>
-          <a:ln w="16510">
-            <a:solidFill>
-              <a:srgbClr val="F97316"/>
-            </a:solidFill>
-            <a:prstDash val="solid"/>
-            <a:tailEnd type="triangle"/>
-          </a:ln>
-        </p:spPr>
-      </p:sp>
-      <p:sp>
-        <p:nvSpPr>
-          <p:cNvPr id="49" name="Shape 47"/>
-          <p:cNvSpPr/>
-          <p:nvPr/>
-        </p:nvSpPr>
-        <p:spPr>
-          <a:xfrm>
-            <a:off x="11475720" y="2743200"/>
-            <a:ext cx="-411480" cy="-1143000"/>
-          </a:xfrm>
-          <a:prstGeom prst="line">
-            <a:avLst/>
-          </a:prstGeom>
-          <a:noFill/>
-          <a:ln w="16510">
-            <a:solidFill>
-              <a:srgbClr val="16A34A"/>
-            </a:solidFill>
-            <a:prstDash val="solid"/>
-            <a:tailEnd type="triangle"/>
-          </a:ln>
-        </p:spPr>
-      </p:sp>
-      <p:sp>
-        <p:nvSpPr>
-          <p:cNvPr id="50" name="Shape 48"/>
-          <p:cNvSpPr/>
-          <p:nvPr/>
-        </p:nvSpPr>
-        <p:spPr>
-          <a:xfrm>
-            <a:off x="11155680" y="1348740"/>
-            <a:ext cx="320040" cy="0"/>
-          </a:xfrm>
-          <a:prstGeom prst="line">
-            <a:avLst/>
-          </a:prstGeom>
-          <a:noFill/>
-          <a:ln w="16510">
-            <a:solidFill>
-              <a:srgbClr val="16A34A"/>
-            </a:solidFill>
-            <a:prstDash val="solid"/>
-            <a:headEnd type="none"/>
-            <a:tailEnd type="triangle"/>
-          </a:ln>
-        </p:spPr>
-      </p:sp>
-      <p:sp>
-        <p:nvSpPr>
-          <p:cNvPr id="51" name="Shape 49"/>
-          <p:cNvSpPr/>
-          <p:nvPr/>
-        </p:nvSpPr>
-        <p:spPr>
-          <a:xfrm>
-            <a:off x="777240" y="1170432"/>
+              <a:rPr lang="en-US" sz="700" b="1" dirty="0">
+                <a:solidFill>
+                  <a:srgbClr val="16A34A"/>
+                </a:solidFill>
+                <a:latin typeface="PingFang SC" pitchFamily="34" charset="0"/>
+                <a:ea typeface="PingFang SC" pitchFamily="34" charset="-122"/>
+                <a:cs typeface="PingFang SC" pitchFamily="34" charset="-120"/>
+              </a:rPr>
+              <a:t>绿色 = 本地工具</a:t>
+            </a:r>
+            <a:endParaRPr lang="en-US" sz="700" dirty="0"/>
+          </a:p>
+        </p:txBody>
+      </p:sp>
+      <p:sp>
+        <p:nvSpPr>
+          <p:cNvPr id="67" name="Shape 65"/>
+          <p:cNvSpPr/>
+          <p:nvPr/>
+        </p:nvSpPr>
+        <p:spPr>
+          <a:xfrm>
+            <a:off x="4251960" y="1170432"/>
             <a:ext cx="1508760" cy="292608"/>
           </a:xfrm>
           <a:prstGeom prst="roundRect">
@@ -7212,25 +8048,25 @@
             </a:avLst>
           </a:prstGeom>
           <a:solidFill>
-            <a:srgbClr val="DBEAFE"/>
+            <a:srgbClr val="FFEDD5"/>
           </a:solidFill>
           <a:ln w="12700">
             <a:solidFill>
-              <a:srgbClr val="DBEAFE"/>
-            </a:solidFill>
-            <a:prstDash val="solid"/>
-          </a:ln>
-        </p:spPr>
-      </p:sp>
-      <p:sp>
-        <p:nvSpPr>
-          <p:cNvPr id="52" name="Text 50"/>
-          <p:cNvSpPr/>
-          <p:nvPr/>
-        </p:nvSpPr>
-        <p:spPr>
-          <a:xfrm>
-            <a:off x="850392" y="1239012"/>
+              <a:srgbClr val="FFEDD5"/>
+            </a:solidFill>
+            <a:prstDash val="solid"/>
+          </a:ln>
+        </p:spPr>
+      </p:sp>
+      <p:sp>
+        <p:nvSpPr>
+          <p:cNvPr id="68" name="Text 66"/>
+          <p:cNvSpPr/>
+          <p:nvPr/>
+        </p:nvSpPr>
+        <p:spPr>
+          <a:xfrm>
+            <a:off x="4325112" y="1239012"/>
             <a:ext cx="1362456" cy="118872"/>
           </a:xfrm>
           <a:prstGeom prst="rect">
@@ -7251,13 +8087,13 @@
             <a:r>
               <a:rPr lang="en-US" sz="700" b="1" dirty="0">
                 <a:solidFill>
-                  <a:srgbClr val="2563EB"/>
-                </a:solidFill>
-                <a:latin typeface="PingFang SC" pitchFamily="34" charset="0"/>
-                <a:ea typeface="PingFang SC" pitchFamily="34" charset="-122"/>
-                <a:cs typeface="PingFang SC" pitchFamily="34" charset="-120"/>
-              </a:rPr>
-              <a:t>蓝色 = LLM Agent</a:t>
+                  <a:srgbClr val="F97316"/>
+                </a:solidFill>
+                <a:latin typeface="PingFang SC" pitchFamily="34" charset="0"/>
+                <a:ea typeface="PingFang SC" pitchFamily="34" charset="-122"/>
+                <a:cs typeface="PingFang SC" pitchFamily="34" charset="-120"/>
+              </a:rPr>
+              <a:t>橙色 = 修复/评价</a:t>
             </a:r>
             <a:endParaRPr lang="en-US" sz="700" dirty="0"/>
           </a:p>
@@ -7265,41 +8101,41 @@
       </p:sp>
       <p:sp>
         <p:nvSpPr>
-          <p:cNvPr id="53" name="Shape 51"/>
-          <p:cNvSpPr/>
-          <p:nvPr/>
-        </p:nvSpPr>
-        <p:spPr>
-          <a:xfrm>
-            <a:off x="2514600" y="1170432"/>
-            <a:ext cx="1508760" cy="292608"/>
+          <p:cNvPr id="69" name="Shape 67"/>
+          <p:cNvSpPr/>
+          <p:nvPr/>
+        </p:nvSpPr>
+        <p:spPr>
+          <a:xfrm>
+            <a:off x="6080760" y="960120"/>
+            <a:ext cx="5349240" cy="530352"/>
           </a:xfrm>
           <a:prstGeom prst="roundRect">
             <a:avLst>
-              <a:gd name="adj" fmla="val 15625"/>
+              <a:gd name="adj" fmla="val 10345"/>
             </a:avLst>
           </a:prstGeom>
           <a:solidFill>
-            <a:srgbClr val="DCFCE7"/>
+            <a:srgbClr val="F8FAFC"/>
           </a:solidFill>
           <a:ln w="12700">
             <a:solidFill>
-              <a:srgbClr val="DCFCE7"/>
-            </a:solidFill>
-            <a:prstDash val="solid"/>
-          </a:ln>
-        </p:spPr>
-      </p:sp>
-      <p:sp>
-        <p:nvSpPr>
-          <p:cNvPr id="54" name="Text 52"/>
-          <p:cNvSpPr/>
-          <p:nvPr/>
-        </p:nvSpPr>
-        <p:spPr>
-          <a:xfrm>
-            <a:off x="2587752" y="1239012"/>
-            <a:ext cx="1362456" cy="118872"/>
+              <a:srgbClr val="7C3AED"/>
+            </a:solidFill>
+            <a:prstDash val="solid"/>
+          </a:ln>
+        </p:spPr>
+      </p:sp>
+      <p:sp>
+        <p:nvSpPr>
+          <p:cNvPr id="70" name="Text 68"/>
+          <p:cNvSpPr/>
+          <p:nvPr/>
+        </p:nvSpPr>
+        <p:spPr>
+          <a:xfrm>
+            <a:off x="6208776" y="1069848"/>
+            <a:ext cx="5093208" cy="164592"/>
           </a:xfrm>
           <a:prstGeom prst="rect">
             <a:avLst/>
@@ -7313,95 +8149,68 @@
           </a:bodyPr>
           <a:lstStyle/>
           <a:p>
-            <a:pPr algn="ctr" indent="0" marL="0">
-              <a:buNone/>
-            </a:pPr>
-            <a:r>
-              <a:rPr lang="en-US" sz="700" b="1" dirty="0">
-                <a:solidFill>
-                  <a:srgbClr val="16A34A"/>
-                </a:solidFill>
-                <a:latin typeface="PingFang SC" pitchFamily="34" charset="0"/>
-                <a:ea typeface="PingFang SC" pitchFamily="34" charset="-122"/>
-                <a:cs typeface="PingFang SC" pitchFamily="34" charset="-120"/>
-              </a:rPr>
-              <a:t>绿色 = 本地工具</a:t>
-            </a:r>
-            <a:endParaRPr lang="en-US" sz="700" dirty="0"/>
-          </a:p>
-        </p:txBody>
-      </p:sp>
-      <p:sp>
-        <p:nvSpPr>
-          <p:cNvPr id="55" name="Shape 53"/>
-          <p:cNvSpPr/>
-          <p:nvPr/>
-        </p:nvSpPr>
-        <p:spPr>
-          <a:xfrm>
-            <a:off x="4251960" y="1170432"/>
-            <a:ext cx="1508760" cy="292608"/>
-          </a:xfrm>
-          <a:prstGeom prst="roundRect">
-            <a:avLst>
-              <a:gd name="adj" fmla="val 15625"/>
-            </a:avLst>
-          </a:prstGeom>
-          <a:solidFill>
-            <a:srgbClr val="FFEDD5"/>
-          </a:solidFill>
-          <a:ln w="12700">
-            <a:solidFill>
-              <a:srgbClr val="FFEDD5"/>
-            </a:solidFill>
-            <a:prstDash val="solid"/>
-          </a:ln>
-        </p:spPr>
-      </p:sp>
-      <p:sp>
-        <p:nvSpPr>
-          <p:cNvPr id="56" name="Text 54"/>
-          <p:cNvSpPr/>
-          <p:nvPr/>
-        </p:nvSpPr>
-        <p:spPr>
-          <a:xfrm>
-            <a:off x="4325112" y="1239012"/>
-            <a:ext cx="1362456" cy="118872"/>
-          </a:xfrm>
-          <a:prstGeom prst="rect">
-            <a:avLst/>
-          </a:prstGeom>
-          <a:noFill/>
-          <a:ln/>
-        </p:spPr>
-        <p:txBody>
-          <a:bodyPr wrap="square" lIns="0" tIns="0" rIns="0" bIns="0" rtlCol="0" anchor="ctr">
+            <a:pPr indent="0" marL="0">
+              <a:buNone/>
+            </a:pPr>
+            <a:r>
+              <a:rPr lang="en-US" sz="770" b="1" dirty="0">
+                <a:solidFill>
+                  <a:srgbClr val="7C3AED"/>
+                </a:solidFill>
+                <a:latin typeface="PingFang SC" pitchFamily="34" charset="0"/>
+                <a:ea typeface="PingFang SC" pitchFamily="34" charset="-122"/>
+                <a:cs typeface="PingFang SC" pitchFamily="34" charset="-120"/>
+              </a:rPr>
+              <a:t>依赖关系说明</a:t>
+            </a:r>
+            <a:endParaRPr lang="en-US" sz="770" dirty="0"/>
+          </a:p>
+        </p:txBody>
+      </p:sp>
+      <p:sp>
+        <p:nvSpPr>
+          <p:cNvPr id="71" name="Text 69"/>
+          <p:cNvSpPr/>
+          <p:nvPr/>
+        </p:nvSpPr>
+        <p:spPr>
+          <a:xfrm>
+            <a:off x="6208776" y="1289304"/>
+            <a:ext cx="5093208" cy="146304"/>
+          </a:xfrm>
+          <a:prstGeom prst="rect">
+            <a:avLst/>
+          </a:prstGeom>
+          <a:noFill/>
+          <a:ln/>
+        </p:spPr>
+        <p:txBody>
+          <a:bodyPr wrap="square" lIns="127" tIns="127" rIns="127" bIns="127" rtlCol="0" anchor="t">
             <a:normAutofit/>
           </a:bodyPr>
           <a:lstStyle/>
           <a:p>
-            <a:pPr algn="ctr" indent="0" marL="0">
-              <a:buNone/>
-            </a:pPr>
-            <a:r>
-              <a:rPr lang="en-US" sz="700" b="1" dirty="0">
-                <a:solidFill>
-                  <a:srgbClr val="F97316"/>
-                </a:solidFill>
-                <a:latin typeface="PingFang SC" pitchFamily="34" charset="0"/>
-                <a:ea typeface="PingFang SC" pitchFamily="34" charset="-122"/>
-                <a:cs typeface="PingFang SC" pitchFamily="34" charset="-120"/>
-              </a:rPr>
-              <a:t>橙色 = 修复/评价</a:t>
-            </a:r>
-            <a:endParaRPr lang="en-US" sz="700" dirty="0"/>
-          </a:p>
-        </p:txBody>
-      </p:sp>
-      <p:sp>
-        <p:nvSpPr>
-          <p:cNvPr id="57" name="Text 55"/>
+            <a:pPr indent="0" marL="0">
+              <a:buNone/>
+            </a:pPr>
+            <a:r>
+              <a:rPr lang="en-US" sz="710" dirty="0">
+                <a:solidFill>
+                  <a:srgbClr val="172033"/>
+                </a:solidFill>
+                <a:latin typeface="PingFang SC" pitchFamily="34" charset="0"/>
+                <a:ea typeface="PingFang SC" pitchFamily="34" charset="-122"/>
+                <a:cs typeface="PingFang SC" pitchFamily="34" charset="-120"/>
+              </a:rPr>
+              <a:t>Generator 扇出到两个 Critic；Selector 汇总后进入 Optimizer。只有 Validator 判定有阻塞问题时，下方 repair branch 才执行。</a:t>
+            </a:r>
+            <a:endParaRPr lang="en-US" sz="710" dirty="0"/>
+          </a:p>
+        </p:txBody>
+      </p:sp>
+      <p:sp>
+        <p:nvSpPr>
+          <p:cNvPr id="72" name="Text 70"/>
           <p:cNvSpPr/>
           <p:nvPr/>
         </p:nvSpPr>
@@ -7440,7 +8249,7 @@
       </p:sp>
       <p:sp>
         <p:nvSpPr>
-          <p:cNvPr id="58" name="Text 56"/>
+          <p:cNvPr id="73" name="Text 71"/>
           <p:cNvSpPr/>
           <p:nvPr/>
         </p:nvSpPr>
@@ -7479,7 +8288,7 @@
       </p:sp>
       <p:sp>
         <p:nvSpPr>
-          <p:cNvPr id="59" name="Text 57"/>
+          <p:cNvPr id="74" name="Text 72"/>
           <p:cNvSpPr/>
           <p:nvPr/>
         </p:nvSpPr>
@@ -7840,7 +8649,24 @@
                 <a:ea typeface="PingFang SC" pitchFamily="34" charset="-122"/>
                 <a:cs typeface="PingFang SC" pitchFamily="34" charset="-120"/>
               </a:rPr>
-              <a:t>把用户输入、历史记忆和验收标准显式化</a:t>
+              <a:t>输入：prompt + goal + memory</a:t>
+            </a:r>
+            <a:endParaRPr lang="en-US" sz="820" dirty="0"/>
+          </a:p>
+          <a:p>
+            <a:pPr indent="0" marL="0">
+              <a:buNone/>
+            </a:pPr>
+            <a:r>
+              <a:rPr lang="en-US" sz="820" dirty="0">
+                <a:solidFill>
+                  <a:srgbClr val="667085"/>
+                </a:solidFill>
+                <a:latin typeface="PingFang SC" pitchFamily="34" charset="0"/>
+                <a:ea typeface="PingFang SC" pitchFamily="34" charset="-122"/>
+                <a:cs typeface="PingFang SC" pitchFamily="34" charset="-120"/>
+              </a:rPr>
+              <a:t>输出：GenerationGoal、rewritten prompt、可复用经验</a:t>
             </a:r>
             <a:endParaRPr lang="en-US" sz="820" dirty="0"/>
           </a:p>
@@ -8014,7 +8840,24 @@
                 <a:ea typeface="PingFang SC" pitchFamily="34" charset="-122"/>
                 <a:cs typeface="PingFang SC" pitchFamily="34" charset="-120"/>
               </a:rPr>
-              <a:t>从意图到结构化 icon plan，再生成多个 SVG draft</a:t>
+              <a:t>输入：rewritten prompt + plan</a:t>
+            </a:r>
+            <a:endParaRPr lang="en-US" sz="820" dirty="0"/>
+          </a:p>
+          <a:p>
+            <a:pPr indent="0" marL="0">
+              <a:buNone/>
+            </a:pPr>
+            <a:r>
+              <a:rPr lang="en-US" sz="820" dirty="0">
+                <a:solidFill>
+                  <a:srgbClr val="667085"/>
+                </a:solidFill>
+                <a:latin typeface="PingFang SC" pitchFamily="34" charset="0"/>
+                <a:ea typeface="PingFang SC" pitchFamily="34" charset="-122"/>
+                <a:cs typeface="PingFang SC" pitchFamily="34" charset="-120"/>
+              </a:rPr>
+              <a:t>输出：3 个不同 SVG draft，全部走 SvgCheckTool</a:t>
             </a:r>
             <a:endParaRPr lang="en-US" sz="820" dirty="0"/>
           </a:p>
@@ -8205,7 +9048,24 @@
                 <a:ea typeface="PingFang SC" pitchFamily="34" charset="-122"/>
                 <a:cs typeface="PingFang SC" pitchFamily="34" charset="-120"/>
               </a:rPr>
-              <a:t>分别看语义、SVG 质量，再给出 winner 和 repair brief</a:t>
+              <a:t>输入：候选 SVG + tool report</a:t>
+            </a:r>
+            <a:endParaRPr lang="en-US" sz="820" dirty="0"/>
+          </a:p>
+          <a:p>
+            <a:pPr indent="0" marL="0">
+              <a:buNone/>
+            </a:pPr>
+            <a:r>
+              <a:rPr lang="en-US" sz="820" dirty="0">
+                <a:solidFill>
+                  <a:srgbClr val="667085"/>
+                </a:solidFill>
+                <a:latin typeface="PingFang SC" pitchFamily="34" charset="0"/>
+                <a:ea typeface="PingFang SC" pitchFamily="34" charset="-122"/>
+                <a:cs typeface="PingFang SC" pitchFamily="34" charset="-120"/>
+              </a:rPr>
+              <a:t>输出：语义分、质量分、winner 与 repair brief</a:t>
             </a:r>
             <a:endParaRPr lang="en-US" sz="820" dirty="0"/>
           </a:p>
@@ -8430,21 +9290,147 @@
                 <a:ea typeface="PingFang SC" pitchFamily="34" charset="-122"/>
                 <a:cs typeface="PingFang SC" pitchFamily="34" charset="-120"/>
               </a:rPr>
-              <a:t>把反馈转化为完整 SVG 修改，并形成可审计修复路线</a:t>
+              <a:t>输入：反馈和失败证据</a:t>
             </a:r>
             <a:endParaRPr lang="en-US" sz="820" dirty="0"/>
           </a:p>
-        </p:txBody>
-      </p:sp>
-      <p:sp>
-        <p:nvSpPr>
-          <p:cNvPr id="21" name="Text 19"/>
-          <p:cNvSpPr/>
-          <p:nvPr/>
-        </p:nvSpPr>
-        <p:spPr>
-          <a:xfrm>
-            <a:off x="960120" y="5715000"/>
+          <a:p>
+            <a:pPr indent="0" marL="0">
+              <a:buNone/>
+            </a:pPr>
+            <a:r>
+              <a:rPr lang="en-US" sz="820" dirty="0">
+                <a:solidFill>
+                  <a:srgbClr val="667085"/>
+                </a:solidFill>
+                <a:latin typeface="PingFang SC" pitchFamily="34" charset="0"/>
+                <a:ea typeface="PingFang SC" pitchFamily="34" charset="-122"/>
+                <a:cs typeface="PingFang SC" pitchFamily="34" charset="-120"/>
+              </a:rPr>
+              <a:t>输出：optimized baseline、taxonomy、route、refined SVG</a:t>
+            </a:r>
+            <a:endParaRPr lang="en-US" sz="820" dirty="0"/>
+          </a:p>
+        </p:txBody>
+      </p:sp>
+      <p:sp>
+        <p:nvSpPr>
+          <p:cNvPr id="21" name="Shape 19"/>
+          <p:cNvSpPr/>
+          <p:nvPr/>
+        </p:nvSpPr>
+        <p:spPr>
+          <a:xfrm>
+            <a:off x="960120" y="5358384"/>
+            <a:ext cx="10241280" cy="502920"/>
+          </a:xfrm>
+          <a:prstGeom prst="roundRect">
+            <a:avLst>
+              <a:gd name="adj" fmla="val 9091"/>
+            </a:avLst>
+          </a:prstGeom>
+          <a:solidFill>
+            <a:srgbClr val="111827"/>
+          </a:solidFill>
+          <a:ln w="12700">
+            <a:solidFill>
+              <a:srgbClr val="0F172A"/>
+            </a:solidFill>
+            <a:prstDash val="solid"/>
+          </a:ln>
+        </p:spPr>
+      </p:sp>
+      <p:sp>
+        <p:nvSpPr>
+          <p:cNvPr id="22" name="Text 20"/>
+          <p:cNvSpPr/>
+          <p:nvPr/>
+        </p:nvSpPr>
+        <p:spPr>
+          <a:xfrm>
+            <a:off x="1069848" y="5458968"/>
+            <a:ext cx="10021824" cy="146304"/>
+          </a:xfrm>
+          <a:prstGeom prst="rect">
+            <a:avLst/>
+          </a:prstGeom>
+          <a:noFill/>
+          <a:ln/>
+        </p:spPr>
+        <p:txBody>
+          <a:bodyPr wrap="square" lIns="0" tIns="0" rIns="0" bIns="0" rtlCol="0" anchor="ctr">
+            <a:normAutofit/>
+          </a:bodyPr>
+          <a:lstStyle/>
+          <a:p>
+            <a:pPr indent="0" marL="0">
+              <a:buNone/>
+            </a:pPr>
+            <a:r>
+              <a:rPr lang="en-US" sz="680" b="1" dirty="0">
+                <a:solidFill>
+                  <a:srgbClr val="93C5FD"/>
+                </a:solidFill>
+                <a:latin typeface="PingFang SC" pitchFamily="34" charset="0"/>
+                <a:ea typeface="PingFang SC" pitchFamily="34" charset="-122"/>
+                <a:cs typeface="PingFang SC" pitchFamily="34" charset="-120"/>
+              </a:rPr>
+              <a:t>边界原则</a:t>
+            </a:r>
+            <a:endParaRPr lang="en-US" sz="680" dirty="0"/>
+          </a:p>
+        </p:txBody>
+      </p:sp>
+      <p:sp>
+        <p:nvSpPr>
+          <p:cNvPr id="23" name="Text 21"/>
+          <p:cNvSpPr/>
+          <p:nvPr/>
+        </p:nvSpPr>
+        <p:spPr>
+          <a:xfrm>
+            <a:off x="1069848" y="5678424"/>
+            <a:ext cx="10021824" cy="118872"/>
+          </a:xfrm>
+          <a:prstGeom prst="rect">
+            <a:avLst/>
+          </a:prstGeom>
+          <a:noFill/>
+          <a:ln/>
+        </p:spPr>
+        <p:txBody>
+          <a:bodyPr wrap="square" lIns="127" tIns="127" rIns="127" bIns="127" rtlCol="0" anchor="t">
+            <a:normAutofit/>
+          </a:bodyPr>
+          <a:lstStyle/>
+          <a:p>
+            <a:pPr indent="0" marL="0">
+              <a:buNone/>
+            </a:pPr>
+            <a:r>
+              <a:rPr lang="en-US" sz="610" dirty="0">
+                <a:solidFill>
+                  <a:srgbClr val="F9FAFB"/>
+                </a:solidFill>
+                <a:latin typeface="Menlo" pitchFamily="34" charset="0"/>
+                <a:ea typeface="Menlo" pitchFamily="34" charset="-122"/>
+                <a:cs typeface="Menlo" pitchFamily="34" charset="-120"/>
+              </a:rPr>
+              <a:t>Agent = LLM call with explicit role; Tool = deterministic SVG parse / safety check / render / export. No local SVG template fallback.</a:t>
+            </a:r>
+            <a:endParaRPr lang="en-US" sz="610" dirty="0"/>
+          </a:p>
+        </p:txBody>
+      </p:sp>
+      <p:sp>
+        <p:nvSpPr>
+          <p:cNvPr id="24" name="Text 22"/>
+          <p:cNvSpPr/>
+          <p:nvPr/>
+        </p:nvSpPr>
+        <p:spPr>
+          <a:xfrm>
+            <a:off x="960120" y="5925312"/>
             <a:ext cx="10241280" cy="292608"/>
           </a:xfrm>
           <a:prstGeom prst="rect">
@@ -8477,7 +9463,7 @@
       </p:sp>
       <p:sp>
         <p:nvSpPr>
-          <p:cNvPr id="22" name="Text 20"/>
+          <p:cNvPr id="25" name="Text 23"/>
           <p:cNvSpPr/>
           <p:nvPr/>
         </p:nvSpPr>
@@ -8516,7 +9502,7 @@
       </p:sp>
       <p:sp>
         <p:nvSpPr>
-          <p:cNvPr id="23" name="Text 21"/>
+          <p:cNvPr id="26" name="Text 24"/>
           <p:cNvSpPr/>
           <p:nvPr/>
         </p:nvSpPr>
@@ -8700,12 +9686,12 @@
         </p:nvSpPr>
         <p:spPr>
           <a:xfrm>
-            <a:off x="777240" y="1143000"/>
-            <a:ext cx="1325880" cy="1463040"/>
+            <a:off x="658368" y="1170432"/>
+            <a:ext cx="1188720" cy="1371600"/>
           </a:xfrm>
           <a:prstGeom prst="roundRect">
             <a:avLst>
-              <a:gd name="adj" fmla="val 4138"/>
+              <a:gd name="adj" fmla="val 4615"/>
             </a:avLst>
           </a:prstGeom>
           <a:solidFill>
@@ -8735,8 +9721,8 @@
         </p:blipFill>
         <p:spPr>
           <a:xfrm>
-            <a:off x="923544" y="1252728"/>
-            <a:ext cx="1033272" cy="1024128"/>
+            <a:off x="804672" y="1280160"/>
+            <a:ext cx="896112" cy="932688"/>
           </a:xfrm>
           <a:prstGeom prst="rect">
             <a:avLst/>
@@ -8751,8 +9737,8 @@
         </p:nvSpPr>
         <p:spPr>
           <a:xfrm>
-            <a:off x="905256" y="2350008"/>
-            <a:ext cx="1069848" cy="146304"/>
+            <a:off x="786384" y="2286000"/>
+            <a:ext cx="932688" cy="146304"/>
           </a:xfrm>
           <a:prstGeom prst="rect">
             <a:avLst/>
@@ -8778,7 +9764,7 @@
                 <a:ea typeface="PingFang SC" pitchFamily="34" charset="-122"/>
                 <a:cs typeface="PingFang SC" pitchFamily="34" charset="-120"/>
               </a:rPr>
-              <a:t>Final</a:t>
+              <a:t>Final rocket</a:t>
             </a:r>
             <a:endParaRPr lang="en-US" sz="720" dirty="0"/>
           </a:p>
@@ -8786,14 +9772,41 @@
       </p:sp>
       <p:sp>
         <p:nvSpPr>
-          <p:cNvPr id="8" name="Text 5"/>
-          <p:cNvSpPr/>
-          <p:nvPr/>
-        </p:nvSpPr>
-        <p:spPr>
-          <a:xfrm>
-            <a:off x="594360" y="2907792"/>
-            <a:ext cx="1737360" cy="411480"/>
+          <p:cNvPr id="8" name="Shape 5"/>
+          <p:cNvSpPr/>
+          <p:nvPr/>
+        </p:nvSpPr>
+        <p:spPr>
+          <a:xfrm>
+            <a:off x="530352" y="2834640"/>
+            <a:ext cx="2103120" cy="960120"/>
+          </a:xfrm>
+          <a:prstGeom prst="roundRect">
+            <a:avLst>
+              <a:gd name="adj" fmla="val 4762"/>
+            </a:avLst>
+          </a:prstGeom>
+          <a:solidFill>
+            <a:srgbClr val="111827"/>
+          </a:solidFill>
+          <a:ln w="12700">
+            <a:solidFill>
+              <a:srgbClr val="2563EB"/>
+            </a:solidFill>
+            <a:prstDash val="solid"/>
+          </a:ln>
+        </p:spPr>
+      </p:sp>
+      <p:sp>
+        <p:nvSpPr>
+          <p:cNvPr id="9" name="Text 6"/>
+          <p:cNvSpPr/>
+          <p:nvPr/>
+        </p:nvSpPr>
+        <p:spPr>
+          <a:xfrm>
+            <a:off x="640080" y="2935224"/>
+            <a:ext cx="1883664" cy="146304"/>
           </a:xfrm>
           <a:prstGeom prst="rect">
             <a:avLst/>
@@ -8807,55 +9820,113 @@
           </a:bodyPr>
           <a:lstStyle/>
           <a:p>
-            <a:pPr algn="ctr" indent="0" marL="0">
-              <a:buNone/>
-            </a:pPr>
-            <a:r>
-              <a:rPr lang="en-US" sz="850" dirty="0">
-                <a:solidFill>
-                  <a:srgbClr val="667085"/>
-                </a:solidFill>
-                <a:latin typeface="Aptos" pitchFamily="34" charset="0"/>
-                <a:ea typeface="Aptos" pitchFamily="34" charset="-122"/>
-                <a:cs typeface="Aptos" pitchFamily="34" charset="-120"/>
-              </a:rPr>
-              <a:t>Prompt</a:t>
-            </a:r>
-            <a:endParaRPr lang="en-US" sz="850" dirty="0"/>
-          </a:p>
-          <a:p>
-            <a:pPr algn="ctr" indent="0" marL="0">
-              <a:buNone/>
-            </a:pPr>
-            <a:r>
-              <a:rPr lang="en-US" sz="850" dirty="0">
-                <a:solidFill>
-                  <a:srgbClr val="667085"/>
-                </a:solidFill>
-                <a:latin typeface="Aptos" pitchFamily="34" charset="0"/>
-                <a:ea typeface="Aptos" pitchFamily="34" charset="-122"/>
-                <a:cs typeface="Aptos" pitchFamily="34" charset="-120"/>
-              </a:rPr>
-              <a:t>minimal rocket launch icon</a:t>
-            </a:r>
-            <a:endParaRPr lang="en-US" sz="850" dirty="0"/>
-          </a:p>
-        </p:txBody>
-      </p:sp>
-      <p:sp>
-        <p:nvSpPr>
-          <p:cNvPr id="9" name="Shape 6"/>
-          <p:cNvSpPr/>
-          <p:nvPr/>
-        </p:nvSpPr>
-        <p:spPr>
-          <a:xfrm>
-            <a:off x="2834640" y="1143000"/>
-            <a:ext cx="1417320" cy="502920"/>
+            <a:pPr indent="0" marL="0">
+              <a:buNone/>
+            </a:pPr>
+            <a:r>
+              <a:rPr lang="en-US" sz="680" b="1" dirty="0">
+                <a:solidFill>
+                  <a:srgbClr val="93C5FD"/>
+                </a:solidFill>
+                <a:latin typeface="PingFang SC" pitchFamily="34" charset="0"/>
+                <a:ea typeface="PingFang SC" pitchFamily="34" charset="-122"/>
+                <a:cs typeface="PingFang SC" pitchFamily="34" charset="-120"/>
+              </a:rPr>
+              <a:t>Prompt Rewriter 原始摘录</a:t>
+            </a:r>
+            <a:endParaRPr lang="en-US" sz="680" dirty="0"/>
+          </a:p>
+        </p:txBody>
+      </p:sp>
+      <p:sp>
+        <p:nvSpPr>
+          <p:cNvPr id="10" name="Text 7"/>
+          <p:cNvSpPr/>
+          <p:nvPr/>
+        </p:nvSpPr>
+        <p:spPr>
+          <a:xfrm>
+            <a:off x="640080" y="3154680"/>
+            <a:ext cx="1883664" cy="576072"/>
+          </a:xfrm>
+          <a:prstGeom prst="rect">
+            <a:avLst/>
+          </a:prstGeom>
+          <a:noFill/>
+          <a:ln/>
+        </p:spPr>
+        <p:txBody>
+          <a:bodyPr wrap="square" lIns="127" tIns="127" rIns="127" bIns="127" rtlCol="0" anchor="t">
+            <a:normAutofit/>
+          </a:bodyPr>
+          <a:lstStyle/>
+          <a:p>
+            <a:pPr indent="0" marL="0">
+              <a:buNone/>
+            </a:pPr>
+            <a:r>
+              <a:rPr lang="en-US" sz="610" dirty="0">
+                <a:solidFill>
+                  <a:srgbClr val="F9FAFB"/>
+                </a:solidFill>
+                <a:latin typeface="Menlo" pitchFamily="34" charset="0"/>
+                <a:ea typeface="Menlo" pitchFamily="34" charset="-122"/>
+                <a:cs typeface="Menlo" pitchFamily="34" charset="-120"/>
+              </a:rPr>
+              <a:t>A minimal, upright rocket icon</a:t>
+            </a:r>
+            <a:endParaRPr lang="en-US" sz="610" dirty="0"/>
+          </a:p>
+          <a:p>
+            <a:pPr indent="0" marL="0">
+              <a:buNone/>
+            </a:pPr>
+            <a:r>
+              <a:rPr lang="en-US" sz="610" dirty="0">
+                <a:solidFill>
+                  <a:srgbClr val="F9FAFB"/>
+                </a:solidFill>
+                <a:latin typeface="Menlo" pitchFamily="34" charset="0"/>
+                <a:ea typeface="Menlo" pitchFamily="34" charset="-122"/>
+                <a:cs typeface="Menlo" pitchFamily="34" charset="-120"/>
+              </a:rPr>
+              <a:t>centered on a 256x256 canvas...</a:t>
+            </a:r>
+            <a:endParaRPr lang="en-US" sz="610" dirty="0"/>
+          </a:p>
+          <a:p>
+            <a:pPr indent="0" marL="0">
+              <a:buNone/>
+            </a:pPr>
+            <a:r>
+              <a:rPr lang="en-US" sz="610" dirty="0">
+                <a:solidFill>
+                  <a:srgbClr val="F9FAFB"/>
+                </a:solidFill>
+                <a:latin typeface="Menlo" pitchFamily="34" charset="0"/>
+                <a:ea typeface="Menlo" pitchFamily="34" charset="-122"/>
+                <a:cs typeface="Menlo" pitchFamily="34" charset="-120"/>
+              </a:rPr>
+              <a:t>dynamic, layered flame...</a:t>
+            </a:r>
+            <a:endParaRPr lang="en-US" sz="610" dirty="0"/>
+          </a:p>
+        </p:txBody>
+      </p:sp>
+      <p:sp>
+        <p:nvSpPr>
+          <p:cNvPr id="11" name="Shape 8"/>
+          <p:cNvSpPr/>
+          <p:nvPr/>
+        </p:nvSpPr>
+        <p:spPr>
+          <a:xfrm>
+            <a:off x="3063240" y="1143000"/>
+            <a:ext cx="1298448" cy="475488"/>
           </a:xfrm>
           <a:prstGeom prst="roundRect">
             <a:avLst>
-              <a:gd name="adj" fmla="val 10909"/>
+              <a:gd name="adj" fmla="val 11538"/>
             </a:avLst>
           </a:prstGeom>
           <a:solidFill>
@@ -8871,14 +9942,14 @@
       </p:sp>
       <p:sp>
         <p:nvSpPr>
-          <p:cNvPr id="10" name="Text 7"/>
-          <p:cNvSpPr/>
-          <p:nvPr/>
-        </p:nvSpPr>
-        <p:spPr>
-          <a:xfrm>
-            <a:off x="2880360" y="1225296"/>
-            <a:ext cx="1325880" cy="356616"/>
+          <p:cNvPr id="12" name="Text 9"/>
+          <p:cNvSpPr/>
+          <p:nvPr/>
+        </p:nvSpPr>
+        <p:spPr>
+          <a:xfrm>
+            <a:off x="3108960" y="1225296"/>
+            <a:ext cx="1207008" cy="329184"/>
           </a:xfrm>
           <a:prstGeom prst="rect">
             <a:avLst/>
@@ -8929,18 +10000,18 @@
       </p:sp>
       <p:sp>
         <p:nvSpPr>
-          <p:cNvPr id="11" name="Shape 8"/>
-          <p:cNvSpPr/>
-          <p:nvPr/>
-        </p:nvSpPr>
-        <p:spPr>
-          <a:xfrm>
-            <a:off x="2834640" y="2148840"/>
-            <a:ext cx="1417320" cy="502920"/>
+          <p:cNvPr id="13" name="Shape 10"/>
+          <p:cNvSpPr/>
+          <p:nvPr/>
+        </p:nvSpPr>
+        <p:spPr>
+          <a:xfrm>
+            <a:off x="3063240" y="2057400"/>
+            <a:ext cx="1298448" cy="475488"/>
           </a:xfrm>
           <a:prstGeom prst="roundRect">
             <a:avLst>
-              <a:gd name="adj" fmla="val 10909"/>
+              <a:gd name="adj" fmla="val 11538"/>
             </a:avLst>
           </a:prstGeom>
           <a:solidFill>
@@ -8956,14 +10027,14 @@
       </p:sp>
       <p:sp>
         <p:nvSpPr>
-          <p:cNvPr id="12" name="Text 9"/>
-          <p:cNvSpPr/>
-          <p:nvPr/>
-        </p:nvSpPr>
-        <p:spPr>
-          <a:xfrm>
-            <a:off x="2880360" y="2231136"/>
-            <a:ext cx="1325880" cy="356616"/>
+          <p:cNvPr id="14" name="Text 11"/>
+          <p:cNvSpPr/>
+          <p:nvPr/>
+        </p:nvSpPr>
+        <p:spPr>
+          <a:xfrm>
+            <a:off x="3108960" y="2139696"/>
+            <a:ext cx="1207008" cy="329184"/>
           </a:xfrm>
           <a:prstGeom prst="rect">
             <a:avLst/>
@@ -9014,18 +10085,18 @@
       </p:sp>
       <p:sp>
         <p:nvSpPr>
-          <p:cNvPr id="13" name="Shape 10"/>
-          <p:cNvSpPr/>
-          <p:nvPr/>
-        </p:nvSpPr>
-        <p:spPr>
-          <a:xfrm>
-            <a:off x="2834640" y="3154680"/>
-            <a:ext cx="1417320" cy="502920"/>
+          <p:cNvPr id="15" name="Shape 12"/>
+          <p:cNvSpPr/>
+          <p:nvPr/>
+        </p:nvSpPr>
+        <p:spPr>
+          <a:xfrm>
+            <a:off x="3063240" y="2971800"/>
+            <a:ext cx="1298448" cy="475488"/>
           </a:xfrm>
           <a:prstGeom prst="roundRect">
             <a:avLst>
-              <a:gd name="adj" fmla="val 10909"/>
+              <a:gd name="adj" fmla="val 11538"/>
             </a:avLst>
           </a:prstGeom>
           <a:solidFill>
@@ -9041,14 +10112,14 @@
       </p:sp>
       <p:sp>
         <p:nvSpPr>
-          <p:cNvPr id="14" name="Text 11"/>
-          <p:cNvSpPr/>
-          <p:nvPr/>
-        </p:nvSpPr>
-        <p:spPr>
-          <a:xfrm>
-            <a:off x="2880360" y="3236976"/>
-            <a:ext cx="1325880" cy="356616"/>
+          <p:cNvPr id="16" name="Text 13"/>
+          <p:cNvSpPr/>
+          <p:nvPr/>
+        </p:nvSpPr>
+        <p:spPr>
+          <a:xfrm>
+            <a:off x="3108960" y="3054096"/>
+            <a:ext cx="1207008" cy="329184"/>
           </a:xfrm>
           <a:prstGeom prst="rect">
             <a:avLst/>
@@ -9099,18 +10170,103 @@
       </p:sp>
       <p:sp>
         <p:nvSpPr>
-          <p:cNvPr id="15" name="Shape 12"/>
-          <p:cNvSpPr/>
-          <p:nvPr/>
-        </p:nvSpPr>
-        <p:spPr>
-          <a:xfrm>
-            <a:off x="5212080" y="1508760"/>
-            <a:ext cx="1600200" cy="640080"/>
+          <p:cNvPr id="17" name="Shape 14"/>
+          <p:cNvSpPr/>
+          <p:nvPr/>
+        </p:nvSpPr>
+        <p:spPr>
+          <a:xfrm>
+            <a:off x="4892040" y="2057400"/>
+            <a:ext cx="685800" cy="475488"/>
           </a:xfrm>
           <a:prstGeom prst="roundRect">
             <a:avLst>
-              <a:gd name="adj" fmla="val 8571"/>
+              <a:gd name="adj" fmla="val 11538"/>
+            </a:avLst>
+          </a:prstGeom>
+          <a:solidFill>
+            <a:srgbClr val="F8FAFC"/>
+          </a:solidFill>
+          <a:ln w="12700">
+            <a:solidFill>
+              <a:srgbClr val="D0D5DD"/>
+            </a:solidFill>
+            <a:prstDash val="solid"/>
+          </a:ln>
+        </p:spPr>
+      </p:sp>
+      <p:sp>
+        <p:nvSpPr>
+          <p:cNvPr id="18" name="Text 15"/>
+          <p:cNvSpPr/>
+          <p:nvPr/>
+        </p:nvSpPr>
+        <p:spPr>
+          <a:xfrm>
+            <a:off x="4937760" y="2139696"/>
+            <a:ext cx="594360" cy="329184"/>
+          </a:xfrm>
+          <a:prstGeom prst="rect">
+            <a:avLst/>
+          </a:prstGeom>
+          <a:noFill/>
+          <a:ln/>
+        </p:spPr>
+        <p:txBody>
+          <a:bodyPr wrap="square" lIns="0" tIns="0" rIns="0" bIns="0" rtlCol="0" anchor="ctr">
+            <a:normAutofit/>
+          </a:bodyPr>
+          <a:lstStyle/>
+          <a:p>
+            <a:pPr algn="ctr" indent="0" marL="0">
+              <a:buNone/>
+            </a:pPr>
+            <a:r>
+              <a:rPr lang="en-US" sz="710" b="1" dirty="0">
+                <a:solidFill>
+                  <a:srgbClr val="667085"/>
+                </a:solidFill>
+                <a:latin typeface="PingFang SC" pitchFamily="34" charset="0"/>
+                <a:ea typeface="PingFang SC" pitchFamily="34" charset="-122"/>
+                <a:cs typeface="PingFang SC" pitchFamily="34" charset="-120"/>
+              </a:rPr>
+              <a:t>score</a:t>
+            </a:r>
+            <a:endParaRPr lang="en-US" sz="710" dirty="0"/>
+          </a:p>
+          <a:p>
+            <a:pPr algn="ctr" indent="0" marL="0">
+              <a:buNone/>
+            </a:pPr>
+            <a:r>
+              <a:rPr lang="en-US" sz="710" b="1" dirty="0">
+                <a:solidFill>
+                  <a:srgbClr val="667085"/>
+                </a:solidFill>
+                <a:latin typeface="PingFang SC" pitchFamily="34" charset="0"/>
+                <a:ea typeface="PingFang SC" pitchFamily="34" charset="-122"/>
+                <a:cs typeface="PingFang SC" pitchFamily="34" charset="-120"/>
+              </a:rPr>
+              <a:t>fan-out</a:t>
+            </a:r>
+            <a:endParaRPr lang="en-US" sz="710" dirty="0"/>
+          </a:p>
+        </p:txBody>
+      </p:sp>
+      <p:sp>
+        <p:nvSpPr>
+          <p:cNvPr id="19" name="Shape 16"/>
+          <p:cNvSpPr/>
+          <p:nvPr/>
+        </p:nvSpPr>
+        <p:spPr>
+          <a:xfrm>
+            <a:off x="6172200" y="1417320"/>
+            <a:ext cx="1600200" cy="585216"/>
+          </a:xfrm>
+          <a:prstGeom prst="roundRect">
+            <a:avLst>
+              <a:gd name="adj" fmla="val 9375"/>
             </a:avLst>
           </a:prstGeom>
           <a:solidFill>
@@ -9126,14 +10282,14 @@
       </p:sp>
       <p:sp>
         <p:nvSpPr>
-          <p:cNvPr id="16" name="Text 13"/>
-          <p:cNvSpPr/>
-          <p:nvPr/>
-        </p:nvSpPr>
-        <p:spPr>
-          <a:xfrm>
-            <a:off x="5257800" y="1591056"/>
-            <a:ext cx="1508760" cy="493776"/>
+          <p:cNvPr id="20" name="Text 17"/>
+          <p:cNvSpPr/>
+          <p:nvPr/>
+        </p:nvSpPr>
+        <p:spPr>
+          <a:xfrm>
+            <a:off x="6217920" y="1499616"/>
+            <a:ext cx="1508760" cy="438912"/>
           </a:xfrm>
           <a:prstGeom prst="rect">
             <a:avLst/>
@@ -9176,7 +10332,7 @@
                 <a:ea typeface="PingFang SC" pitchFamily="34" charset="-122"/>
                 <a:cs typeface="PingFang SC" pitchFamily="34" charset="-120"/>
               </a:rPr>
-              <a:t>85 / 92 / 70</a:t>
+              <a:t>85 / 95 / 90</a:t>
             </a:r>
             <a:endParaRPr lang="en-US" sz="710" dirty="0"/>
           </a:p>
@@ -9184,18 +10340,18 @@
       </p:sp>
       <p:sp>
         <p:nvSpPr>
-          <p:cNvPr id="17" name="Shape 14"/>
-          <p:cNvSpPr/>
-          <p:nvPr/>
-        </p:nvSpPr>
-        <p:spPr>
-          <a:xfrm>
-            <a:off x="5212080" y="2788920"/>
-            <a:ext cx="1600200" cy="640080"/>
+          <p:cNvPr id="21" name="Shape 18"/>
+          <p:cNvSpPr/>
+          <p:nvPr/>
+        </p:nvSpPr>
+        <p:spPr>
+          <a:xfrm>
+            <a:off x="6172200" y="2743200"/>
+            <a:ext cx="1600200" cy="585216"/>
           </a:xfrm>
           <a:prstGeom prst="roundRect">
             <a:avLst>
-              <a:gd name="adj" fmla="val 8571"/>
+              <a:gd name="adj" fmla="val 9375"/>
             </a:avLst>
           </a:prstGeom>
           <a:solidFill>
@@ -9211,14 +10367,14 @@
       </p:sp>
       <p:sp>
         <p:nvSpPr>
-          <p:cNvPr id="18" name="Text 15"/>
-          <p:cNvSpPr/>
-          <p:nvPr/>
-        </p:nvSpPr>
-        <p:spPr>
-          <a:xfrm>
-            <a:off x="5257800" y="2871216"/>
-            <a:ext cx="1508760" cy="493776"/>
+          <p:cNvPr id="22" name="Text 19"/>
+          <p:cNvSpPr/>
+          <p:nvPr/>
+        </p:nvSpPr>
+        <p:spPr>
+          <a:xfrm>
+            <a:off x="6217920" y="2825496"/>
+            <a:ext cx="1508760" cy="438912"/>
           </a:xfrm>
           <a:prstGeom prst="rect">
             <a:avLst/>
@@ -9261,7 +10417,7 @@
                 <a:ea typeface="PingFang SC" pitchFamily="34" charset="-122"/>
                 <a:cs typeface="PingFang SC" pitchFamily="34" charset="-120"/>
               </a:rPr>
-              <a:t>90 / 88 / 95</a:t>
+              <a:t>85 / 95 / 90</a:t>
             </a:r>
             <a:endParaRPr lang="en-US" sz="710" dirty="0"/>
           </a:p>
@@ -9269,18 +10425,18 @@
       </p:sp>
       <p:sp>
         <p:nvSpPr>
-          <p:cNvPr id="19" name="Shape 16"/>
-          <p:cNvSpPr/>
-          <p:nvPr/>
-        </p:nvSpPr>
-        <p:spPr>
-          <a:xfrm>
-            <a:off x="7635240" y="2148840"/>
-            <a:ext cx="1645920" cy="658368"/>
+          <p:cNvPr id="23" name="Shape 20"/>
+          <p:cNvSpPr/>
+          <p:nvPr/>
+        </p:nvSpPr>
+        <p:spPr>
+          <a:xfrm>
+            <a:off x="8412480" y="2057400"/>
+            <a:ext cx="1645920" cy="621792"/>
           </a:xfrm>
           <a:prstGeom prst="roundRect">
             <a:avLst>
-              <a:gd name="adj" fmla="val 8333"/>
+              <a:gd name="adj" fmla="val 8824"/>
             </a:avLst>
           </a:prstGeom>
           <a:solidFill>
@@ -9296,14 +10452,14 @@
       </p:sp>
       <p:sp>
         <p:nvSpPr>
-          <p:cNvPr id="20" name="Text 17"/>
-          <p:cNvSpPr/>
-          <p:nvPr/>
-        </p:nvSpPr>
-        <p:spPr>
-          <a:xfrm>
-            <a:off x="7680960" y="2231136"/>
-            <a:ext cx="1554480" cy="512064"/>
+          <p:cNvPr id="24" name="Text 21"/>
+          <p:cNvSpPr/>
+          <p:nvPr/>
+        </p:nvSpPr>
+        <p:spPr>
+          <a:xfrm>
+            <a:off x="8458200" y="2139696"/>
+            <a:ext cx="1554480" cy="475488"/>
           </a:xfrm>
           <a:prstGeom prst="rect">
             <a:avLst/>
@@ -9354,18 +10510,18 @@
       </p:sp>
       <p:sp>
         <p:nvSpPr>
-          <p:cNvPr id="21" name="Shape 18"/>
-          <p:cNvSpPr/>
-          <p:nvPr/>
-        </p:nvSpPr>
-        <p:spPr>
-          <a:xfrm>
-            <a:off x="9966960" y="2148840"/>
-            <a:ext cx="1417320" cy="658368"/>
+          <p:cNvPr id="25" name="Shape 22"/>
+          <p:cNvSpPr/>
+          <p:nvPr/>
+        </p:nvSpPr>
+        <p:spPr>
+          <a:xfrm>
+            <a:off x="10561320" y="2057400"/>
+            <a:ext cx="1188720" cy="621792"/>
           </a:xfrm>
           <a:prstGeom prst="roundRect">
             <a:avLst>
-              <a:gd name="adj" fmla="val 8333"/>
+              <a:gd name="adj" fmla="val 8824"/>
             </a:avLst>
           </a:prstGeom>
           <a:solidFill>
@@ -9381,14 +10537,14 @@
       </p:sp>
       <p:sp>
         <p:nvSpPr>
-          <p:cNvPr id="22" name="Text 19"/>
-          <p:cNvSpPr/>
-          <p:nvPr/>
-        </p:nvSpPr>
-        <p:spPr>
-          <a:xfrm>
-            <a:off x="10012680" y="2231136"/>
-            <a:ext cx="1325880" cy="512064"/>
+          <p:cNvPr id="26" name="Text 23"/>
+          <p:cNvSpPr/>
+          <p:nvPr/>
+        </p:nvSpPr>
+        <p:spPr>
+          <a:xfrm>
+            <a:off x="10607040" y="2139696"/>
+            <a:ext cx="1097280" cy="475488"/>
           </a:xfrm>
           <a:prstGeom prst="rect">
             <a:avLst/>
@@ -9414,7 +10570,7 @@
                 <a:ea typeface="PingFang SC" pitchFamily="34" charset="-122"/>
                 <a:cs typeface="PingFang SC" pitchFamily="34" charset="-120"/>
               </a:rPr>
-              <a:t>SVG Optimizer</a:t>
+              <a:t>SVG</a:t>
             </a:r>
             <a:endParaRPr lang="en-US" sz="710" dirty="0"/>
           </a:p>
@@ -9431,7 +10587,7 @@
                 <a:ea typeface="PingFang SC" pitchFamily="34" charset="-122"/>
                 <a:cs typeface="PingFang SC" pitchFamily="34" charset="-120"/>
               </a:rPr>
-              <a:t>修正细节</a:t>
+              <a:t>Optimizer</a:t>
             </a:r>
             <a:endParaRPr lang="en-US" sz="710" dirty="0"/>
           </a:p>
@@ -9439,22 +10595,72 @@
       </p:sp>
       <p:sp>
         <p:nvSpPr>
-          <p:cNvPr id="23" name="Shape 20"/>
-          <p:cNvSpPr/>
-          <p:nvPr/>
-        </p:nvSpPr>
-        <p:spPr>
-          <a:xfrm>
-            <a:off x="4251960" y="1394460"/>
-            <a:ext cx="960120" cy="434340"/>
+          <p:cNvPr id="27" name="Shape 24"/>
+          <p:cNvSpPr/>
+          <p:nvPr/>
+        </p:nvSpPr>
+        <p:spPr>
+          <a:xfrm>
+            <a:off x="4361688" y="1380744"/>
+            <a:ext cx="256032" cy="0"/>
           </a:xfrm>
           <a:prstGeom prst="line">
             <a:avLst/>
           </a:prstGeom>
           <a:noFill/>
-          <a:ln w="16510">
-            <a:solidFill>
-              <a:srgbClr val="F97316"/>
+          <a:ln w="14605">
+            <a:solidFill>
+              <a:srgbClr val="D0D5DD"/>
+            </a:solidFill>
+            <a:prstDash val="solid"/>
+            <a:headEnd type="none"/>
+            <a:tailEnd type="none"/>
+          </a:ln>
+        </p:spPr>
+      </p:sp>
+      <p:sp>
+        <p:nvSpPr>
+          <p:cNvPr id="28" name="Shape 25"/>
+          <p:cNvSpPr/>
+          <p:nvPr/>
+        </p:nvSpPr>
+        <p:spPr>
+          <a:xfrm>
+            <a:off x="4617720" y="1380744"/>
+            <a:ext cx="0" cy="914400"/>
+          </a:xfrm>
+          <a:prstGeom prst="line">
+            <a:avLst/>
+          </a:prstGeom>
+          <a:noFill/>
+          <a:ln w="14605">
+            <a:solidFill>
+              <a:srgbClr val="D0D5DD"/>
+            </a:solidFill>
+            <a:prstDash val="solid"/>
+            <a:headEnd type="none"/>
+            <a:tailEnd type="none"/>
+          </a:ln>
+        </p:spPr>
+      </p:sp>
+      <p:sp>
+        <p:nvSpPr>
+          <p:cNvPr id="29" name="Shape 26"/>
+          <p:cNvSpPr/>
+          <p:nvPr/>
+        </p:nvSpPr>
+        <p:spPr>
+          <a:xfrm>
+            <a:off x="4617720" y="2295144"/>
+            <a:ext cx="274320" cy="0"/>
+          </a:xfrm>
+          <a:prstGeom prst="line">
+            <a:avLst/>
+          </a:prstGeom>
+          <a:noFill/>
+          <a:ln w="15875">
+            <a:solidFill>
+              <a:srgbClr val="D0D5DD"/>
             </a:solidFill>
             <a:prstDash val="solid"/>
             <a:headEnd type="none"/>
@@ -9464,22 +10670,72 @@
       </p:sp>
       <p:sp>
         <p:nvSpPr>
-          <p:cNvPr id="24" name="Shape 21"/>
-          <p:cNvSpPr/>
-          <p:nvPr/>
-        </p:nvSpPr>
-        <p:spPr>
-          <a:xfrm>
-            <a:off x="4251960" y="1394460"/>
-            <a:ext cx="960120" cy="1714500"/>
+          <p:cNvPr id="30" name="Shape 27"/>
+          <p:cNvSpPr/>
+          <p:nvPr/>
+        </p:nvSpPr>
+        <p:spPr>
+          <a:xfrm>
+            <a:off x="4361688" y="2295144"/>
+            <a:ext cx="256032" cy="0"/>
           </a:xfrm>
           <a:prstGeom prst="line">
             <a:avLst/>
           </a:prstGeom>
           <a:noFill/>
-          <a:ln w="16510">
-            <a:solidFill>
-              <a:srgbClr val="F97316"/>
+          <a:ln w="14605">
+            <a:solidFill>
+              <a:srgbClr val="D0D5DD"/>
+            </a:solidFill>
+            <a:prstDash val="solid"/>
+            <a:headEnd type="none"/>
+            <a:tailEnd type="none"/>
+          </a:ln>
+        </p:spPr>
+      </p:sp>
+      <p:sp>
+        <p:nvSpPr>
+          <p:cNvPr id="31" name="Shape 28"/>
+          <p:cNvSpPr/>
+          <p:nvPr/>
+        </p:nvSpPr>
+        <p:spPr>
+          <a:xfrm>
+            <a:off x="4617720" y="2295144"/>
+            <a:ext cx="0" cy="0"/>
+          </a:xfrm>
+          <a:prstGeom prst="line">
+            <a:avLst/>
+          </a:prstGeom>
+          <a:noFill/>
+          <a:ln w="14605">
+            <a:solidFill>
+              <a:srgbClr val="D0D5DD"/>
+            </a:solidFill>
+            <a:prstDash val="solid"/>
+            <a:headEnd type="none"/>
+            <a:tailEnd type="none"/>
+          </a:ln>
+        </p:spPr>
+      </p:sp>
+      <p:sp>
+        <p:nvSpPr>
+          <p:cNvPr id="32" name="Shape 29"/>
+          <p:cNvSpPr/>
+          <p:nvPr/>
+        </p:nvSpPr>
+        <p:spPr>
+          <a:xfrm>
+            <a:off x="4617720" y="2295144"/>
+            <a:ext cx="274320" cy="0"/>
+          </a:xfrm>
+          <a:prstGeom prst="line">
+            <a:avLst/>
+          </a:prstGeom>
+          <a:noFill/>
+          <a:ln w="15875">
+            <a:solidFill>
+              <a:srgbClr val="D0D5DD"/>
             </a:solidFill>
             <a:prstDash val="solid"/>
             <a:headEnd type="none"/>
@@ -9489,22 +10745,72 @@
       </p:sp>
       <p:sp>
         <p:nvSpPr>
-          <p:cNvPr id="25" name="Shape 22"/>
-          <p:cNvSpPr/>
-          <p:nvPr/>
-        </p:nvSpPr>
-        <p:spPr>
-          <a:xfrm>
-            <a:off x="4251960" y="2400300"/>
-            <a:ext cx="960120" cy="-571500"/>
+          <p:cNvPr id="33" name="Shape 30"/>
+          <p:cNvSpPr/>
+          <p:nvPr/>
+        </p:nvSpPr>
+        <p:spPr>
+          <a:xfrm>
+            <a:off x="4361688" y="3209544"/>
+            <a:ext cx="256032" cy="0"/>
           </a:xfrm>
           <a:prstGeom prst="line">
             <a:avLst/>
           </a:prstGeom>
           <a:noFill/>
-          <a:ln w="16510">
-            <a:solidFill>
-              <a:srgbClr val="F97316"/>
+          <a:ln w="14605">
+            <a:solidFill>
+              <a:srgbClr val="D0D5DD"/>
+            </a:solidFill>
+            <a:prstDash val="solid"/>
+            <a:headEnd type="none"/>
+            <a:tailEnd type="none"/>
+          </a:ln>
+        </p:spPr>
+      </p:sp>
+      <p:sp>
+        <p:nvSpPr>
+          <p:cNvPr id="34" name="Shape 31"/>
+          <p:cNvSpPr/>
+          <p:nvPr/>
+        </p:nvSpPr>
+        <p:spPr>
+          <a:xfrm>
+            <a:off x="4617720" y="3209544"/>
+            <a:ext cx="0" cy="-914400"/>
+          </a:xfrm>
+          <a:prstGeom prst="line">
+            <a:avLst/>
+          </a:prstGeom>
+          <a:noFill/>
+          <a:ln w="14605">
+            <a:solidFill>
+              <a:srgbClr val="D0D5DD"/>
+            </a:solidFill>
+            <a:prstDash val="solid"/>
+            <a:headEnd type="none"/>
+            <a:tailEnd type="none"/>
+          </a:ln>
+        </p:spPr>
+      </p:sp>
+      <p:sp>
+        <p:nvSpPr>
+          <p:cNvPr id="35" name="Shape 32"/>
+          <p:cNvSpPr/>
+          <p:nvPr/>
+        </p:nvSpPr>
+        <p:spPr>
+          <a:xfrm>
+            <a:off x="4617720" y="2295144"/>
+            <a:ext cx="274320" cy="0"/>
+          </a:xfrm>
+          <a:prstGeom prst="line">
+            <a:avLst/>
+          </a:prstGeom>
+          <a:noFill/>
+          <a:ln w="15875">
+            <a:solidFill>
+              <a:srgbClr val="D0D5DD"/>
             </a:solidFill>
             <a:prstDash val="solid"/>
             <a:headEnd type="none"/>
@@ -9514,20 +10820,70 @@
       </p:sp>
       <p:sp>
         <p:nvSpPr>
-          <p:cNvPr id="26" name="Shape 23"/>
-          <p:cNvSpPr/>
-          <p:nvPr/>
-        </p:nvSpPr>
-        <p:spPr>
-          <a:xfrm>
-            <a:off x="4251960" y="2400300"/>
-            <a:ext cx="960120" cy="708660"/>
+          <p:cNvPr id="36" name="Shape 33"/>
+          <p:cNvSpPr/>
+          <p:nvPr/>
+        </p:nvSpPr>
+        <p:spPr>
+          <a:xfrm>
+            <a:off x="5577840" y="2295144"/>
+            <a:ext cx="256032" cy="0"/>
           </a:xfrm>
           <a:prstGeom prst="line">
             <a:avLst/>
           </a:prstGeom>
           <a:noFill/>
-          <a:ln w="16510">
+          <a:ln w="14605">
+            <a:solidFill>
+              <a:srgbClr val="F97316"/>
+            </a:solidFill>
+            <a:prstDash val="solid"/>
+            <a:headEnd type="none"/>
+            <a:tailEnd type="none"/>
+          </a:ln>
+        </p:spPr>
+      </p:sp>
+      <p:sp>
+        <p:nvSpPr>
+          <p:cNvPr id="37" name="Shape 34"/>
+          <p:cNvSpPr/>
+          <p:nvPr/>
+        </p:nvSpPr>
+        <p:spPr>
+          <a:xfrm>
+            <a:off x="5833872" y="2295144"/>
+            <a:ext cx="0" cy="-585216"/>
+          </a:xfrm>
+          <a:prstGeom prst="line">
+            <a:avLst/>
+          </a:prstGeom>
+          <a:noFill/>
+          <a:ln w="14605">
+            <a:solidFill>
+              <a:srgbClr val="F97316"/>
+            </a:solidFill>
+            <a:prstDash val="solid"/>
+            <a:headEnd type="none"/>
+            <a:tailEnd type="none"/>
+          </a:ln>
+        </p:spPr>
+      </p:sp>
+      <p:sp>
+        <p:nvSpPr>
+          <p:cNvPr id="38" name="Shape 35"/>
+          <p:cNvSpPr/>
+          <p:nvPr/>
+        </p:nvSpPr>
+        <p:spPr>
+          <a:xfrm>
+            <a:off x="5833872" y="1709928"/>
+            <a:ext cx="338328" cy="0"/>
+          </a:xfrm>
+          <a:prstGeom prst="line">
+            <a:avLst/>
+          </a:prstGeom>
+          <a:noFill/>
+          <a:ln w="15875">
             <a:solidFill>
               <a:srgbClr val="F97316"/>
             </a:solidFill>
@@ -9539,20 +10895,70 @@
       </p:sp>
       <p:sp>
         <p:nvSpPr>
-          <p:cNvPr id="27" name="Shape 24"/>
-          <p:cNvSpPr/>
-          <p:nvPr/>
-        </p:nvSpPr>
-        <p:spPr>
-          <a:xfrm>
-            <a:off x="4251960" y="3406140"/>
-            <a:ext cx="960120" cy="-1577340"/>
+          <p:cNvPr id="39" name="Shape 36"/>
+          <p:cNvSpPr/>
+          <p:nvPr/>
+        </p:nvSpPr>
+        <p:spPr>
+          <a:xfrm>
+            <a:off x="5577840" y="2295144"/>
+            <a:ext cx="256032" cy="0"/>
           </a:xfrm>
           <a:prstGeom prst="line">
             <a:avLst/>
           </a:prstGeom>
           <a:noFill/>
-          <a:ln w="16510">
+          <a:ln w="14605">
+            <a:solidFill>
+              <a:srgbClr val="F97316"/>
+            </a:solidFill>
+            <a:prstDash val="solid"/>
+            <a:headEnd type="none"/>
+            <a:tailEnd type="none"/>
+          </a:ln>
+        </p:spPr>
+      </p:sp>
+      <p:sp>
+        <p:nvSpPr>
+          <p:cNvPr id="40" name="Shape 37"/>
+          <p:cNvSpPr/>
+          <p:nvPr/>
+        </p:nvSpPr>
+        <p:spPr>
+          <a:xfrm>
+            <a:off x="5833872" y="2295144"/>
+            <a:ext cx="0" cy="740664"/>
+          </a:xfrm>
+          <a:prstGeom prst="line">
+            <a:avLst/>
+          </a:prstGeom>
+          <a:noFill/>
+          <a:ln w="14605">
+            <a:solidFill>
+              <a:srgbClr val="F97316"/>
+            </a:solidFill>
+            <a:prstDash val="solid"/>
+            <a:headEnd type="none"/>
+            <a:tailEnd type="none"/>
+          </a:ln>
+        </p:spPr>
+      </p:sp>
+      <p:sp>
+        <p:nvSpPr>
+          <p:cNvPr id="41" name="Shape 38"/>
+          <p:cNvSpPr/>
+          <p:nvPr/>
+        </p:nvSpPr>
+        <p:spPr>
+          <a:xfrm>
+            <a:off x="5833872" y="3035808"/>
+            <a:ext cx="338328" cy="0"/>
+          </a:xfrm>
+          <a:prstGeom prst="line">
+            <a:avLst/>
+          </a:prstGeom>
+          <a:noFill/>
+          <a:ln w="15875">
             <a:solidFill>
               <a:srgbClr val="F97316"/>
             </a:solidFill>
@@ -9564,20 +10970,70 @@
       </p:sp>
       <p:sp>
         <p:nvSpPr>
-          <p:cNvPr id="28" name="Shape 25"/>
-          <p:cNvSpPr/>
-          <p:nvPr/>
-        </p:nvSpPr>
-        <p:spPr>
-          <a:xfrm>
-            <a:off x="4251960" y="3406140"/>
-            <a:ext cx="960120" cy="-297180"/>
+          <p:cNvPr id="42" name="Shape 39"/>
+          <p:cNvSpPr/>
+          <p:nvPr/>
+        </p:nvSpPr>
+        <p:spPr>
+          <a:xfrm>
+            <a:off x="7772400" y="1709928"/>
+            <a:ext cx="292608" cy="0"/>
           </a:xfrm>
           <a:prstGeom prst="line">
             <a:avLst/>
           </a:prstGeom>
           <a:noFill/>
-          <a:ln w="16510">
+          <a:ln w="14605">
+            <a:solidFill>
+              <a:srgbClr val="F97316"/>
+            </a:solidFill>
+            <a:prstDash val="solid"/>
+            <a:headEnd type="none"/>
+            <a:tailEnd type="none"/>
+          </a:ln>
+        </p:spPr>
+      </p:sp>
+      <p:sp>
+        <p:nvSpPr>
+          <p:cNvPr id="43" name="Shape 40"/>
+          <p:cNvSpPr/>
+          <p:nvPr/>
+        </p:nvSpPr>
+        <p:spPr>
+          <a:xfrm>
+            <a:off x="8065008" y="1709928"/>
+            <a:ext cx="0" cy="658368"/>
+          </a:xfrm>
+          <a:prstGeom prst="line">
+            <a:avLst/>
+          </a:prstGeom>
+          <a:noFill/>
+          <a:ln w="14605">
+            <a:solidFill>
+              <a:srgbClr val="F97316"/>
+            </a:solidFill>
+            <a:prstDash val="solid"/>
+            <a:headEnd type="none"/>
+            <a:tailEnd type="none"/>
+          </a:ln>
+        </p:spPr>
+      </p:sp>
+      <p:sp>
+        <p:nvSpPr>
+          <p:cNvPr id="44" name="Shape 41"/>
+          <p:cNvSpPr/>
+          <p:nvPr/>
+        </p:nvSpPr>
+        <p:spPr>
+          <a:xfrm>
+            <a:off x="8065008" y="2368296"/>
+            <a:ext cx="347472" cy="0"/>
+          </a:xfrm>
+          <a:prstGeom prst="line">
+            <a:avLst/>
+          </a:prstGeom>
+          <a:noFill/>
+          <a:ln w="15875">
             <a:solidFill>
               <a:srgbClr val="F97316"/>
             </a:solidFill>
@@ -9589,20 +11045,70 @@
       </p:sp>
       <p:sp>
         <p:nvSpPr>
-          <p:cNvPr id="29" name="Shape 26"/>
-          <p:cNvSpPr/>
-          <p:nvPr/>
-        </p:nvSpPr>
-        <p:spPr>
-          <a:xfrm>
-            <a:off x="6812280" y="1828800"/>
-            <a:ext cx="822960" cy="649224"/>
+          <p:cNvPr id="45" name="Shape 42"/>
+          <p:cNvSpPr/>
+          <p:nvPr/>
+        </p:nvSpPr>
+        <p:spPr>
+          <a:xfrm>
+            <a:off x="7772400" y="3035808"/>
+            <a:ext cx="292608" cy="0"/>
           </a:xfrm>
           <a:prstGeom prst="line">
             <a:avLst/>
           </a:prstGeom>
           <a:noFill/>
-          <a:ln w="16510">
+          <a:ln w="14605">
+            <a:solidFill>
+              <a:srgbClr val="F97316"/>
+            </a:solidFill>
+            <a:prstDash val="solid"/>
+            <a:headEnd type="none"/>
+            <a:tailEnd type="none"/>
+          </a:ln>
+        </p:spPr>
+      </p:sp>
+      <p:sp>
+        <p:nvSpPr>
+          <p:cNvPr id="46" name="Shape 43"/>
+          <p:cNvSpPr/>
+          <p:nvPr/>
+        </p:nvSpPr>
+        <p:spPr>
+          <a:xfrm>
+            <a:off x="8065008" y="3035808"/>
+            <a:ext cx="0" cy="-667512"/>
+          </a:xfrm>
+          <a:prstGeom prst="line">
+            <a:avLst/>
+          </a:prstGeom>
+          <a:noFill/>
+          <a:ln w="14605">
+            <a:solidFill>
+              <a:srgbClr val="F97316"/>
+            </a:solidFill>
+            <a:prstDash val="solid"/>
+            <a:headEnd type="none"/>
+            <a:tailEnd type="none"/>
+          </a:ln>
+        </p:spPr>
+      </p:sp>
+      <p:sp>
+        <p:nvSpPr>
+          <p:cNvPr id="47" name="Shape 44"/>
+          <p:cNvSpPr/>
+          <p:nvPr/>
+        </p:nvSpPr>
+        <p:spPr>
+          <a:xfrm>
+            <a:off x="8065008" y="2368296"/>
+            <a:ext cx="347472" cy="0"/>
+          </a:xfrm>
+          <a:prstGeom prst="line">
+            <a:avLst/>
+          </a:prstGeom>
+          <a:noFill/>
+          <a:ln w="15875">
             <a:solidFill>
               <a:srgbClr val="F97316"/>
             </a:solidFill>
@@ -9614,14 +11120,14 @@
       </p:sp>
       <p:sp>
         <p:nvSpPr>
-          <p:cNvPr id="30" name="Shape 27"/>
-          <p:cNvSpPr/>
-          <p:nvPr/>
-        </p:nvSpPr>
-        <p:spPr>
-          <a:xfrm>
-            <a:off x="6812280" y="3108960"/>
-            <a:ext cx="822960" cy="-630936"/>
+          <p:cNvPr id="48" name="Shape 45"/>
+          <p:cNvSpPr/>
+          <p:nvPr/>
+        </p:nvSpPr>
+        <p:spPr>
+          <a:xfrm>
+            <a:off x="10058400" y="2368296"/>
+            <a:ext cx="502920" cy="0"/>
           </a:xfrm>
           <a:prstGeom prst="line">
             <a:avLst/>
@@ -9629,7 +11135,7 @@
           <a:noFill/>
           <a:ln w="16510">
             <a:solidFill>
-              <a:srgbClr val="F97316"/>
+              <a:srgbClr val="16A34A"/>
             </a:solidFill>
             <a:prstDash val="solid"/>
             <a:headEnd type="none"/>
@@ -9639,55 +11145,243 @@
       </p:sp>
       <p:sp>
         <p:nvSpPr>
-          <p:cNvPr id="31" name="Shape 28"/>
-          <p:cNvSpPr/>
-          <p:nvPr/>
-        </p:nvSpPr>
-        <p:spPr>
-          <a:xfrm>
-            <a:off x="9281160" y="2478024"/>
-            <a:ext cx="685800" cy="0"/>
-          </a:xfrm>
-          <a:prstGeom prst="line">
-            <a:avLst/>
-          </a:prstGeom>
-          <a:noFill/>
-          <a:ln w="16510">
+          <p:cNvPr id="49" name="Shape 46"/>
+          <p:cNvSpPr/>
+          <p:nvPr/>
+        </p:nvSpPr>
+        <p:spPr>
+          <a:xfrm>
+            <a:off x="2944368" y="4206240"/>
+            <a:ext cx="4297680" cy="868680"/>
+          </a:xfrm>
+          <a:prstGeom prst="roundRect">
+            <a:avLst>
+              <a:gd name="adj" fmla="val 5263"/>
+            </a:avLst>
+          </a:prstGeom>
+          <a:solidFill>
+            <a:srgbClr val="111827"/>
+          </a:solidFill>
+          <a:ln w="12700">
             <a:solidFill>
               <a:srgbClr val="16A34A"/>
             </a:solidFill>
             <a:prstDash val="solid"/>
-            <a:headEnd type="none"/>
-            <a:tailEnd type="triangle"/>
-          </a:ln>
-        </p:spPr>
-      </p:sp>
-      <p:sp>
-        <p:nvSpPr>
-          <p:cNvPr id="32" name="Text 29"/>
-          <p:cNvSpPr/>
-          <p:nvPr/>
-        </p:nvSpPr>
-        <p:spPr>
-          <a:xfrm>
-            <a:off x="2651760" y="4892040"/>
-            <a:ext cx="7498080" cy="292608"/>
-          </a:xfrm>
-          <a:prstGeom prst="rect">
-            <a:avLst/>
-          </a:prstGeom>
-          <a:noFill/>
-          <a:ln/>
-        </p:spPr>
-        <p:txBody>
-          <a:bodyPr wrap="square" lIns="0" tIns="0" rIns="0" bIns="0" rtlCol="0" anchor="ctr"/>
-          <a:lstStyle/>
-          <a:p>
-            <a:pPr algn="ctr" indent="0" marL="0">
-              <a:buNone/>
-            </a:pPr>
-            <a:r>
-              <a:rPr lang="en-US" sz="1000" dirty="0">
+          </a:ln>
+        </p:spPr>
+      </p:sp>
+      <p:sp>
+        <p:nvSpPr>
+          <p:cNvPr id="50" name="Text 47"/>
+          <p:cNvSpPr/>
+          <p:nvPr/>
+        </p:nvSpPr>
+        <p:spPr>
+          <a:xfrm>
+            <a:off x="3054096" y="4306824"/>
+            <a:ext cx="4078224" cy="146304"/>
+          </a:xfrm>
+          <a:prstGeom prst="rect">
+            <a:avLst/>
+          </a:prstGeom>
+          <a:noFill/>
+          <a:ln/>
+        </p:spPr>
+        <p:txBody>
+          <a:bodyPr wrap="square" lIns="0" tIns="0" rIns="0" bIns="0" rtlCol="0" anchor="ctr">
+            <a:normAutofit/>
+          </a:bodyPr>
+          <a:lstStyle/>
+          <a:p>
+            <a:pPr indent="0" marL="0">
+              <a:buNone/>
+            </a:pPr>
+            <a:r>
+              <a:rPr lang="en-US" sz="680" b="1" dirty="0">
+                <a:solidFill>
+                  <a:srgbClr val="93C5FD"/>
+                </a:solidFill>
+                <a:latin typeface="PingFang SC" pitchFamily="34" charset="0"/>
+                <a:ea typeface="PingFang SC" pitchFamily="34" charset="-122"/>
+                <a:cs typeface="PingFang SC" pitchFamily="34" charset="-120"/>
+              </a:rPr>
+              <a:t>Selector 原始摘录</a:t>
+            </a:r>
+            <a:endParaRPr lang="en-US" sz="680" dirty="0"/>
+          </a:p>
+        </p:txBody>
+      </p:sp>
+      <p:sp>
+        <p:nvSpPr>
+          <p:cNvPr id="51" name="Text 48"/>
+          <p:cNvSpPr/>
+          <p:nvPr/>
+        </p:nvSpPr>
+        <p:spPr>
+          <a:xfrm>
+            <a:off x="3054096" y="4526280"/>
+            <a:ext cx="4078224" cy="484632"/>
+          </a:xfrm>
+          <a:prstGeom prst="rect">
+            <a:avLst/>
+          </a:prstGeom>
+          <a:noFill/>
+          <a:ln/>
+        </p:spPr>
+        <p:txBody>
+          <a:bodyPr wrap="square" lIns="127" tIns="127" rIns="127" bIns="127" rtlCol="0" anchor="t">
+            <a:normAutofit/>
+          </a:bodyPr>
+          <a:lstStyle/>
+          <a:p>
+            <a:pPr indent="0" marL="0">
+              <a:buNone/>
+            </a:pPr>
+            <a:r>
+              <a:rPr lang="en-US" sz="610" dirty="0">
+                <a:solidFill>
+                  <a:srgbClr val="F9FAFB"/>
+                </a:solidFill>
+                <a:latin typeface="Menlo" pitchFamily="34" charset="0"/>
+                <a:ea typeface="Menlo" pitchFamily="34" charset="-122"/>
+                <a:cs typeface="Menlo" pitchFamily="34" charset="-120"/>
+              </a:rPr>
+              <a:t>Candidate-2 has the highest semantic</a:t>
+            </a:r>
+            <a:endParaRPr lang="en-US" sz="610" dirty="0"/>
+          </a:p>
+          <a:p>
+            <a:pPr indent="0" marL="0">
+              <a:buNone/>
+            </a:pPr>
+            <a:r>
+              <a:rPr lang="en-US" sz="610" dirty="0">
+                <a:solidFill>
+                  <a:srgbClr val="F9FAFB"/>
+                </a:solidFill>
+                <a:latin typeface="Menlo" pitchFamily="34" charset="0"/>
+                <a:ea typeface="Menlo" pitchFamily="34" charset="-122"/>
+                <a:cs typeface="Menlo" pitchFamily="34" charset="-120"/>
+              </a:rPr>
+              <a:t>and SVG quality scores (95 each),</a:t>
+            </a:r>
+            <a:endParaRPr lang="en-US" sz="610" dirty="0"/>
+          </a:p>
+          <a:p>
+            <a:pPr indent="0" marL="0">
+              <a:buNone/>
+            </a:pPr>
+            <a:r>
+              <a:rPr lang="en-US" sz="610" dirty="0">
+                <a:solidFill>
+                  <a:srgbClr val="F9FAFB"/>
+                </a:solidFill>
+                <a:latin typeface="Menlo" pitchFamily="34" charset="0"/>
+                <a:ea typeface="Menlo" pitchFamily="34" charset="-122"/>
+                <a:cs typeface="Menlo" pitchFamily="34" charset="-120"/>
+              </a:rPr>
+              <a:t>with a strong rocket shape...</a:t>
+            </a:r>
+            <a:endParaRPr lang="en-US" sz="610" dirty="0"/>
+          </a:p>
+        </p:txBody>
+      </p:sp>
+      <p:sp>
+        <p:nvSpPr>
+          <p:cNvPr id="52" name="Shape 49"/>
+          <p:cNvSpPr/>
+          <p:nvPr/>
+        </p:nvSpPr>
+        <p:spPr>
+          <a:xfrm>
+            <a:off x="7543800" y="4206240"/>
+            <a:ext cx="3749040" cy="868680"/>
+          </a:xfrm>
+          <a:prstGeom prst="roundRect">
+            <a:avLst>
+              <a:gd name="adj" fmla="val 6316"/>
+            </a:avLst>
+          </a:prstGeom>
+          <a:solidFill>
+            <a:srgbClr val="F8FAFC"/>
+          </a:solidFill>
+          <a:ln w="12700">
+            <a:solidFill>
+              <a:srgbClr val="7C3AED"/>
+            </a:solidFill>
+            <a:prstDash val="solid"/>
+          </a:ln>
+        </p:spPr>
+      </p:sp>
+      <p:sp>
+        <p:nvSpPr>
+          <p:cNvPr id="53" name="Text 50"/>
+          <p:cNvSpPr/>
+          <p:nvPr/>
+        </p:nvSpPr>
+        <p:spPr>
+          <a:xfrm>
+            <a:off x="7671816" y="4315968"/>
+            <a:ext cx="3493008" cy="164592"/>
+          </a:xfrm>
+          <a:prstGeom prst="rect">
+            <a:avLst/>
+          </a:prstGeom>
+          <a:noFill/>
+          <a:ln/>
+        </p:spPr>
+        <p:txBody>
+          <a:bodyPr wrap="square" lIns="0" tIns="0" rIns="0" bIns="0" rtlCol="0" anchor="ctr">
+            <a:normAutofit/>
+          </a:bodyPr>
+          <a:lstStyle/>
+          <a:p>
+            <a:pPr indent="0" marL="0">
+              <a:buNone/>
+            </a:pPr>
+            <a:r>
+              <a:rPr lang="en-US" sz="770" b="1" dirty="0">
+                <a:solidFill>
+                  <a:srgbClr val="7C3AED"/>
+                </a:solidFill>
+                <a:latin typeface="PingFang SC" pitchFamily="34" charset="0"/>
+                <a:ea typeface="PingFang SC" pitchFamily="34" charset="-122"/>
+                <a:cs typeface="PingFang SC" pitchFamily="34" charset="-120"/>
+              </a:rPr>
+              <a:t>为什么这是协同？</a:t>
+            </a:r>
+            <a:endParaRPr lang="en-US" sz="770" dirty="0"/>
+          </a:p>
+        </p:txBody>
+      </p:sp>
+      <p:sp>
+        <p:nvSpPr>
+          <p:cNvPr id="54" name="Text 51"/>
+          <p:cNvSpPr/>
+          <p:nvPr/>
+        </p:nvSpPr>
+        <p:spPr>
+          <a:xfrm>
+            <a:off x="7671816" y="4535424"/>
+            <a:ext cx="3493008" cy="484632"/>
+          </a:xfrm>
+          <a:prstGeom prst="rect">
+            <a:avLst/>
+          </a:prstGeom>
+          <a:noFill/>
+          <a:ln/>
+        </p:spPr>
+        <p:txBody>
+          <a:bodyPr wrap="square" lIns="127" tIns="127" rIns="127" bIns="127" rtlCol="0" anchor="t">
+            <a:normAutofit/>
+          </a:bodyPr>
+          <a:lstStyle/>
+          <a:p>
+            <a:pPr indent="0" marL="0">
+              <a:buNone/>
+            </a:pPr>
+            <a:r>
+              <a:rPr lang="en-US" sz="710" dirty="0">
                 <a:solidFill>
                   <a:srgbClr val="172033"/>
                 </a:solidFill>
@@ -9695,54 +11389,15 @@
                 <a:ea typeface="PingFang SC" pitchFamily="34" charset="-122"/>
                 <a:cs typeface="PingFang SC" pitchFamily="34" charset="-120"/>
               </a:rPr>
-              <a:t>Selector rationale：Candidate 2 在语义清晰度、动态火焰和小尺寸可读性之间最平衡。</a:t>
-            </a:r>
-            <a:endParaRPr lang="en-US" sz="1000" dirty="0"/>
-          </a:p>
-        </p:txBody>
-      </p:sp>
-      <p:sp>
-        <p:nvSpPr>
-          <p:cNvPr id="33" name="Text 30"/>
-          <p:cNvSpPr/>
-          <p:nvPr/>
-        </p:nvSpPr>
-        <p:spPr>
-          <a:xfrm>
-            <a:off x="2011680" y="5413248"/>
-            <a:ext cx="8961120" cy="237744"/>
-          </a:xfrm>
-          <a:prstGeom prst="rect">
-            <a:avLst/>
-          </a:prstGeom>
-          <a:noFill/>
-          <a:ln/>
-        </p:spPr>
-        <p:txBody>
-          <a:bodyPr wrap="square" lIns="0" tIns="0" rIns="0" bIns="0" rtlCol="0" anchor="ctr"/>
-          <a:lstStyle/>
-          <a:p>
-            <a:pPr algn="ctr" indent="0" marL="0">
-              <a:buNone/>
-            </a:pPr>
-            <a:r>
-              <a:rPr lang="en-US" sz="950" dirty="0">
-                <a:solidFill>
-                  <a:srgbClr val="667085"/>
-                </a:solidFill>
-                <a:latin typeface="PingFang SC" pitchFamily="34" charset="0"/>
-                <a:ea typeface="PingFang SC" pitchFamily="34" charset="-122"/>
-                <a:cs typeface="PingFang SC" pitchFamily="34" charset="-120"/>
-              </a:rPr>
-              <a:t>这里的创新点不是“多调用几次模型”，而是让不同 Agent 给出可比较、可记录的理由。</a:t>
-            </a:r>
-            <a:endParaRPr lang="en-US" sz="950" dirty="0"/>
-          </a:p>
-        </p:txBody>
-      </p:sp>
-      <p:sp>
-        <p:nvSpPr>
-          <p:cNvPr id="34" name="Text 31"/>
+              <a:t>三个候选不是平均投票，而是由两个 Critic 给出可记录分数和理由，再由 Selector 写出 winner rationale 与 repair brief。</a:t>
+            </a:r>
+            <a:endParaRPr lang="en-US" sz="710" dirty="0"/>
+          </a:p>
+        </p:txBody>
+      </p:sp>
+      <p:sp>
+        <p:nvSpPr>
+          <p:cNvPr id="55" name="Text 52"/>
           <p:cNvSpPr/>
           <p:nvPr/>
         </p:nvSpPr>
@@ -9781,7 +11436,7 @@
       </p:sp>
       <p:sp>
         <p:nvSpPr>
-          <p:cNvPr id="35" name="Text 32"/>
+          <p:cNvPr id="56" name="Text 53"/>
           <p:cNvSpPr/>
           <p:nvPr/>
         </p:nvSpPr>
@@ -9965,12 +11620,12 @@
         </p:nvSpPr>
         <p:spPr>
           <a:xfrm>
-            <a:off x="868680" y="1234440"/>
-            <a:ext cx="1554480" cy="1783080"/>
+            <a:off x="594360" y="1143000"/>
+            <a:ext cx="1325880" cy="1508760"/>
           </a:xfrm>
           <a:prstGeom prst="roundRect">
             <a:avLst>
-              <a:gd name="adj" fmla="val 3529"/>
+              <a:gd name="adj" fmla="val 4138"/>
             </a:avLst>
           </a:prstGeom>
           <a:solidFill>
@@ -10000,8 +11655,8 @@
         </p:blipFill>
         <p:spPr>
           <a:xfrm>
-            <a:off x="1014984" y="1344168"/>
-            <a:ext cx="1261872" cy="1344168"/>
+            <a:off x="740664" y="1252728"/>
+            <a:ext cx="1033272" cy="1069848"/>
           </a:xfrm>
           <a:prstGeom prst="rect">
             <a:avLst/>
@@ -10016,8 +11671,8 @@
         </p:nvSpPr>
         <p:spPr>
           <a:xfrm>
-            <a:off x="996696" y="2761488"/>
-            <a:ext cx="1298448" cy="146304"/>
+            <a:off x="722376" y="2395728"/>
+            <a:ext cx="1069848" cy="146304"/>
           </a:xfrm>
           <a:prstGeom prst="rect">
             <a:avLst/>
@@ -10043,7 +11698,7 @@
                 <a:ea typeface="PingFang SC" pitchFamily="34" charset="-122"/>
                 <a:cs typeface="PingFang SC" pitchFamily="34" charset="-120"/>
               </a:rPr>
-              <a:t>Baseline: 70 / invalid</a:t>
+              <a:t>Baseline: 70 invalid</a:t>
             </a:r>
             <a:endParaRPr lang="en-US" sz="720" dirty="0"/>
           </a:p>
@@ -10057,12 +11712,12 @@
         </p:nvSpPr>
         <p:spPr>
           <a:xfrm>
-            <a:off x="9829800" y="1234440"/>
-            <a:ext cx="1554480" cy="1783080"/>
+            <a:off x="10241280" y="1143000"/>
+            <a:ext cx="1325880" cy="1508760"/>
           </a:xfrm>
           <a:prstGeom prst="roundRect">
             <a:avLst>
-              <a:gd name="adj" fmla="val 3529"/>
+              <a:gd name="adj" fmla="val 4138"/>
             </a:avLst>
           </a:prstGeom>
           <a:solidFill>
@@ -10092,8 +11747,8 @@
         </p:blipFill>
         <p:spPr>
           <a:xfrm>
-            <a:off x="9976104" y="1344168"/>
-            <a:ext cx="1261872" cy="1344168"/>
+            <a:off x="10387584" y="1252728"/>
+            <a:ext cx="1033272" cy="1069848"/>
           </a:xfrm>
           <a:prstGeom prst="rect">
             <a:avLst/>
@@ -10108,8 +11763,8 @@
         </p:nvSpPr>
         <p:spPr>
           <a:xfrm>
-            <a:off x="9957816" y="2761488"/>
-            <a:ext cx="1298448" cy="146304"/>
+            <a:off x="10369296" y="2395728"/>
+            <a:ext cx="1069848" cy="146304"/>
           </a:xfrm>
           <a:prstGeom prst="rect">
             <a:avLst/>
@@ -10135,7 +11790,7 @@
                 <a:ea typeface="PingFang SC" pitchFamily="34" charset="-122"/>
                 <a:cs typeface="PingFang SC" pitchFamily="34" charset="-120"/>
               </a:rPr>
-              <a:t>Refined: 95 / valid</a:t>
+              <a:t>Refined: 95 valid</a:t>
             </a:r>
             <a:endParaRPr lang="en-US" sz="720" dirty="0"/>
           </a:p>
@@ -10149,12 +11804,12 @@
         </p:nvSpPr>
         <p:spPr>
           <a:xfrm>
-            <a:off x="2834640" y="1389888"/>
-            <a:ext cx="1371600" cy="566928"/>
+            <a:off x="2331720" y="1298448"/>
+            <a:ext cx="1234440" cy="548640"/>
           </a:xfrm>
           <a:prstGeom prst="roundRect">
             <a:avLst>
-              <a:gd name="adj" fmla="val 9677"/>
+              <a:gd name="adj" fmla="val 10000"/>
             </a:avLst>
           </a:prstGeom>
           <a:solidFill>
@@ -10176,8 +11831,8 @@
         </p:nvSpPr>
         <p:spPr>
           <a:xfrm>
-            <a:off x="2880360" y="1472184"/>
-            <a:ext cx="1280160" cy="420624"/>
+            <a:off x="2377440" y="1380744"/>
+            <a:ext cx="1143000" cy="402336"/>
           </a:xfrm>
           <a:prstGeom prst="rect">
             <a:avLst/>
@@ -10220,7 +11875,7 @@
                 <a:ea typeface="PingFang SC" pitchFamily="34" charset="-122"/>
                 <a:cs typeface="PingFang SC" pitchFamily="34" charset="-120"/>
               </a:rPr>
-              <a:t>发现问题</a:t>
+              <a:t>invalid</a:t>
             </a:r>
             <a:endParaRPr lang="en-US" sz="710" dirty="0"/>
           </a:p>
@@ -10234,12 +11889,12 @@
         </p:nvSpPr>
         <p:spPr>
           <a:xfrm>
-            <a:off x="4663440" y="1389888"/>
-            <a:ext cx="1508760" cy="566928"/>
+            <a:off x="4069080" y="1298448"/>
+            <a:ext cx="1417320" cy="548640"/>
           </a:xfrm>
           <a:prstGeom prst="roundRect">
             <a:avLst>
-              <a:gd name="adj" fmla="val 9677"/>
+              <a:gd name="adj" fmla="val 10000"/>
             </a:avLst>
           </a:prstGeom>
           <a:solidFill>
@@ -10261,8 +11916,8 @@
         </p:nvSpPr>
         <p:spPr>
           <a:xfrm>
-            <a:off x="4709160" y="1472184"/>
-            <a:ext cx="1417320" cy="420624"/>
+            <a:off x="4114800" y="1380744"/>
+            <a:ext cx="1325880" cy="402336"/>
           </a:xfrm>
           <a:prstGeom prst="rect">
             <a:avLst/>
@@ -10319,12 +11974,12 @@
         </p:nvSpPr>
         <p:spPr>
           <a:xfrm>
-            <a:off x="6629400" y="1389888"/>
-            <a:ext cx="1417320" cy="566928"/>
+            <a:off x="5989320" y="1298448"/>
+            <a:ext cx="1325880" cy="548640"/>
           </a:xfrm>
           <a:prstGeom prst="roundRect">
             <a:avLst>
-              <a:gd name="adj" fmla="val 9677"/>
+              <a:gd name="adj" fmla="val 10000"/>
             </a:avLst>
           </a:prstGeom>
           <a:solidFill>
@@ -10346,8 +12001,8 @@
         </p:nvSpPr>
         <p:spPr>
           <a:xfrm>
-            <a:off x="6675120" y="1472184"/>
-            <a:ext cx="1325880" cy="420624"/>
+            <a:off x="6035040" y="1380744"/>
+            <a:ext cx="1234440" cy="402336"/>
           </a:xfrm>
           <a:prstGeom prst="rect">
             <a:avLst/>
@@ -10404,12 +12059,12 @@
         </p:nvSpPr>
         <p:spPr>
           <a:xfrm>
-            <a:off x="8503920" y="1389888"/>
-            <a:ext cx="1143000" cy="566928"/>
+            <a:off x="7818120" y="1298448"/>
+            <a:ext cx="1143000" cy="548640"/>
           </a:xfrm>
           <a:prstGeom prst="roundRect">
             <a:avLst>
-              <a:gd name="adj" fmla="val 9677"/>
+              <a:gd name="adj" fmla="val 10000"/>
             </a:avLst>
           </a:prstGeom>
           <a:solidFill>
@@ -10431,8 +12086,8 @@
         </p:nvSpPr>
         <p:spPr>
           <a:xfrm>
-            <a:off x="8549640" y="1472184"/>
-            <a:ext cx="1051560" cy="420624"/>
+            <a:off x="7863840" y="1380744"/>
+            <a:ext cx="1051560" cy="402336"/>
           </a:xfrm>
           <a:prstGeom prst="rect">
             <a:avLst/>
@@ -10475,7 +12130,7 @@
                 <a:ea typeface="PingFang SC" pitchFamily="34" charset="-122"/>
                 <a:cs typeface="PingFang SC" pitchFamily="34" charset="-120"/>
               </a:rPr>
-              <a:t>重写 SVG</a:t>
+              <a:t>完整 SVG</a:t>
             </a:r>
             <a:endParaRPr lang="en-US" sz="710" dirty="0"/>
           </a:p>
@@ -10489,8 +12144,76 @@
         </p:nvSpPr>
         <p:spPr>
           <a:xfrm>
-            <a:off x="4206240" y="1673352"/>
-            <a:ext cx="457200" cy="0"/>
+            <a:off x="9281160" y="1298448"/>
+            <a:ext cx="713232" cy="548640"/>
+          </a:xfrm>
+          <a:prstGeom prst="roundRect">
+            <a:avLst>
+              <a:gd name="adj" fmla="val 10000"/>
+            </a:avLst>
+          </a:prstGeom>
+          <a:solidFill>
+            <a:srgbClr val="DCFCE7"/>
+          </a:solidFill>
+          <a:ln w="12700">
+            <a:solidFill>
+              <a:srgbClr val="16A34A"/>
+            </a:solidFill>
+            <a:prstDash val="solid"/>
+          </a:ln>
+        </p:spPr>
+      </p:sp>
+      <p:sp>
+        <p:nvSpPr>
+          <p:cNvPr id="20" name="Text 16"/>
+          <p:cNvSpPr/>
+          <p:nvPr/>
+        </p:nvSpPr>
+        <p:spPr>
+          <a:xfrm>
+            <a:off x="9326880" y="1380744"/>
+            <a:ext cx="621792" cy="402336"/>
+          </a:xfrm>
+          <a:prstGeom prst="rect">
+            <a:avLst/>
+          </a:prstGeom>
+          <a:noFill/>
+          <a:ln/>
+        </p:spPr>
+        <p:txBody>
+          <a:bodyPr wrap="square" lIns="0" tIns="0" rIns="0" bIns="0" rtlCol="0" anchor="ctr">
+            <a:normAutofit/>
+          </a:bodyPr>
+          <a:lstStyle/>
+          <a:p>
+            <a:pPr algn="ctr" indent="0" marL="0">
+              <a:buNone/>
+            </a:pPr>
+            <a:r>
+              <a:rPr lang="en-US" sz="710" b="1" dirty="0">
+                <a:solidFill>
+                  <a:srgbClr val="172033"/>
+                </a:solidFill>
+                <a:latin typeface="PingFang SC" pitchFamily="34" charset="0"/>
+                <a:ea typeface="PingFang SC" pitchFamily="34" charset="-122"/>
+                <a:cs typeface="PingFang SC" pitchFamily="34" charset="-120"/>
+              </a:rPr>
+              <a:t>valid</a:t>
+            </a:r>
+            <a:endParaRPr lang="en-US" sz="710" dirty="0"/>
+          </a:p>
+        </p:txBody>
+      </p:sp>
+      <p:sp>
+        <p:nvSpPr>
+          <p:cNvPr id="21" name="Shape 17"/>
+          <p:cNvSpPr/>
+          <p:nvPr/>
+        </p:nvSpPr>
+        <p:spPr>
+          <a:xfrm>
+            <a:off x="3566160" y="1572768"/>
+            <a:ext cx="502920" cy="0"/>
           </a:xfrm>
           <a:prstGeom prst="line">
             <a:avLst/>
@@ -10508,14 +12231,14 @@
       </p:sp>
       <p:sp>
         <p:nvSpPr>
-          <p:cNvPr id="20" name="Shape 16"/>
-          <p:cNvSpPr/>
-          <p:nvPr/>
-        </p:nvSpPr>
-        <p:spPr>
-          <a:xfrm>
-            <a:off x="6172200" y="1673352"/>
-            <a:ext cx="457200" cy="0"/>
+          <p:cNvPr id="22" name="Shape 18"/>
+          <p:cNvSpPr/>
+          <p:nvPr/>
+        </p:nvSpPr>
+        <p:spPr>
+          <a:xfrm>
+            <a:off x="5486400" y="1572768"/>
+            <a:ext cx="502920" cy="0"/>
           </a:xfrm>
           <a:prstGeom prst="line">
             <a:avLst/>
@@ -10533,14 +12256,14 @@
       </p:sp>
       <p:sp>
         <p:nvSpPr>
-          <p:cNvPr id="21" name="Shape 17"/>
-          <p:cNvSpPr/>
-          <p:nvPr/>
-        </p:nvSpPr>
-        <p:spPr>
-          <a:xfrm>
-            <a:off x="8046720" y="1673352"/>
-            <a:ext cx="457200" cy="0"/>
+          <p:cNvPr id="23" name="Shape 19"/>
+          <p:cNvSpPr/>
+          <p:nvPr/>
+        </p:nvSpPr>
+        <p:spPr>
+          <a:xfrm>
+            <a:off x="7315200" y="1572768"/>
+            <a:ext cx="502920" cy="0"/>
           </a:xfrm>
           <a:prstGeom prst="line">
             <a:avLst/>
@@ -10558,42 +12281,494 @@
       </p:sp>
       <p:sp>
         <p:nvSpPr>
-          <p:cNvPr id="22" name="Shape 18"/>
-          <p:cNvSpPr/>
-          <p:nvPr/>
-        </p:nvSpPr>
-        <p:spPr>
-          <a:xfrm>
-            <a:off x="9070848" y="1956816"/>
-            <a:ext cx="-5532120" cy="1508760"/>
+          <p:cNvPr id="24" name="Shape 20"/>
+          <p:cNvSpPr/>
+          <p:nvPr/>
+        </p:nvSpPr>
+        <p:spPr>
+          <a:xfrm>
+            <a:off x="8961120" y="1572768"/>
+            <a:ext cx="320040" cy="0"/>
           </a:xfrm>
           <a:prstGeom prst="line">
             <a:avLst/>
           </a:prstGeom>
           <a:noFill/>
-          <a:ln w="15240">
+          <a:ln w="16510">
+            <a:solidFill>
+              <a:srgbClr val="16A34A"/>
+            </a:solidFill>
+            <a:prstDash val="solid"/>
+            <a:headEnd type="none"/>
+            <a:tailEnd type="triangle"/>
+          </a:ln>
+        </p:spPr>
+      </p:sp>
+      <p:sp>
+        <p:nvSpPr>
+          <p:cNvPr id="25" name="Shape 21"/>
+          <p:cNvSpPr/>
+          <p:nvPr/>
+        </p:nvSpPr>
+        <p:spPr>
+          <a:xfrm>
+            <a:off x="8394192" y="1847088"/>
+            <a:ext cx="0" cy="822960"/>
+          </a:xfrm>
+          <a:prstGeom prst="line">
+            <a:avLst/>
+          </a:prstGeom>
+          <a:noFill/>
+          <a:ln w="14605">
             <a:solidFill>
               <a:srgbClr val="F97316"/>
             </a:solidFill>
             <a:prstDash val="solid"/>
+            <a:headEnd type="none"/>
+            <a:tailEnd type="none"/>
+          </a:ln>
+        </p:spPr>
+      </p:sp>
+      <p:sp>
+        <p:nvSpPr>
+          <p:cNvPr id="26" name="Shape 22"/>
+          <p:cNvSpPr/>
+          <p:nvPr/>
+        </p:nvSpPr>
+        <p:spPr>
+          <a:xfrm>
+            <a:off x="8394192" y="2670048"/>
+            <a:ext cx="-5449824" cy="0"/>
+          </a:xfrm>
+          <a:prstGeom prst="line">
+            <a:avLst/>
+          </a:prstGeom>
+          <a:noFill/>
+          <a:ln w="14605">
+            <a:solidFill>
+              <a:srgbClr val="F97316"/>
+            </a:solidFill>
+            <a:prstDash val="solid"/>
+            <a:headEnd type="none"/>
+            <a:tailEnd type="none"/>
+          </a:ln>
+        </p:spPr>
+      </p:sp>
+      <p:sp>
+        <p:nvSpPr>
+          <p:cNvPr id="27" name="Shape 23"/>
+          <p:cNvSpPr/>
+          <p:nvPr/>
+        </p:nvSpPr>
+        <p:spPr>
+          <a:xfrm>
+            <a:off x="2944368" y="2670048"/>
+            <a:ext cx="0" cy="-822960"/>
+          </a:xfrm>
+          <a:prstGeom prst="line">
+            <a:avLst/>
+          </a:prstGeom>
+          <a:noFill/>
+          <a:ln w="15875">
+            <a:solidFill>
+              <a:srgbClr val="F97316"/>
+            </a:solidFill>
+            <a:prstDash val="solid"/>
+            <a:headEnd type="none"/>
             <a:tailEnd type="triangle"/>
           </a:ln>
         </p:spPr>
       </p:sp>
       <p:sp>
         <p:nvSpPr>
-          <p:cNvPr id="23" name="Shape 19"/>
-          <p:cNvSpPr/>
-          <p:nvPr/>
-        </p:nvSpPr>
-        <p:spPr>
-          <a:xfrm>
-            <a:off x="960120" y="3657600"/>
-            <a:ext cx="2834640" cy="1325880"/>
+          <p:cNvPr id="28" name="Text 24"/>
+          <p:cNvSpPr/>
+          <p:nvPr/>
+        </p:nvSpPr>
+        <p:spPr>
+          <a:xfrm>
+            <a:off x="5120640" y="2487168"/>
+            <a:ext cx="1097280" cy="164592"/>
+          </a:xfrm>
+          <a:prstGeom prst="rect">
+            <a:avLst/>
+          </a:prstGeom>
+          <a:noFill/>
+          <a:ln/>
+        </p:spPr>
+        <p:txBody>
+          <a:bodyPr wrap="square" lIns="0" tIns="0" rIns="0" bIns="0" rtlCol="0" anchor="ctr"/>
+          <a:lstStyle/>
+          <a:p>
+            <a:pPr algn="ctr" indent="0" marL="0">
+              <a:buNone/>
+            </a:pPr>
+            <a:r>
+              <a:rPr lang="en-US" sz="700" dirty="0">
+                <a:solidFill>
+                  <a:srgbClr val="F97316"/>
+                </a:solidFill>
+                <a:latin typeface="Aptos" pitchFamily="34" charset="0"/>
+                <a:ea typeface="Aptos" pitchFamily="34" charset="-122"/>
+                <a:cs typeface="Aptos" pitchFamily="34" charset="-120"/>
+              </a:rPr>
+              <a:t>re-validate</a:t>
+            </a:r>
+            <a:endParaRPr lang="en-US" sz="700" dirty="0"/>
+          </a:p>
+        </p:txBody>
+      </p:sp>
+      <p:sp>
+        <p:nvSpPr>
+          <p:cNvPr id="29" name="Shape 25"/>
+          <p:cNvSpPr/>
+          <p:nvPr/>
+        </p:nvSpPr>
+        <p:spPr>
+          <a:xfrm>
+            <a:off x="868680" y="3246120"/>
+            <a:ext cx="3383280" cy="1234440"/>
           </a:xfrm>
           <a:prstGeom prst="roundRect">
             <a:avLst>
-              <a:gd name="adj" fmla="val 5517"/>
+              <a:gd name="adj" fmla="val 3704"/>
+            </a:avLst>
+          </a:prstGeom>
+          <a:solidFill>
+            <a:srgbClr val="111827"/>
+          </a:solidFill>
+          <a:ln w="12700">
+            <a:solidFill>
+              <a:srgbClr val="F97316"/>
+            </a:solidFill>
+            <a:prstDash val="solid"/>
+          </a:ln>
+        </p:spPr>
+      </p:sp>
+      <p:sp>
+        <p:nvSpPr>
+          <p:cNvPr id="30" name="Text 26"/>
+          <p:cNvSpPr/>
+          <p:nvPr/>
+        </p:nvSpPr>
+        <p:spPr>
+          <a:xfrm>
+            <a:off x="978408" y="3346704"/>
+            <a:ext cx="3163824" cy="146304"/>
+          </a:xfrm>
+          <a:prstGeom prst="rect">
+            <a:avLst/>
+          </a:prstGeom>
+          <a:noFill/>
+          <a:ln/>
+        </p:spPr>
+        <p:txBody>
+          <a:bodyPr wrap="square" lIns="0" tIns="0" rIns="0" bIns="0" rtlCol="0" anchor="ctr">
+            <a:normAutofit/>
+          </a:bodyPr>
+          <a:lstStyle/>
+          <a:p>
+            <a:pPr indent="0" marL="0">
+              <a:buNone/>
+            </a:pPr>
+            <a:r>
+              <a:rPr lang="en-US" sz="680" b="1" dirty="0">
+                <a:solidFill>
+                  <a:srgbClr val="93C5FD"/>
+                </a:solidFill>
+                <a:latin typeface="PingFang SC" pitchFamily="34" charset="0"/>
+                <a:ea typeface="PingFang SC" pitchFamily="34" charset="-122"/>
+                <a:cs typeface="PingFang SC" pitchFamily="34" charset="-120"/>
+              </a:rPr>
+              <a:t>failure_taxonomy.json 摘录</a:t>
+            </a:r>
+            <a:endParaRPr lang="en-US" sz="680" dirty="0"/>
+          </a:p>
+        </p:txBody>
+      </p:sp>
+      <p:sp>
+        <p:nvSpPr>
+          <p:cNvPr id="31" name="Text 27"/>
+          <p:cNvSpPr/>
+          <p:nvPr/>
+        </p:nvSpPr>
+        <p:spPr>
+          <a:xfrm>
+            <a:off x="978408" y="3566160"/>
+            <a:ext cx="3163824" cy="850392"/>
+          </a:xfrm>
+          <a:prstGeom prst="rect">
+            <a:avLst/>
+          </a:prstGeom>
+          <a:noFill/>
+          <a:ln/>
+        </p:spPr>
+        <p:txBody>
+          <a:bodyPr wrap="square" lIns="127" tIns="127" rIns="127" bIns="127" rtlCol="0" anchor="t">
+            <a:normAutofit/>
+          </a:bodyPr>
+          <a:lstStyle/>
+          <a:p>
+            <a:pPr indent="0" marL="0">
+              <a:buNone/>
+            </a:pPr>
+            <a:r>
+              <a:rPr lang="en-US" sz="610" dirty="0">
+                <a:solidFill>
+                  <a:srgbClr val="F9FAFB"/>
+                </a:solidFill>
+                <a:latin typeface="Menlo" pitchFamily="34" charset="0"/>
+                <a:ea typeface="Menlo" pitchFamily="34" charset="-122"/>
+                <a:cs typeface="Menlo" pitchFamily="34" charset="-120"/>
+              </a:rPr>
+              <a:t>failure_types: [</a:t>
+            </a:r>
+            <a:endParaRPr lang="en-US" sz="610" dirty="0"/>
+          </a:p>
+          <a:p>
+            <a:pPr indent="0" marL="0">
+              <a:buNone/>
+            </a:pPr>
+            <a:r>
+              <a:rPr lang="en-US" sz="610" dirty="0">
+                <a:solidFill>
+                  <a:srgbClr val="F9FAFB"/>
+                </a:solidFill>
+                <a:latin typeface="Menlo" pitchFamily="34" charset="0"/>
+                <a:ea typeface="Menlo" pitchFamily="34" charset="-122"/>
+                <a:cs typeface="Menlo" pitchFamily="34" charset="-120"/>
+              </a:rPr>
+              <a:t>  "semantic_mismatch",</a:t>
+            </a:r>
+            <a:endParaRPr lang="en-US" sz="610" dirty="0"/>
+          </a:p>
+          <a:p>
+            <a:pPr indent="0" marL="0">
+              <a:buNone/>
+            </a:pPr>
+            <a:r>
+              <a:rPr lang="en-US" sz="610" dirty="0">
+                <a:solidFill>
+                  <a:srgbClr val="F9FAFB"/>
+                </a:solidFill>
+                <a:latin typeface="Menlo" pitchFamily="34" charset="0"/>
+                <a:ea typeface="Menlo" pitchFamily="34" charset="-122"/>
+                <a:cs typeface="Menlo" pitchFamily="34" charset="-120"/>
+              </a:rPr>
+              <a:t>  "constraint_violation"</a:t>
+            </a:r>
+            <a:endParaRPr lang="en-US" sz="610" dirty="0"/>
+          </a:p>
+          <a:p>
+            <a:pPr indent="0" marL="0">
+              <a:buNone/>
+            </a:pPr>
+            <a:r>
+              <a:rPr lang="en-US" sz="610" dirty="0">
+                <a:solidFill>
+                  <a:srgbClr val="F9FAFB"/>
+                </a:solidFill>
+                <a:latin typeface="Menlo" pitchFamily="34" charset="0"/>
+                <a:ea typeface="Menlo" pitchFamily="34" charset="-122"/>
+                <a:cs typeface="Menlo" pitchFamily="34" charset="-120"/>
+              </a:rPr>
+              <a:t>]</a:t>
+            </a:r>
+            <a:endParaRPr lang="en-US" sz="610" dirty="0"/>
+          </a:p>
+          <a:p>
+            <a:pPr indent="0" marL="0">
+              <a:buNone/>
+            </a:pPr>
+            <a:r>
+              <a:rPr lang="en-US" sz="610" dirty="0">
+                <a:solidFill>
+                  <a:srgbClr val="F9FAFB"/>
+                </a:solidFill>
+                <a:latin typeface="Menlo" pitchFamily="34" charset="0"/>
+                <a:ea typeface="Menlo" pitchFamily="34" charset="-122"/>
+                <a:cs typeface="Menlo" pitchFamily="34" charset="-120"/>
+              </a:rPr>
+              <a:t>root_cause: blue cup != coffee palette</a:t>
+            </a:r>
+            <a:endParaRPr lang="en-US" sz="610" dirty="0"/>
+          </a:p>
+        </p:txBody>
+      </p:sp>
+      <p:sp>
+        <p:nvSpPr>
+          <p:cNvPr id="32" name="Shape 28"/>
+          <p:cNvSpPr/>
+          <p:nvPr/>
+        </p:nvSpPr>
+        <p:spPr>
+          <a:xfrm>
+            <a:off x="4526280" y="3246120"/>
+            <a:ext cx="3383280" cy="1234440"/>
+          </a:xfrm>
+          <a:prstGeom prst="roundRect">
+            <a:avLst>
+              <a:gd name="adj" fmla="val 3704"/>
+            </a:avLst>
+          </a:prstGeom>
+          <a:solidFill>
+            <a:srgbClr val="111827"/>
+          </a:solidFill>
+          <a:ln w="12700">
+            <a:solidFill>
+              <a:srgbClr val="7C3AED"/>
+            </a:solidFill>
+            <a:prstDash val="solid"/>
+          </a:ln>
+        </p:spPr>
+      </p:sp>
+      <p:sp>
+        <p:nvSpPr>
+          <p:cNvPr id="33" name="Text 29"/>
+          <p:cNvSpPr/>
+          <p:nvPr/>
+        </p:nvSpPr>
+        <p:spPr>
+          <a:xfrm>
+            <a:off x="4636008" y="3346704"/>
+            <a:ext cx="3163824" cy="146304"/>
+          </a:xfrm>
+          <a:prstGeom prst="rect">
+            <a:avLst/>
+          </a:prstGeom>
+          <a:noFill/>
+          <a:ln/>
+        </p:spPr>
+        <p:txBody>
+          <a:bodyPr wrap="square" lIns="0" tIns="0" rIns="0" bIns="0" rtlCol="0" anchor="ctr">
+            <a:normAutofit/>
+          </a:bodyPr>
+          <a:lstStyle/>
+          <a:p>
+            <a:pPr indent="0" marL="0">
+              <a:buNone/>
+            </a:pPr>
+            <a:r>
+              <a:rPr lang="en-US" sz="680" b="1" dirty="0">
+                <a:solidFill>
+                  <a:srgbClr val="93C5FD"/>
+                </a:solidFill>
+                <a:latin typeface="PingFang SC" pitchFamily="34" charset="0"/>
+                <a:ea typeface="PingFang SC" pitchFamily="34" charset="-122"/>
+                <a:cs typeface="PingFang SC" pitchFamily="34" charset="-120"/>
+              </a:rPr>
+              <a:t>repair_routes.json 摘录</a:t>
+            </a:r>
+            <a:endParaRPr lang="en-US" sz="680" dirty="0"/>
+          </a:p>
+        </p:txBody>
+      </p:sp>
+      <p:sp>
+        <p:nvSpPr>
+          <p:cNvPr id="34" name="Text 30"/>
+          <p:cNvSpPr/>
+          <p:nvPr/>
+        </p:nvSpPr>
+        <p:spPr>
+          <a:xfrm>
+            <a:off x="4636008" y="3566160"/>
+            <a:ext cx="3163824" cy="850392"/>
+          </a:xfrm>
+          <a:prstGeom prst="rect">
+            <a:avLst/>
+          </a:prstGeom>
+          <a:noFill/>
+          <a:ln/>
+        </p:spPr>
+        <p:txBody>
+          <a:bodyPr wrap="square" lIns="127" tIns="127" rIns="127" bIns="127" rtlCol="0" anchor="t">
+            <a:normAutofit/>
+          </a:bodyPr>
+          <a:lstStyle/>
+          <a:p>
+            <a:pPr indent="0" marL="0">
+              <a:buNone/>
+            </a:pPr>
+            <a:r>
+              <a:rPr lang="en-US" sz="610" dirty="0">
+                <a:solidFill>
+                  <a:srgbClr val="F9FAFB"/>
+                </a:solidFill>
+                <a:latin typeface="Menlo" pitchFamily="34" charset="0"/>
+                <a:ea typeface="Menlo" pitchFamily="34" charset="-122"/>
+                <a:cs typeface="Menlo" pitchFamily="34" charset="-120"/>
+              </a:rPr>
+              <a:t>route: "semantic_recompose"</a:t>
+            </a:r>
+            <a:endParaRPr lang="en-US" sz="610" dirty="0"/>
+          </a:p>
+          <a:p>
+            <a:pPr indent="0" marL="0">
+              <a:buNone/>
+            </a:pPr>
+            <a:r>
+              <a:rPr lang="en-US" sz="610" dirty="0">
+                <a:solidFill>
+                  <a:srgbClr val="F9FAFB"/>
+                </a:solidFill>
+                <a:latin typeface="Menlo" pitchFamily="34" charset="0"/>
+                <a:ea typeface="Menlo" pitchFamily="34" charset="-122"/>
+                <a:cs typeface="Menlo" pitchFamily="34" charset="-120"/>
+              </a:rPr>
+              <a:t>ordered_actions:</a:t>
+            </a:r>
+            <a:endParaRPr lang="en-US" sz="610" dirty="0"/>
+          </a:p>
+          <a:p>
+            <a:pPr indent="0" marL="0">
+              <a:buNone/>
+            </a:pPr>
+            <a:r>
+              <a:rPr lang="en-US" sz="610" dirty="0">
+                <a:solidFill>
+                  <a:srgbClr val="F9FAFB"/>
+                </a:solidFill>
+                <a:latin typeface="Menlo" pitchFamily="34" charset="0"/>
+                <a:ea typeface="Menlo" pitchFamily="34" charset="-122"/>
+                <a:cs typeface="Menlo" pitchFamily="34" charset="-120"/>
+              </a:rPr>
+              <a:t>- replace #4a90d9 -&gt; #6F4E37</a:t>
+            </a:r>
+            <a:endParaRPr lang="en-US" sz="610" dirty="0"/>
+          </a:p>
+          <a:p>
+            <a:pPr indent="0" marL="0">
+              <a:buNone/>
+            </a:pPr>
+            <a:r>
+              <a:rPr lang="en-US" sz="610" dirty="0">
+                <a:solidFill>
+                  <a:srgbClr val="F9FAFB"/>
+                </a:solidFill>
+                <a:latin typeface="Menlo" pitchFamily="34" charset="0"/>
+                <a:ea typeface="Menlo" pitchFamily="34" charset="-122"/>
+                <a:cs typeface="Menlo" pitchFamily="34" charset="-120"/>
+              </a:rPr>
+              <a:t>- remove opacity from steam lines</a:t>
+            </a:r>
+            <a:endParaRPr lang="en-US" sz="610" dirty="0"/>
+          </a:p>
+        </p:txBody>
+      </p:sp>
+      <p:sp>
+        <p:nvSpPr>
+          <p:cNvPr id="35" name="Shape 31"/>
+          <p:cNvSpPr/>
+          <p:nvPr/>
+        </p:nvSpPr>
+        <p:spPr>
+          <a:xfrm>
+            <a:off x="8183880" y="3246120"/>
+            <a:ext cx="2971800" cy="1234440"/>
+          </a:xfrm>
+          <a:prstGeom prst="roundRect">
+            <a:avLst>
+              <a:gd name="adj" fmla="val 5926"/>
             </a:avLst>
           </a:prstGeom>
           <a:solidFill>
@@ -10609,345 +12784,14 @@
       </p:sp>
       <p:sp>
         <p:nvSpPr>
-          <p:cNvPr id="24" name="Shape 20"/>
-          <p:cNvSpPr/>
-          <p:nvPr/>
-        </p:nvSpPr>
-        <p:spPr>
-          <a:xfrm>
-            <a:off x="960120" y="3657600"/>
-            <a:ext cx="73152" cy="1325880"/>
-          </a:xfrm>
-          <a:prstGeom prst="rect">
-            <a:avLst/>
-          </a:prstGeom>
-          <a:solidFill>
-            <a:srgbClr val="F97316"/>
-          </a:solidFill>
-          <a:ln w="12700">
-            <a:solidFill>
-              <a:srgbClr val="F97316"/>
-            </a:solidFill>
-            <a:prstDash val="solid"/>
-          </a:ln>
-        </p:spPr>
-      </p:sp>
-      <p:sp>
-        <p:nvSpPr>
-          <p:cNvPr id="25" name="Text 21"/>
-          <p:cNvSpPr/>
-          <p:nvPr/>
-        </p:nvSpPr>
-        <p:spPr>
-          <a:xfrm>
-            <a:off x="1161288" y="3822192"/>
-            <a:ext cx="2514600" cy="201168"/>
-          </a:xfrm>
-          <a:prstGeom prst="rect">
-            <a:avLst/>
-          </a:prstGeom>
-          <a:noFill/>
-          <a:ln/>
-        </p:spPr>
-        <p:txBody>
-          <a:bodyPr wrap="square" lIns="0" tIns="0" rIns="0" bIns="0" rtlCol="0" anchor="ctr">
-            <a:normAutofit/>
-          </a:bodyPr>
-          <a:lstStyle/>
-          <a:p>
-            <a:pPr indent="0" marL="0">
-              <a:buNone/>
-            </a:pPr>
-            <a:r>
-              <a:rPr lang="en-US" sz="1050" b="1" dirty="0">
-                <a:solidFill>
-                  <a:srgbClr val="172033"/>
-                </a:solidFill>
-                <a:latin typeface="PingFang SC" pitchFamily="34" charset="0"/>
-                <a:ea typeface="PingFang SC" pitchFamily="34" charset="-122"/>
-                <a:cs typeface="PingFang SC" pitchFamily="34" charset="-120"/>
-              </a:rPr>
-              <a:t>Taxonomy</a:t>
-            </a:r>
-            <a:endParaRPr lang="en-US" sz="1050" dirty="0"/>
-          </a:p>
-        </p:txBody>
-      </p:sp>
-      <p:sp>
-        <p:nvSpPr>
-          <p:cNvPr id="26" name="Text 22"/>
-          <p:cNvSpPr/>
-          <p:nvPr/>
-        </p:nvSpPr>
-        <p:spPr>
-          <a:xfrm>
-            <a:off x="1161288" y="4133088"/>
-            <a:ext cx="2514600" cy="758952"/>
-          </a:xfrm>
-          <a:prstGeom prst="rect">
-            <a:avLst/>
-          </a:prstGeom>
-          <a:noFill/>
-          <a:ln/>
-        </p:spPr>
-        <p:txBody>
-          <a:bodyPr wrap="square" lIns="254" tIns="254" rIns="254" bIns="254" rtlCol="0" anchor="t">
-            <a:normAutofit/>
-          </a:bodyPr>
-          <a:lstStyle/>
-          <a:p>
-            <a:pPr indent="0" marL="0">
-              <a:buNone/>
-            </a:pPr>
-            <a:r>
-              <a:rPr lang="en-US" sz="820" dirty="0">
-                <a:solidFill>
-                  <a:srgbClr val="667085"/>
-                </a:solidFill>
-                <a:latin typeface="PingFang SC" pitchFamily="34" charset="0"/>
-                <a:ea typeface="PingFang SC" pitchFamily="34" charset="-122"/>
-                <a:cs typeface="PingFang SC" pitchFamily="34" charset="-120"/>
-              </a:rPr>
-              <a:t>semantic_mismatch</a:t>
-            </a:r>
-            <a:endParaRPr lang="en-US" sz="820" dirty="0"/>
-          </a:p>
-          <a:p>
-            <a:pPr indent="0" marL="0">
-              <a:buNone/>
-            </a:pPr>
-            <a:r>
-              <a:rPr lang="en-US" sz="820" dirty="0">
-                <a:solidFill>
-                  <a:srgbClr val="667085"/>
-                </a:solidFill>
-                <a:latin typeface="PingFang SC" pitchFamily="34" charset="0"/>
-                <a:ea typeface="PingFang SC" pitchFamily="34" charset="-122"/>
-                <a:cs typeface="PingFang SC" pitchFamily="34" charset="-120"/>
-              </a:rPr>
-              <a:t>constraint_violation</a:t>
-            </a:r>
-            <a:endParaRPr lang="en-US" sz="820" dirty="0"/>
-          </a:p>
-          <a:p>
-            <a:pPr indent="0" marL="0">
-              <a:buNone/>
-            </a:pPr>
-            <a:endParaRPr lang="en-US" sz="820" dirty="0"/>
-          </a:p>
-          <a:p>
-            <a:pPr indent="0" marL="0">
-              <a:buNone/>
-            </a:pPr>
-            <a:r>
-              <a:rPr lang="en-US" sz="820" dirty="0">
-                <a:solidFill>
-                  <a:srgbClr val="667085"/>
-                </a:solidFill>
-                <a:latin typeface="PingFang SC" pitchFamily="34" charset="0"/>
-                <a:ea typeface="PingFang SC" pitchFamily="34" charset="-122"/>
-                <a:cs typeface="PingFang SC" pitchFamily="34" charset="-120"/>
-              </a:rPr>
-              <a:t>根因：蓝色杯体不符合咖啡色 palette；steam opacity 违反约束</a:t>
-            </a:r>
-            <a:endParaRPr lang="en-US" sz="820" dirty="0"/>
-          </a:p>
-        </p:txBody>
-      </p:sp>
-      <p:sp>
-        <p:nvSpPr>
-          <p:cNvPr id="27" name="Shape 23"/>
-          <p:cNvSpPr/>
-          <p:nvPr/>
-        </p:nvSpPr>
-        <p:spPr>
-          <a:xfrm>
-            <a:off x="4160520" y="3657600"/>
-            <a:ext cx="2834640" cy="1325880"/>
-          </a:xfrm>
-          <a:prstGeom prst="roundRect">
-            <a:avLst>
-              <a:gd name="adj" fmla="val 5517"/>
-            </a:avLst>
-          </a:prstGeom>
-          <a:solidFill>
-            <a:srgbClr val="FFFFFF"/>
-          </a:solidFill>
-          <a:ln w="12700">
-            <a:solidFill>
-              <a:srgbClr val="EAECF0"/>
-            </a:solidFill>
-            <a:prstDash val="solid"/>
-          </a:ln>
-        </p:spPr>
-      </p:sp>
-      <p:sp>
-        <p:nvSpPr>
-          <p:cNvPr id="28" name="Shape 24"/>
-          <p:cNvSpPr/>
-          <p:nvPr/>
-        </p:nvSpPr>
-        <p:spPr>
-          <a:xfrm>
-            <a:off x="4160520" y="3657600"/>
-            <a:ext cx="73152" cy="1325880"/>
-          </a:xfrm>
-          <a:prstGeom prst="rect">
-            <a:avLst/>
-          </a:prstGeom>
-          <a:solidFill>
-            <a:srgbClr val="7C3AED"/>
-          </a:solidFill>
-          <a:ln w="12700">
-            <a:solidFill>
-              <a:srgbClr val="7C3AED"/>
-            </a:solidFill>
-            <a:prstDash val="solid"/>
-          </a:ln>
-        </p:spPr>
-      </p:sp>
-      <p:sp>
-        <p:nvSpPr>
-          <p:cNvPr id="29" name="Text 25"/>
-          <p:cNvSpPr/>
-          <p:nvPr/>
-        </p:nvSpPr>
-        <p:spPr>
-          <a:xfrm>
-            <a:off x="4361688" y="3822192"/>
-            <a:ext cx="2514600" cy="201168"/>
-          </a:xfrm>
-          <a:prstGeom prst="rect">
-            <a:avLst/>
-          </a:prstGeom>
-          <a:noFill/>
-          <a:ln/>
-        </p:spPr>
-        <p:txBody>
-          <a:bodyPr wrap="square" lIns="0" tIns="0" rIns="0" bIns="0" rtlCol="0" anchor="ctr">
-            <a:normAutofit/>
-          </a:bodyPr>
-          <a:lstStyle/>
-          <a:p>
-            <a:pPr indent="0" marL="0">
-              <a:buNone/>
-            </a:pPr>
-            <a:r>
-              <a:rPr lang="en-US" sz="1050" b="1" dirty="0">
-                <a:solidFill>
-                  <a:srgbClr val="172033"/>
-                </a:solidFill>
-                <a:latin typeface="PingFang SC" pitchFamily="34" charset="0"/>
-                <a:ea typeface="PingFang SC" pitchFamily="34" charset="-122"/>
-                <a:cs typeface="PingFang SC" pitchFamily="34" charset="-120"/>
-              </a:rPr>
-              <a:t>Route</a:t>
-            </a:r>
-            <a:endParaRPr lang="en-US" sz="1050" dirty="0"/>
-          </a:p>
-        </p:txBody>
-      </p:sp>
-      <p:sp>
-        <p:nvSpPr>
-          <p:cNvPr id="30" name="Text 26"/>
-          <p:cNvSpPr/>
-          <p:nvPr/>
-        </p:nvSpPr>
-        <p:spPr>
-          <a:xfrm>
-            <a:off x="4361688" y="4133088"/>
-            <a:ext cx="2514600" cy="758952"/>
-          </a:xfrm>
-          <a:prstGeom prst="rect">
-            <a:avLst/>
-          </a:prstGeom>
-          <a:noFill/>
-          <a:ln/>
-        </p:spPr>
-        <p:txBody>
-          <a:bodyPr wrap="square" lIns="254" tIns="254" rIns="254" bIns="254" rtlCol="0" anchor="t">
-            <a:normAutofit/>
-          </a:bodyPr>
-          <a:lstStyle/>
-          <a:p>
-            <a:pPr indent="0" marL="0">
-              <a:buNone/>
-            </a:pPr>
-            <a:r>
-              <a:rPr lang="en-US" sz="820" dirty="0">
-                <a:solidFill>
-                  <a:srgbClr val="667085"/>
-                </a:solidFill>
-                <a:latin typeface="PingFang SC" pitchFamily="34" charset="0"/>
-                <a:ea typeface="PingFang SC" pitchFamily="34" charset="-122"/>
-                <a:cs typeface="PingFang SC" pitchFamily="34" charset="-120"/>
-              </a:rPr>
-              <a:t>semantic_recompose</a:t>
-            </a:r>
-            <a:endParaRPr lang="en-US" sz="820" dirty="0"/>
-          </a:p>
-          <a:p>
-            <a:pPr indent="0" marL="0">
-              <a:buNone/>
-            </a:pPr>
-            <a:endParaRPr lang="en-US" sz="820" dirty="0"/>
-          </a:p>
-          <a:p>
-            <a:pPr indent="0" marL="0">
-              <a:buNone/>
-            </a:pPr>
-            <a:r>
-              <a:rPr lang="en-US" sz="820" dirty="0">
-                <a:solidFill>
-                  <a:srgbClr val="667085"/>
-                </a:solidFill>
-                <a:latin typeface="PingFang SC" pitchFamily="34" charset="0"/>
-                <a:ea typeface="PingFang SC" pitchFamily="34" charset="-122"/>
-                <a:cs typeface="PingFang SC" pitchFamily="34" charset="-120"/>
-              </a:rPr>
-              <a:t>策略：替换为 brown / cream palette，移除 opacity，更新 metadata</a:t>
-            </a:r>
-            <a:endParaRPr lang="en-US" sz="820" dirty="0"/>
-          </a:p>
-        </p:txBody>
-      </p:sp>
-      <p:sp>
-        <p:nvSpPr>
-          <p:cNvPr id="31" name="Shape 27"/>
-          <p:cNvSpPr/>
-          <p:nvPr/>
-        </p:nvSpPr>
-        <p:spPr>
-          <a:xfrm>
-            <a:off x="7360920" y="3657600"/>
-            <a:ext cx="2834640" cy="1325880"/>
-          </a:xfrm>
-          <a:prstGeom prst="roundRect">
-            <a:avLst>
-              <a:gd name="adj" fmla="val 5517"/>
-            </a:avLst>
-          </a:prstGeom>
-          <a:solidFill>
-            <a:srgbClr val="FFFFFF"/>
-          </a:solidFill>
-          <a:ln w="12700">
-            <a:solidFill>
-              <a:srgbClr val="EAECF0"/>
-            </a:solidFill>
-            <a:prstDash val="solid"/>
-          </a:ln>
-        </p:spPr>
-      </p:sp>
-      <p:sp>
-        <p:nvSpPr>
-          <p:cNvPr id="32" name="Shape 28"/>
-          <p:cNvSpPr/>
-          <p:nvPr/>
-        </p:nvSpPr>
-        <p:spPr>
-          <a:xfrm>
-            <a:off x="7360920" y="3657600"/>
-            <a:ext cx="73152" cy="1325880"/>
+          <p:cNvPr id="36" name="Shape 32"/>
+          <p:cNvSpPr/>
+          <p:nvPr/>
+        </p:nvSpPr>
+        <p:spPr>
+          <a:xfrm>
+            <a:off x="8183880" y="3246120"/>
+            <a:ext cx="73152" cy="1234440"/>
           </a:xfrm>
           <a:prstGeom prst="rect">
             <a:avLst/>
@@ -10965,14 +12809,14 @@
       </p:sp>
       <p:sp>
         <p:nvSpPr>
-          <p:cNvPr id="33" name="Text 29"/>
-          <p:cNvSpPr/>
-          <p:nvPr/>
-        </p:nvSpPr>
-        <p:spPr>
-          <a:xfrm>
-            <a:off x="7562088" y="3822192"/>
-            <a:ext cx="2514600" cy="201168"/>
+          <p:cNvPr id="37" name="Text 33"/>
+          <p:cNvSpPr/>
+          <p:nvPr/>
+        </p:nvSpPr>
+        <p:spPr>
+          <a:xfrm>
+            <a:off x="8385048" y="3410712"/>
+            <a:ext cx="2651760" cy="201168"/>
           </a:xfrm>
           <a:prstGeom prst="rect">
             <a:avLst/>
@@ -11006,14 +12850,14 @@
       </p:sp>
       <p:sp>
         <p:nvSpPr>
-          <p:cNvPr id="34" name="Text 30"/>
-          <p:cNvSpPr/>
-          <p:nvPr/>
-        </p:nvSpPr>
-        <p:spPr>
-          <a:xfrm>
-            <a:off x="7562088" y="4133088"/>
-            <a:ext cx="2514600" cy="758952"/>
+          <p:cNvPr id="38" name="Text 34"/>
+          <p:cNvSpPr/>
+          <p:nvPr/>
+        </p:nvSpPr>
+        <p:spPr>
+          <a:xfrm>
+            <a:off x="8385048" y="3721608"/>
+            <a:ext cx="2651760" cy="667512"/>
           </a:xfrm>
           <a:prstGeom prst="rect">
             <a:avLst/>
@@ -11077,11 +12921,137 @@
             </a:r>
             <a:endParaRPr lang="en-US" sz="820" dirty="0"/>
           </a:p>
-        </p:txBody>
-      </p:sp>
-      <p:sp>
-        <p:nvSpPr>
-          <p:cNvPr id="35" name="Text 31"/>
+          <a:p>
+            <a:pPr indent="0" marL="0">
+              <a:buNone/>
+            </a:pPr>
+            <a:r>
+              <a:rPr lang="en-US" sz="820" dirty="0">
+                <a:solidFill>
+                  <a:srgbClr val="667085"/>
+                </a:solidFill>
+                <a:latin typeface="PingFang SC" pitchFamily="34" charset="0"/>
+                <a:ea typeface="PingFang SC" pitchFamily="34" charset="-122"/>
+                <a:cs typeface="PingFang SC" pitchFamily="34" charset="-120"/>
+              </a:rPr>
+              <a:t>完整 SVG 重新导出 PNG</a:t>
+            </a:r>
+            <a:endParaRPr lang="en-US" sz="820" dirty="0"/>
+          </a:p>
+        </p:txBody>
+      </p:sp>
+      <p:sp>
+        <p:nvSpPr>
+          <p:cNvPr id="39" name="Shape 35"/>
+          <p:cNvSpPr/>
+          <p:nvPr/>
+        </p:nvSpPr>
+        <p:spPr>
+          <a:xfrm>
+            <a:off x="914400" y="4983480"/>
+            <a:ext cx="10241280" cy="502920"/>
+          </a:xfrm>
+          <a:prstGeom prst="roundRect">
+            <a:avLst>
+              <a:gd name="adj" fmla="val 10909"/>
+            </a:avLst>
+          </a:prstGeom>
+          <a:solidFill>
+            <a:srgbClr val="F8FAFC"/>
+          </a:solidFill>
+          <a:ln w="12700">
+            <a:solidFill>
+              <a:srgbClr val="2563EB"/>
+            </a:solidFill>
+            <a:prstDash val="solid"/>
+          </a:ln>
+        </p:spPr>
+      </p:sp>
+      <p:sp>
+        <p:nvSpPr>
+          <p:cNvPr id="40" name="Text 36"/>
+          <p:cNvSpPr/>
+          <p:nvPr/>
+        </p:nvSpPr>
+        <p:spPr>
+          <a:xfrm>
+            <a:off x="1042416" y="5093208"/>
+            <a:ext cx="9985248" cy="164592"/>
+          </a:xfrm>
+          <a:prstGeom prst="rect">
+            <a:avLst/>
+          </a:prstGeom>
+          <a:noFill/>
+          <a:ln/>
+        </p:spPr>
+        <p:txBody>
+          <a:bodyPr wrap="square" lIns="0" tIns="0" rIns="0" bIns="0" rtlCol="0" anchor="ctr">
+            <a:normAutofit/>
+          </a:bodyPr>
+          <a:lstStyle/>
+          <a:p>
+            <a:pPr indent="0" marL="0">
+              <a:buNone/>
+            </a:pPr>
+            <a:r>
+              <a:rPr lang="en-US" sz="770" b="1" dirty="0">
+                <a:solidFill>
+                  <a:srgbClr val="2563EB"/>
+                </a:solidFill>
+                <a:latin typeface="PingFang SC" pitchFamily="34" charset="0"/>
+                <a:ea typeface="PingFang SC" pitchFamily="34" charset="-122"/>
+                <a:cs typeface="PingFang SC" pitchFamily="34" charset="-120"/>
+              </a:rPr>
+              <a:t>日志证据说明</a:t>
+            </a:r>
+            <a:endParaRPr lang="en-US" sz="770" dirty="0"/>
+          </a:p>
+        </p:txBody>
+      </p:sp>
+      <p:sp>
+        <p:nvSpPr>
+          <p:cNvPr id="41" name="Text 37"/>
+          <p:cNvSpPr/>
+          <p:nvPr/>
+        </p:nvSpPr>
+        <p:spPr>
+          <a:xfrm>
+            <a:off x="1042416" y="5312664"/>
+            <a:ext cx="9985248" cy="118872"/>
+          </a:xfrm>
+          <a:prstGeom prst="rect">
+            <a:avLst/>
+          </a:prstGeom>
+          <a:noFill/>
+          <a:ln/>
+        </p:spPr>
+        <p:txBody>
+          <a:bodyPr wrap="square" lIns="127" tIns="127" rIns="127" bIns="127" rtlCol="0" anchor="t">
+            <a:normAutofit/>
+          </a:bodyPr>
+          <a:lstStyle/>
+          <a:p>
+            <a:pPr indent="0" marL="0">
+              <a:buNone/>
+            </a:pPr>
+            <a:r>
+              <a:rPr lang="en-US" sz="710" dirty="0">
+                <a:solidFill>
+                  <a:srgbClr val="172033"/>
+                </a:solidFill>
+                <a:latin typeface="PingFang SC" pitchFamily="34" charset="0"/>
+                <a:ea typeface="PingFang SC" pitchFamily="34" charset="-122"/>
+                <a:cs typeface="PingFang SC" pitchFamily="34" charset="-120"/>
+              </a:rPr>
+              <a:t>这些片段来自脱敏后的 failure_taxonomy.json 与 repair_routes.json；完整模型调用、usage 和响应保存在 llm_raw_responses.jsonl / llm_trace.json。</a:t>
+            </a:r>
+            <a:endParaRPr lang="en-US" sz="710" dirty="0"/>
+          </a:p>
+        </p:txBody>
+      </p:sp>
+      <p:sp>
+        <p:nvSpPr>
+          <p:cNvPr id="42" name="Text 38"/>
           <p:cNvSpPr/>
           <p:nvPr/>
         </p:nvSpPr>
@@ -11120,7 +13090,7 @@
       </p:sp>
       <p:sp>
         <p:nvSpPr>
-          <p:cNvPr id="36" name="Text 32"/>
+          <p:cNvPr id="43" name="Text 39"/>
           <p:cNvSpPr/>
           <p:nvPr/>
         </p:nvSpPr>
@@ -11304,12 +13274,12 @@
         </p:nvSpPr>
         <p:spPr>
           <a:xfrm>
-            <a:off x="822960" y="1234440"/>
-            <a:ext cx="3154680" cy="3886200"/>
+            <a:off x="822960" y="1143000"/>
+            <a:ext cx="3154680" cy="2788920"/>
           </a:xfrm>
           <a:prstGeom prst="roundRect">
             <a:avLst>
-              <a:gd name="adj" fmla="val 2319"/>
+              <a:gd name="adj" fmla="val 2623"/>
             </a:avLst>
           </a:prstGeom>
           <a:solidFill>
@@ -11331,8 +13301,8 @@
         </p:nvSpPr>
         <p:spPr>
           <a:xfrm>
-            <a:off x="822960" y="1234440"/>
-            <a:ext cx="73152" cy="3886200"/>
+            <a:off x="822960" y="1143000"/>
+            <a:ext cx="73152" cy="2788920"/>
           </a:xfrm>
           <a:prstGeom prst="rect">
             <a:avLst/>
@@ -11356,7 +13326,7 @@
         </p:nvSpPr>
         <p:spPr>
           <a:xfrm>
-            <a:off x="1024128" y="1399032"/>
+            <a:off x="1024128" y="1307592"/>
             <a:ext cx="2834640" cy="201168"/>
           </a:xfrm>
           <a:prstGeom prst="rect">
@@ -11397,8 +13367,8 @@
         </p:nvSpPr>
         <p:spPr>
           <a:xfrm>
-            <a:off x="1024128" y="1709928"/>
-            <a:ext cx="2834640" cy="3319272"/>
+            <a:off x="1024128" y="1618488"/>
+            <a:ext cx="2834640" cy="2221992"/>
           </a:xfrm>
           <a:prstGeom prst="rect">
             <a:avLst/>
@@ -11513,6 +13483,29 @@
             </a:r>
             <a:endParaRPr lang="en-US" sz="820" dirty="0"/>
           </a:p>
+          <a:p>
+            <a:pPr indent="0" marL="0">
+              <a:buNone/>
+            </a:pPr>
+            <a:endParaRPr lang="en-US" sz="820" dirty="0"/>
+          </a:p>
+          <a:p>
+            <a:pPr indent="0" marL="0">
+              <a:buNone/>
+            </a:pPr>
+            <a:r>
+              <a:rPr lang="en-US" sz="820" dirty="0">
+                <a:solidFill>
+                  <a:srgbClr val="667085"/>
+                </a:solidFill>
+                <a:latin typeface="PingFang SC" pitchFamily="34" charset="0"/>
+                <a:ea typeface="PingFang SC" pitchFamily="34" charset="-122"/>
+                <a:cs typeface="PingFang SC" pitchFamily="34" charset="-120"/>
+              </a:rPr>
+              <a:t>作用：把“好图标”变成可验证标准</a:t>
+            </a:r>
+            <a:endParaRPr lang="en-US" sz="820" dirty="0"/>
+          </a:p>
         </p:txBody>
       </p:sp>
       <p:sp>
@@ -11523,12 +13516,12 @@
         </p:nvSpPr>
         <p:spPr>
           <a:xfrm>
-            <a:off x="4526280" y="1234440"/>
-            <a:ext cx="3154680" cy="3886200"/>
+            <a:off x="4526280" y="1143000"/>
+            <a:ext cx="3154680" cy="2788920"/>
           </a:xfrm>
           <a:prstGeom prst="roundRect">
             <a:avLst>
-              <a:gd name="adj" fmla="val 2319"/>
+              <a:gd name="adj" fmla="val 2623"/>
             </a:avLst>
           </a:prstGeom>
           <a:solidFill>
@@ -11550,8 +13543,8 @@
         </p:nvSpPr>
         <p:spPr>
           <a:xfrm>
-            <a:off x="4526280" y="1234440"/>
-            <a:ext cx="73152" cy="3886200"/>
+            <a:off x="4526280" y="1143000"/>
+            <a:ext cx="73152" cy="2788920"/>
           </a:xfrm>
           <a:prstGeom prst="rect">
             <a:avLst/>
@@ -11575,7 +13568,7 @@
         </p:nvSpPr>
         <p:spPr>
           <a:xfrm>
-            <a:off x="4727448" y="1399032"/>
+            <a:off x="4727448" y="1307592"/>
             <a:ext cx="2834640" cy="201168"/>
           </a:xfrm>
           <a:prstGeom prst="rect">
@@ -11616,8 +13609,8 @@
         </p:nvSpPr>
         <p:spPr>
           <a:xfrm>
-            <a:off x="4727448" y="1709928"/>
-            <a:ext cx="2834640" cy="3319272"/>
+            <a:off x="4727448" y="1618488"/>
+            <a:ext cx="2834640" cy="2221992"/>
           </a:xfrm>
           <a:prstGeom prst="rect">
             <a:avLst/>
@@ -11715,6 +13708,29 @@
             </a:r>
             <a:endParaRPr lang="en-US" sz="820" dirty="0"/>
           </a:p>
+          <a:p>
+            <a:pPr indent="0" marL="0">
+              <a:buNone/>
+            </a:pPr>
+            <a:endParaRPr lang="en-US" sz="820" dirty="0"/>
+          </a:p>
+          <a:p>
+            <a:pPr indent="0" marL="0">
+              <a:buNone/>
+            </a:pPr>
+            <a:r>
+              <a:rPr lang="en-US" sz="820" dirty="0">
+                <a:solidFill>
+                  <a:srgbClr val="667085"/>
+                </a:solidFill>
+                <a:latin typeface="PingFang SC" pitchFamily="34" charset="0"/>
+                <a:ea typeface="PingFang SC" pitchFamily="34" charset="-122"/>
+                <a:cs typeface="PingFang SC" pitchFamily="34" charset="-120"/>
+              </a:rPr>
+              <a:t>作用：让新 prompt 继承历史经验</a:t>
+            </a:r>
+            <a:endParaRPr lang="en-US" sz="820" dirty="0"/>
+          </a:p>
         </p:txBody>
       </p:sp>
       <p:sp>
@@ -11725,12 +13741,12 @@
         </p:nvSpPr>
         <p:spPr>
           <a:xfrm>
-            <a:off x="8229600" y="1234440"/>
-            <a:ext cx="3154680" cy="3886200"/>
+            <a:off x="8229600" y="1143000"/>
+            <a:ext cx="3154680" cy="2788920"/>
           </a:xfrm>
           <a:prstGeom prst="roundRect">
             <a:avLst>
-              <a:gd name="adj" fmla="val 2319"/>
+              <a:gd name="adj" fmla="val 2623"/>
             </a:avLst>
           </a:prstGeom>
           <a:solidFill>
@@ -11752,8 +13768,8 @@
         </p:nvSpPr>
         <p:spPr>
           <a:xfrm>
-            <a:off x="8229600" y="1234440"/>
-            <a:ext cx="73152" cy="3886200"/>
+            <a:off x="8229600" y="1143000"/>
+            <a:ext cx="73152" cy="2788920"/>
           </a:xfrm>
           <a:prstGeom prst="rect">
             <a:avLst/>
@@ -11777,7 +13793,7 @@
         </p:nvSpPr>
         <p:spPr>
           <a:xfrm>
-            <a:off x="8430768" y="1399032"/>
+            <a:off x="8430768" y="1307592"/>
             <a:ext cx="2834640" cy="201168"/>
           </a:xfrm>
           <a:prstGeom prst="rect">
@@ -11818,8 +13834,8 @@
         </p:nvSpPr>
         <p:spPr>
           <a:xfrm>
-            <a:off x="8430768" y="1709928"/>
-            <a:ext cx="2834640" cy="3319272"/>
+            <a:off x="8430768" y="1618488"/>
+            <a:ext cx="2834640" cy="2221992"/>
           </a:xfrm>
           <a:prstGeom prst="rect">
             <a:avLst/>
@@ -11896,21 +13912,347 @@
                 <a:ea typeface="PingFang SC" pitchFamily="34" charset="-122"/>
                 <a:cs typeface="PingFang SC" pitchFamily="34" charset="-120"/>
               </a:rPr>
-              <a:t>为下一次 prompt 提供上下文</a:t>
+              <a:t>记录 score / tags</a:t>
             </a:r>
             <a:endParaRPr lang="en-US" sz="820" dirty="0"/>
           </a:p>
-        </p:txBody>
-      </p:sp>
-      <p:sp>
-        <p:nvSpPr>
-          <p:cNvPr id="17" name="Text 15"/>
-          <p:cNvSpPr/>
-          <p:nvPr/>
-        </p:nvSpPr>
-        <p:spPr>
-          <a:xfrm>
-            <a:off x="1188720" y="5532120"/>
+          <a:p>
+            <a:pPr indent="0" marL="0">
+              <a:buNone/>
+            </a:pPr>
+            <a:endParaRPr lang="en-US" sz="820" dirty="0"/>
+          </a:p>
+          <a:p>
+            <a:pPr indent="0" marL="0">
+              <a:buNone/>
+            </a:pPr>
+            <a:r>
+              <a:rPr lang="en-US" sz="820" dirty="0">
+                <a:solidFill>
+                  <a:srgbClr val="667085"/>
+                </a:solidFill>
+                <a:latin typeface="PingFang SC" pitchFamily="34" charset="0"/>
+                <a:ea typeface="PingFang SC" pitchFamily="34" charset="-122"/>
+                <a:cs typeface="PingFang SC" pitchFamily="34" charset="-120"/>
+              </a:rPr>
+              <a:t>作用：形成轻量长期记忆</a:t>
+            </a:r>
+            <a:endParaRPr lang="en-US" sz="820" dirty="0"/>
+          </a:p>
+        </p:txBody>
+      </p:sp>
+      <p:sp>
+        <p:nvSpPr>
+          <p:cNvPr id="17" name="Shape 15"/>
+          <p:cNvSpPr/>
+          <p:nvPr/>
+        </p:nvSpPr>
+        <p:spPr>
+          <a:xfrm>
+            <a:off x="914400" y="4224528"/>
+            <a:ext cx="4937760" cy="822960"/>
+          </a:xfrm>
+          <a:prstGeom prst="roundRect">
+            <a:avLst>
+              <a:gd name="adj" fmla="val 5556"/>
+            </a:avLst>
+          </a:prstGeom>
+          <a:solidFill>
+            <a:srgbClr val="111827"/>
+          </a:solidFill>
+          <a:ln w="12700">
+            <a:solidFill>
+              <a:srgbClr val="2563EB"/>
+            </a:solidFill>
+            <a:prstDash val="solid"/>
+          </a:ln>
+        </p:spPr>
+      </p:sp>
+      <p:sp>
+        <p:nvSpPr>
+          <p:cNvPr id="18" name="Text 16"/>
+          <p:cNvSpPr/>
+          <p:nvPr/>
+        </p:nvSpPr>
+        <p:spPr>
+          <a:xfrm>
+            <a:off x="1024128" y="4325112"/>
+            <a:ext cx="4718304" cy="146304"/>
+          </a:xfrm>
+          <a:prstGeom prst="rect">
+            <a:avLst/>
+          </a:prstGeom>
+          <a:noFill/>
+          <a:ln/>
+        </p:spPr>
+        <p:txBody>
+          <a:bodyPr wrap="square" lIns="0" tIns="0" rIns="0" bIns="0" rtlCol="0" anchor="ctr">
+            <a:normAutofit/>
+          </a:bodyPr>
+          <a:lstStyle/>
+          <a:p>
+            <a:pPr indent="0" marL="0">
+              <a:buNone/>
+            </a:pPr>
+            <a:r>
+              <a:rPr lang="en-US" sz="680" b="1" dirty="0">
+                <a:solidFill>
+                  <a:srgbClr val="93C5FD"/>
+                </a:solidFill>
+                <a:latin typeface="PingFang SC" pitchFamily="34" charset="0"/>
+                <a:ea typeface="PingFang SC" pitchFamily="34" charset="-122"/>
+                <a:cs typeface="PingFang SC" pitchFamily="34" charset="-120"/>
+              </a:rPr>
+              <a:t>GenerationGoal 摘录</a:t>
+            </a:r>
+            <a:endParaRPr lang="en-US" sz="680" dirty="0"/>
+          </a:p>
+        </p:txBody>
+      </p:sp>
+      <p:sp>
+        <p:nvSpPr>
+          <p:cNvPr id="19" name="Text 17"/>
+          <p:cNvSpPr/>
+          <p:nvPr/>
+        </p:nvSpPr>
+        <p:spPr>
+          <a:xfrm>
+            <a:off x="1024128" y="4544568"/>
+            <a:ext cx="4718304" cy="438912"/>
+          </a:xfrm>
+          <a:prstGeom prst="rect">
+            <a:avLst/>
+          </a:prstGeom>
+          <a:noFill/>
+          <a:ln/>
+        </p:spPr>
+        <p:txBody>
+          <a:bodyPr wrap="square" lIns="127" tIns="127" rIns="127" bIns="127" rtlCol="0" anchor="t">
+            <a:normAutofit/>
+          </a:bodyPr>
+          <a:lstStyle/>
+          <a:p>
+            <a:pPr indent="0" marL="0">
+              <a:buNone/>
+            </a:pPr>
+            <a:r>
+              <a:rPr lang="en-US" sz="610" dirty="0">
+                <a:solidFill>
+                  <a:srgbClr val="F9FAFB"/>
+                </a:solidFill>
+                <a:latin typeface="Menlo" pitchFamily="34" charset="0"/>
+                <a:ea typeface="Menlo" pitchFamily="34" charset="-122"/>
+                <a:cs typeface="Menlo" pitchFamily="34" charset="-120"/>
+              </a:rPr>
+              <a:t>objective: 256x256 rocket launch icon</a:t>
+            </a:r>
+            <a:endParaRPr lang="en-US" sz="610" dirty="0"/>
+          </a:p>
+          <a:p>
+            <a:pPr indent="0" marL="0">
+              <a:buNone/>
+            </a:pPr>
+            <a:r>
+              <a:rPr lang="en-US" sz="610" dirty="0">
+                <a:solidFill>
+                  <a:srgbClr val="F9FAFB"/>
+                </a:solidFill>
+                <a:latin typeface="Menlo" pitchFamily="34" charset="0"/>
+                <a:ea typeface="Menlo" pitchFamily="34" charset="-122"/>
+                <a:cs typeface="Menlo" pitchFamily="34" charset="-120"/>
+              </a:rPr>
+              <a:t>acceptance: centered rocket, layered flame</a:t>
+            </a:r>
+            <a:endParaRPr lang="en-US" sz="610" dirty="0"/>
+          </a:p>
+          <a:p>
+            <a:pPr indent="0" marL="0">
+              <a:buNone/>
+            </a:pPr>
+            <a:r>
+              <a:rPr lang="en-US" sz="610" dirty="0">
+                <a:solidFill>
+                  <a:srgbClr val="F9FAFB"/>
+                </a:solidFill>
+                <a:latin typeface="Menlo" pitchFamily="34" charset="0"/>
+                <a:ea typeface="Menlo" pitchFamily="34" charset="-122"/>
+                <a:cs typeface="Menlo" pitchFamily="34" charset="-120"/>
+              </a:rPr>
+              <a:t>avoid: static-uniform flame shapes</a:t>
+            </a:r>
+            <a:endParaRPr lang="en-US" sz="610" dirty="0"/>
+          </a:p>
+        </p:txBody>
+      </p:sp>
+      <p:sp>
+        <p:nvSpPr>
+          <p:cNvPr id="20" name="Shape 18"/>
+          <p:cNvSpPr/>
+          <p:nvPr/>
+        </p:nvSpPr>
+        <p:spPr>
+          <a:xfrm>
+            <a:off x="6172200" y="4224528"/>
+            <a:ext cx="4937760" cy="822960"/>
+          </a:xfrm>
+          <a:prstGeom prst="roundRect">
+            <a:avLst>
+              <a:gd name="adj" fmla="val 5556"/>
+            </a:avLst>
+          </a:prstGeom>
+          <a:solidFill>
+            <a:srgbClr val="111827"/>
+          </a:solidFill>
+          <a:ln w="12700">
+            <a:solidFill>
+              <a:srgbClr val="7C3AED"/>
+            </a:solidFill>
+            <a:prstDash val="solid"/>
+          </a:ln>
+        </p:spPr>
+      </p:sp>
+      <p:sp>
+        <p:nvSpPr>
+          <p:cNvPr id="21" name="Text 19"/>
+          <p:cNvSpPr/>
+          <p:nvPr/>
+        </p:nvSpPr>
+        <p:spPr>
+          <a:xfrm>
+            <a:off x="6281928" y="4325112"/>
+            <a:ext cx="4718304" cy="146304"/>
+          </a:xfrm>
+          <a:prstGeom prst="rect">
+            <a:avLst/>
+          </a:prstGeom>
+          <a:noFill/>
+          <a:ln/>
+        </p:spPr>
+        <p:txBody>
+          <a:bodyPr wrap="square" lIns="0" tIns="0" rIns="0" bIns="0" rtlCol="0" anchor="ctr">
+            <a:normAutofit/>
+          </a:bodyPr>
+          <a:lstStyle/>
+          <a:p>
+            <a:pPr indent="0" marL="0">
+              <a:buNone/>
+            </a:pPr>
+            <a:r>
+              <a:rPr lang="en-US" sz="680" b="1" dirty="0">
+                <a:solidFill>
+                  <a:srgbClr val="93C5FD"/>
+                </a:solidFill>
+                <a:latin typeface="PingFang SC" pitchFamily="34" charset="0"/>
+                <a:ea typeface="PingFang SC" pitchFamily="34" charset="-122"/>
+                <a:cs typeface="PingFang SC" pitchFamily="34" charset="-120"/>
+              </a:rPr>
+              <a:t>Memory 摘录</a:t>
+            </a:r>
+            <a:endParaRPr lang="en-US" sz="680" dirty="0"/>
+          </a:p>
+        </p:txBody>
+      </p:sp>
+      <p:sp>
+        <p:nvSpPr>
+          <p:cNvPr id="22" name="Text 20"/>
+          <p:cNvSpPr/>
+          <p:nvPr/>
+        </p:nvSpPr>
+        <p:spPr>
+          <a:xfrm>
+            <a:off x="6281928" y="4544568"/>
+            <a:ext cx="4718304" cy="438912"/>
+          </a:xfrm>
+          <a:prstGeom prst="rect">
+            <a:avLst/>
+          </a:prstGeom>
+          <a:noFill/>
+          <a:ln/>
+        </p:spPr>
+        <p:txBody>
+          <a:bodyPr wrap="square" lIns="127" tIns="127" rIns="127" bIns="127" rtlCol="0" anchor="t">
+            <a:normAutofit/>
+          </a:bodyPr>
+          <a:lstStyle/>
+          <a:p>
+            <a:pPr indent="0" marL="0">
+              <a:buNone/>
+            </a:pPr>
+            <a:r>
+              <a:rPr lang="en-US" sz="610" dirty="0">
+                <a:solidFill>
+                  <a:srgbClr val="F9FAFB"/>
+                </a:solidFill>
+                <a:latin typeface="Menlo" pitchFamily="34" charset="0"/>
+                <a:ea typeface="Menlo" pitchFamily="34" charset="-122"/>
+                <a:cs typeface="Menlo" pitchFamily="34" charset="-120"/>
+              </a:rPr>
+              <a:t>success_patterns:</a:t>
+            </a:r>
+            <a:endParaRPr lang="en-US" sz="610" dirty="0"/>
+          </a:p>
+          <a:p>
+            <a:pPr indent="0" marL="0">
+              <a:buNone/>
+            </a:pPr>
+            <a:r>
+              <a:rPr lang="en-US" sz="610" dirty="0">
+                <a:solidFill>
+                  <a:srgbClr val="F9FAFB"/>
+                </a:solidFill>
+                <a:latin typeface="Menlo" pitchFamily="34" charset="0"/>
+                <a:ea typeface="Menlo" pitchFamily="34" charset="-122"/>
+                <a:cs typeface="Menlo" pitchFamily="34" charset="-120"/>
+              </a:rPr>
+              <a:t>- centered-upright-rocket</a:t>
+            </a:r>
+            <a:endParaRPr lang="en-US" sz="610" dirty="0"/>
+          </a:p>
+          <a:p>
+            <a:pPr indent="0" marL="0">
+              <a:buNone/>
+            </a:pPr>
+            <a:r>
+              <a:rPr lang="en-US" sz="610" dirty="0">
+                <a:solidFill>
+                  <a:srgbClr val="F9FAFB"/>
+                </a:solidFill>
+                <a:latin typeface="Menlo" pitchFamily="34" charset="0"/>
+                <a:ea typeface="Menlo" pitchFamily="34" charset="-122"/>
+                <a:cs typeface="Menlo" pitchFamily="34" charset="-120"/>
+              </a:rPr>
+              <a:t>- layered-sweeping-flame-curves</a:t>
+            </a:r>
+            <a:endParaRPr lang="en-US" sz="610" dirty="0"/>
+          </a:p>
+          <a:p>
+            <a:pPr indent="0" marL="0">
+              <a:buNone/>
+            </a:pPr>
+            <a:r>
+              <a:rPr lang="en-US" sz="610" dirty="0">
+                <a:solidFill>
+                  <a:srgbClr val="F9FAFB"/>
+                </a:solidFill>
+                <a:latin typeface="Menlo" pitchFamily="34" charset="0"/>
+                <a:ea typeface="Menlo" pitchFamily="34" charset="-122"/>
+                <a:cs typeface="Menlo" pitchFamily="34" charset="-120"/>
+              </a:rPr>
+              <a:t>user_feedback: simplify-window</a:t>
+            </a:r>
+            <a:endParaRPr lang="en-US" sz="610" dirty="0"/>
+          </a:p>
+        </p:txBody>
+      </p:sp>
+      <p:sp>
+        <p:nvSpPr>
+          <p:cNvPr id="23" name="Text 21"/>
+          <p:cNvSpPr/>
+          <p:nvPr/>
+        </p:nvSpPr>
+        <p:spPr>
+          <a:xfrm>
+            <a:off x="1188720" y="5559552"/>
             <a:ext cx="9784080" cy="256032"/>
           </a:xfrm>
           <a:prstGeom prst="rect">
@@ -11943,7 +14285,7 @@
       </p:sp>
       <p:sp>
         <p:nvSpPr>
-          <p:cNvPr id="18" name="Text 16"/>
+          <p:cNvPr id="24" name="Text 22"/>
           <p:cNvSpPr/>
           <p:nvPr/>
         </p:nvSpPr>
@@ -11982,7 +14324,7 @@
       </p:sp>
       <p:sp>
         <p:nvSpPr>
-          <p:cNvPr id="19" name="Text 17"/>
+          <p:cNvPr id="25" name="Text 23"/>
           <p:cNvSpPr/>
           <p:nvPr/>
         </p:nvSpPr>
@@ -12709,6 +15051,23 @@
             </a:r>
             <a:endParaRPr lang="en-US" sz="820" dirty="0"/>
           </a:p>
+          <a:p>
+            <a:pPr indent="0" marL="0">
+              <a:buNone/>
+            </a:pPr>
+            <a:r>
+              <a:rPr lang="en-US" sz="820" dirty="0">
+                <a:solidFill>
+                  <a:srgbClr val="667085"/>
+                </a:solidFill>
+                <a:latin typeface="PingFang SC" pitchFamily="34" charset="0"/>
+                <a:ea typeface="PingFang SC" pitchFamily="34" charset="-122"/>
+                <a:cs typeface="PingFang SC" pitchFamily="34" charset="-120"/>
+              </a:rPr>
+              <a:t>Final validity: 100%</a:t>
+            </a:r>
+            <a:endParaRPr lang="en-US" sz="820" dirty="0"/>
+          </a:p>
         </p:txBody>
       </p:sp>
       <p:sp>
@@ -12719,12 +15078,12 @@
         </p:nvSpPr>
         <p:spPr>
           <a:xfrm>
-            <a:off x="777240" y="3337560"/>
-            <a:ext cx="3154680" cy="1417320"/>
+            <a:off x="777240" y="3246120"/>
+            <a:ext cx="3154680" cy="1572768"/>
           </a:xfrm>
           <a:prstGeom prst="roundRect">
             <a:avLst>
-              <a:gd name="adj" fmla="val 5161"/>
+              <a:gd name="adj" fmla="val 4651"/>
             </a:avLst>
           </a:prstGeom>
           <a:solidFill>
@@ -12746,8 +15105,8 @@
         </p:nvSpPr>
         <p:spPr>
           <a:xfrm>
-            <a:off x="777240" y="3337560"/>
-            <a:ext cx="73152" cy="1417320"/>
+            <a:off x="777240" y="3246120"/>
+            <a:ext cx="73152" cy="1572768"/>
           </a:xfrm>
           <a:prstGeom prst="rect">
             <a:avLst/>
@@ -12771,7 +15130,7 @@
         </p:nvSpPr>
         <p:spPr>
           <a:xfrm>
-            <a:off x="978408" y="3502152"/>
+            <a:off x="978408" y="3410712"/>
             <a:ext cx="2834640" cy="201168"/>
           </a:xfrm>
           <a:prstGeom prst="rect">
@@ -12812,8 +15171,8 @@
         </p:nvSpPr>
         <p:spPr>
           <a:xfrm>
-            <a:off x="978408" y="3813048"/>
-            <a:ext cx="2834640" cy="850392"/>
+            <a:off x="978408" y="3721608"/>
+            <a:ext cx="2834640" cy="1005840"/>
           </a:xfrm>
           <a:prstGeom prst="rect">
             <a:avLst/>
@@ -12877,6 +15236,23 @@
             </a:r>
             <a:endParaRPr lang="en-US" sz="820" dirty="0"/>
           </a:p>
+          <a:p>
+            <a:pPr indent="0" marL="0">
+              <a:buNone/>
+            </a:pPr>
+            <a:r>
+              <a:rPr lang="en-US" sz="820" dirty="0">
+                <a:solidFill>
+                  <a:srgbClr val="667085"/>
+                </a:solidFill>
+                <a:latin typeface="PingFang SC" pitchFamily="34" charset="0"/>
+                <a:ea typeface="PingFang SC" pitchFamily="34" charset="-122"/>
+                <a:cs typeface="PingFang SC" pitchFamily="34" charset="-120"/>
+              </a:rPr>
+              <a:t>每个 winner 都有 rationale</a:t>
+            </a:r>
+            <a:endParaRPr lang="en-US" sz="820" dirty="0"/>
+          </a:p>
         </p:txBody>
       </p:sp>
       <p:sp>
@@ -12887,12 +15263,12 @@
         </p:nvSpPr>
         <p:spPr>
           <a:xfrm>
-            <a:off x="4526280" y="3337560"/>
-            <a:ext cx="3154680" cy="1417320"/>
+            <a:off x="4526280" y="3246120"/>
+            <a:ext cx="3154680" cy="1572768"/>
           </a:xfrm>
           <a:prstGeom prst="roundRect">
             <a:avLst>
-              <a:gd name="adj" fmla="val 5161"/>
+              <a:gd name="adj" fmla="val 4651"/>
             </a:avLst>
           </a:prstGeom>
           <a:solidFill>
@@ -12914,8 +15290,8 @@
         </p:nvSpPr>
         <p:spPr>
           <a:xfrm>
-            <a:off x="4526280" y="3337560"/>
-            <a:ext cx="73152" cy="1417320"/>
+            <a:off x="4526280" y="3246120"/>
+            <a:ext cx="73152" cy="1572768"/>
           </a:xfrm>
           <a:prstGeom prst="rect">
             <a:avLst/>
@@ -12939,7 +15315,7 @@
         </p:nvSpPr>
         <p:spPr>
           <a:xfrm>
-            <a:off x="4727448" y="3502152"/>
+            <a:off x="4727448" y="3410712"/>
             <a:ext cx="2834640" cy="201168"/>
           </a:xfrm>
           <a:prstGeom prst="rect">
@@ -12980,8 +15356,8 @@
         </p:nvSpPr>
         <p:spPr>
           <a:xfrm>
-            <a:off x="4727448" y="3813048"/>
-            <a:ext cx="2834640" cy="850392"/>
+            <a:off x="4727448" y="3721608"/>
+            <a:ext cx="2834640" cy="1005840"/>
           </a:xfrm>
           <a:prstGeom prst="rect">
             <a:avLst/>
@@ -13041,6 +15417,23 @@
                 <a:ea typeface="PingFang SC" pitchFamily="34" charset="-122"/>
                 <a:cs typeface="PingFang SC" pitchFamily="34" charset="-120"/>
               </a:rPr>
+              <a:t>Cloud 多轮 repair 提升</a:t>
+            </a:r>
+            <a:endParaRPr lang="en-US" sz="820" dirty="0"/>
+          </a:p>
+          <a:p>
+            <a:pPr indent="0" marL="0">
+              <a:buNone/>
+            </a:pPr>
+            <a:r>
+              <a:rPr lang="en-US" sz="820" dirty="0">
+                <a:solidFill>
+                  <a:srgbClr val="667085"/>
+                </a:solidFill>
+                <a:latin typeface="PingFang SC" pitchFamily="34" charset="0"/>
+                <a:ea typeface="PingFang SC" pitchFamily="34" charset="-122"/>
+                <a:cs typeface="PingFang SC" pitchFamily="34" charset="-120"/>
+              </a:rPr>
               <a:t>说明 repair loop 能处理真实失败</a:t>
             </a:r>
             <a:endParaRPr lang="en-US" sz="820" dirty="0"/>
@@ -13055,12 +15448,12 @@
         </p:nvSpPr>
         <p:spPr>
           <a:xfrm>
-            <a:off x="8275320" y="3337560"/>
-            <a:ext cx="2743200" cy="1417320"/>
+            <a:off x="8275320" y="3246120"/>
+            <a:ext cx="2743200" cy="1572768"/>
           </a:xfrm>
           <a:prstGeom prst="roundRect">
             <a:avLst>
-              <a:gd name="adj" fmla="val 5161"/>
+              <a:gd name="adj" fmla="val 4651"/>
             </a:avLst>
           </a:prstGeom>
           <a:solidFill>
@@ -13082,8 +15475,8 @@
         </p:nvSpPr>
         <p:spPr>
           <a:xfrm>
-            <a:off x="8275320" y="3337560"/>
-            <a:ext cx="73152" cy="1417320"/>
+            <a:off x="8275320" y="3246120"/>
+            <a:ext cx="73152" cy="1572768"/>
           </a:xfrm>
           <a:prstGeom prst="rect">
             <a:avLst/>
@@ -13107,7 +15500,7 @@
         </p:nvSpPr>
         <p:spPr>
           <a:xfrm>
-            <a:off x="8476488" y="3502152"/>
+            <a:off x="8476488" y="3410712"/>
             <a:ext cx="2423160" cy="201168"/>
           </a:xfrm>
           <a:prstGeom prst="rect">
@@ -13148,8 +15541,8 @@
         </p:nvSpPr>
         <p:spPr>
           <a:xfrm>
-            <a:off x="8476488" y="3813048"/>
-            <a:ext cx="2423160" cy="850392"/>
+            <a:off x="8476488" y="3721608"/>
+            <a:ext cx="2423160" cy="1005840"/>
           </a:xfrm>
           <a:prstGeom prst="rect">
             <a:avLst/>
@@ -13209,7 +15602,7 @@
                 <a:ea typeface="PingFang SC" pitchFamily="34" charset="-122"/>
                 <a:cs typeface="PingFang SC" pitchFamily="34" charset="-120"/>
               </a:rPr>
-              <a:t>raw responses</a:t>
+              <a:t>llm_raw_responses.jsonl</a:t>
             </a:r>
             <a:endParaRPr lang="en-US" sz="820" dirty="0"/>
           </a:p>
@@ -13234,7 +15627,116 @@
       </p:sp>
       <p:sp>
         <p:nvSpPr>
-          <p:cNvPr id="33" name="Text 27"/>
+          <p:cNvPr id="33" name="Shape 27"/>
+          <p:cNvSpPr/>
+          <p:nvPr/>
+        </p:nvSpPr>
+        <p:spPr>
+          <a:xfrm>
+            <a:off x="960120" y="5074920"/>
+            <a:ext cx="10241280" cy="438912"/>
+          </a:xfrm>
+          <a:prstGeom prst="roundRect">
+            <a:avLst>
+              <a:gd name="adj" fmla="val 10417"/>
+            </a:avLst>
+          </a:prstGeom>
+          <a:solidFill>
+            <a:srgbClr val="111827"/>
+          </a:solidFill>
+          <a:ln w="12700">
+            <a:solidFill>
+              <a:srgbClr val="0F172A"/>
+            </a:solidFill>
+            <a:prstDash val="solid"/>
+          </a:ln>
+        </p:spPr>
+      </p:sp>
+      <p:sp>
+        <p:nvSpPr>
+          <p:cNvPr id="34" name="Text 28"/>
+          <p:cNvSpPr/>
+          <p:nvPr/>
+        </p:nvSpPr>
+        <p:spPr>
+          <a:xfrm>
+            <a:off x="1069848" y="5175504"/>
+            <a:ext cx="10021824" cy="146304"/>
+          </a:xfrm>
+          <a:prstGeom prst="rect">
+            <a:avLst/>
+          </a:prstGeom>
+          <a:noFill/>
+          <a:ln/>
+        </p:spPr>
+        <p:txBody>
+          <a:bodyPr wrap="square" lIns="0" tIns="0" rIns="0" bIns="0" rtlCol="0" anchor="ctr">
+            <a:normAutofit/>
+          </a:bodyPr>
+          <a:lstStyle/>
+          <a:p>
+            <a:pPr indent="0" marL="0">
+              <a:buNone/>
+            </a:pPr>
+            <a:r>
+              <a:rPr lang="en-US" sz="680" b="1" dirty="0">
+                <a:solidFill>
+                  <a:srgbClr val="93C5FD"/>
+                </a:solidFill>
+                <a:latin typeface="PingFang SC" pitchFamily="34" charset="0"/>
+                <a:ea typeface="PingFang SC" pitchFamily="34" charset="-122"/>
+                <a:cs typeface="PingFang SC" pitchFamily="34" charset="-120"/>
+              </a:rPr>
+              <a:t>统计口径</a:t>
+            </a:r>
+            <a:endParaRPr lang="en-US" sz="680" dirty="0"/>
+          </a:p>
+        </p:txBody>
+      </p:sp>
+      <p:sp>
+        <p:nvSpPr>
+          <p:cNvPr id="35" name="Text 29"/>
+          <p:cNvSpPr/>
+          <p:nvPr/>
+        </p:nvSpPr>
+        <p:spPr>
+          <a:xfrm>
+            <a:off x="1069848" y="5394960"/>
+            <a:ext cx="10021824" cy="54864"/>
+          </a:xfrm>
+          <a:prstGeom prst="rect">
+            <a:avLst/>
+          </a:prstGeom>
+          <a:noFill/>
+          <a:ln/>
+        </p:spPr>
+        <p:txBody>
+          <a:bodyPr wrap="square" lIns="127" tIns="127" rIns="127" bIns="127" rtlCol="0" anchor="t">
+            <a:normAutofit/>
+          </a:bodyPr>
+          <a:lstStyle/>
+          <a:p>
+            <a:pPr indent="0" marL="0">
+              <a:buNone/>
+            </a:pPr>
+            <a:r>
+              <a:rPr lang="en-US" sz="610" dirty="0">
+                <a:solidFill>
+                  <a:srgbClr val="F9FAFB"/>
+                </a:solidFill>
+                <a:latin typeface="Menlo" pitchFamily="34" charset="0"/>
+                <a:ea typeface="Menlo" pitchFamily="34" charset="-122"/>
+                <a:cs typeface="Menlo" pitchFamily="34" charset="-120"/>
+              </a:rPr>
+              <a:t>Report snapshot = 4 main Web runs; later outputs/web runs are used only as demo evidence, not mixed into the formal aggregate.</a:t>
+            </a:r>
+            <a:endParaRPr lang="en-US" sz="610" dirty="0"/>
+          </a:p>
+        </p:txBody>
+      </p:sp>
+      <p:sp>
+        <p:nvSpPr>
+          <p:cNvPr id="36" name="Text 30"/>
           <p:cNvSpPr/>
           <p:nvPr/>
         </p:nvSpPr>
@@ -13273,7 +15775,7 @@
       </p:sp>
       <p:sp>
         <p:nvSpPr>
-          <p:cNvPr id="34" name="Text 28"/>
+          <p:cNvPr id="37" name="Text 31"/>
           <p:cNvSpPr/>
           <p:nvPr/>
         </p:nvSpPr>
@@ -13312,7 +15814,7 @@
       </p:sp>
       <p:sp>
         <p:nvSpPr>
-          <p:cNvPr id="35" name="Text 29"/>
+          <p:cNvPr id="38" name="Text 32"/>
           <p:cNvSpPr/>
           <p:nvPr/>
         </p:nvSpPr>
